--- a/outputs/Final PPT-G_.pptx
+++ b/outputs/Final PPT-G_.pptx
@@ -2,27 +2,27 @@
 <file path=ppt/presentation.xml><?xml version="1.0" encoding="utf-8"?>
 <p:presentation xmlns:p="http://schemas.openxmlformats.org/presentationml/2006/main">
   <p:sldMasterIdLst>
-    <p:sldMasterId xmlns:r="http://schemas.openxmlformats.org/officeDocument/2006/relationships" id="2147483648" r:id="R0ebe9cf6fe794ef3"/>
+    <p:sldMasterId xmlns:r="http://schemas.openxmlformats.org/officeDocument/2006/relationships" id="2147483648" r:id="R3842eb6532cf4f27"/>
   </p:sldMasterIdLst>
   <p:notesMasterIdLst>
-    <p:notesMasterId xmlns:r="http://schemas.openxmlformats.org/officeDocument/2006/relationships" r:id="R1c7dc969327340b4"/>
+    <p:notesMasterId xmlns:r="http://schemas.openxmlformats.org/officeDocument/2006/relationships" r:id="Rc4ed32cfeeb34ebd"/>
   </p:notesMasterIdLst>
   <p:sldIdLst>
-    <p:sldId xmlns:r="http://schemas.openxmlformats.org/officeDocument/2006/relationships" id="256" r:id="R94b060d21926468e"/>
-    <p:sldId xmlns:r="http://schemas.openxmlformats.org/officeDocument/2006/relationships" id="257" r:id="R0d382f58ee0a4818"/>
-    <p:sldId xmlns:r="http://schemas.openxmlformats.org/officeDocument/2006/relationships" id="258" r:id="R06e3777f3e0c45a1"/>
-    <p:sldId xmlns:r="http://schemas.openxmlformats.org/officeDocument/2006/relationships" id="259" r:id="R03a1a06ef5f3488e"/>
-    <p:sldId xmlns:r="http://schemas.openxmlformats.org/officeDocument/2006/relationships" id="260" r:id="R552cc88fd3cf4160"/>
-    <p:sldId xmlns:r="http://schemas.openxmlformats.org/officeDocument/2006/relationships" id="261" r:id="R5fbcfec2e26b4ac5"/>
-    <p:sldId xmlns:r="http://schemas.openxmlformats.org/officeDocument/2006/relationships" id="262" r:id="Rf7ba42a0cc4b4c38"/>
-    <p:sldId xmlns:r="http://schemas.openxmlformats.org/officeDocument/2006/relationships" id="263" r:id="Re55254667d8242b9"/>
-    <p:sldId xmlns:r="http://schemas.openxmlformats.org/officeDocument/2006/relationships" id="264" r:id="R7e70d6ac10ca4c89"/>
-    <p:sldId xmlns:r="http://schemas.openxmlformats.org/officeDocument/2006/relationships" id="265" r:id="R7a8c4e4292a247cb"/>
-    <p:sldId xmlns:r="http://schemas.openxmlformats.org/officeDocument/2006/relationships" id="266" r:id="R6eadc4a1b47d4652"/>
-    <p:sldId xmlns:r="http://schemas.openxmlformats.org/officeDocument/2006/relationships" id="267" r:id="R4e77ed66612c4da7"/>
-    <p:sldId xmlns:r="http://schemas.openxmlformats.org/officeDocument/2006/relationships" id="268" r:id="Rc95851bd08fb4106"/>
-    <p:sldId xmlns:r="http://schemas.openxmlformats.org/officeDocument/2006/relationships" id="269" r:id="R01729d6fa7c646b8"/>
-    <p:sldId xmlns:r="http://schemas.openxmlformats.org/officeDocument/2006/relationships" id="270" r:id="R2e4e5104fa5b4d1e"/>
+    <p:sldId xmlns:r="http://schemas.openxmlformats.org/officeDocument/2006/relationships" id="256" r:id="R8833c6909efc402b"/>
+    <p:sldId xmlns:r="http://schemas.openxmlformats.org/officeDocument/2006/relationships" id="257" r:id="Rabdf0e08e3bb433b"/>
+    <p:sldId xmlns:r="http://schemas.openxmlformats.org/officeDocument/2006/relationships" id="258" r:id="R18a431efc5914375"/>
+    <p:sldId xmlns:r="http://schemas.openxmlformats.org/officeDocument/2006/relationships" id="259" r:id="R3e16b2d98c374b7a"/>
+    <p:sldId xmlns:r="http://schemas.openxmlformats.org/officeDocument/2006/relationships" id="260" r:id="R6c504e0504c8490d"/>
+    <p:sldId xmlns:r="http://schemas.openxmlformats.org/officeDocument/2006/relationships" id="261" r:id="R1aad2a9880084db1"/>
+    <p:sldId xmlns:r="http://schemas.openxmlformats.org/officeDocument/2006/relationships" id="262" r:id="Rf4dd7f96ca994a34"/>
+    <p:sldId xmlns:r="http://schemas.openxmlformats.org/officeDocument/2006/relationships" id="263" r:id="R63dcea30b65b49d3"/>
+    <p:sldId xmlns:r="http://schemas.openxmlformats.org/officeDocument/2006/relationships" id="264" r:id="R98a9f4b19a004e70"/>
+    <p:sldId xmlns:r="http://schemas.openxmlformats.org/officeDocument/2006/relationships" id="265" r:id="R6f95987176a94f75"/>
+    <p:sldId xmlns:r="http://schemas.openxmlformats.org/officeDocument/2006/relationships" id="266" r:id="R56675af1245249e4"/>
+    <p:sldId xmlns:r="http://schemas.openxmlformats.org/officeDocument/2006/relationships" id="267" r:id="Rcd21797062464bfe"/>
+    <p:sldId xmlns:r="http://schemas.openxmlformats.org/officeDocument/2006/relationships" id="268" r:id="Raa60c73d946246dc"/>
+    <p:sldId xmlns:r="http://schemas.openxmlformats.org/officeDocument/2006/relationships" id="269" r:id="R8bfe7911d9c54a50"/>
+    <p:sldId xmlns:r="http://schemas.openxmlformats.org/officeDocument/2006/relationships" id="270" r:id="R17d48282b8df49c8"/>
   </p:sldIdLst>
   <p:sldSz cx="9144000" cy="5143500"/>
   <p:notesSz cx="6858000" cy="9144000"/>
@@ -496,7 +496,13 @@
           <a:lstStyle xmlns:a="http://schemas.openxmlformats.org/drawingml/2006/main"/>
           <a:p xmlns:a="http://schemas.openxmlformats.org/drawingml/2006/main">
             <a:r>
-              <a:t>Open with the research question and answer it immediately. The part-aware loss changed its internal attention proxy slightly, but it did not improve the output-level target metric. ‘Not demonstrated’ does not mean ‘proved impossible.’</a:t>
+              <a:t>Our earlier custom part-aware loss did not demonstrate an output-level gain, so we changed the final-week strategy: find a published method built directly on DM-GAN, obtain its author-released checkpoint, and test it under one fixed evaluator. The main result is DM-GAN-MDD. It beats DM-GAN on both primary metrics when conditioning augmentation is matched, but it does not dominate DM-GAN under each repository's native default. That condition is the central message.</a:t>
+            </a:r>
+            <a:endParaRPr/>
+          </a:p>
+          <a:p xmlns:a="http://schemas.openxmlformats.org/drawingml/2006/main">
+            <a:r>
+              <a:t/>
             </a:r>
             <a:endParaRPr/>
           </a:p>
@@ -508,7 +514,19 @@
           </a:p>
           <a:p xmlns:a="http://schemas.openxmlformats.org/drawingml/2006/main">
             <a:r>
-              <a:t>Local final experiment: /home/zjk/Desktop/DM-GANS/artifacts/session7/ablation/report.json</a:t>
+              <a:t>/home/zjk/Desktop/DM-GANS/artifacts/final/mdd_matched_mean_30k/report.json</a:t>
+            </a:r>
+            <a:endParaRPr/>
+          </a:p>
+          <a:p xmlns:a="http://schemas.openxmlformats.org/drawingml/2006/main">
+            <a:r>
+              <a:t>/home/zjk/Desktop/DM-GANS/artifacts/final/mdd_native_30k/report.json</a:t>
+            </a:r>
+            <a:endParaRPr/>
+          </a:p>
+          <a:p xmlns:a="http://schemas.openxmlformats.org/drawingml/2006/main">
+            <a:r>
+              <a:t>https://doi.org/10.1109/TMM.2021.3075997</a:t>
             </a:r>
             <a:endParaRPr/>
           </a:p>
@@ -579,7 +597,13 @@
           <a:lstStyle xmlns:a="http://schemas.openxmlformats.org/drawingml/2006/main"/>
           <a:p xmlns:a="http://schemas.openxmlformats.org/drawingml/2006/main">
             <a:r>
-              <a:t>Read direction before magnitude. Part-colour improves only for seed 20260824 and falls for the other two. FID moves in the wrong direction for all three. R-precision is mixed. The changes are tiny, but the targeted effect is not consistently positive.</a:t>
+              <a:t>With both models using the conditioning mean, FID falls from 17.1708 to 16.1543, and R-precision rises from 79.10 to 79.77 percent. The R interval is plus 0.134 to plus 1.225 percentage points. Under the pre-specified rule, MDD is supported as better in this matched-mean setting.</a:t>
+            </a:r>
+            <a:endParaRPr/>
+          </a:p>
+          <a:p xmlns:a="http://schemas.openxmlformats.org/drawingml/2006/main">
+            <a:r>
+              <a:t/>
             </a:r>
             <a:endParaRPr/>
           </a:p>
@@ -591,7 +615,13 @@
           </a:p>
           <a:p xmlns:a="http://schemas.openxmlformats.org/drawingml/2006/main">
             <a:r>
-              <a:t>Per-seed results: /home/zjk/Desktop/DM-GANS/artifacts/session7/ablation/report.json</a:t>
+              <a:t>/home/zjk/Desktop/DM-GANS/artifacts/final/mdd_matched_mean_30k/report.json</a:t>
+            </a:r>
+            <a:endParaRPr/>
+          </a:p>
+          <a:p xmlns:a="http://schemas.openxmlformats.org/drawingml/2006/main">
+            <a:r>
+              <a:t>/home/zjk/Desktop/DM-GANS/artifacts/final/mdd_matched_mean_30k/SUCCESSOR_CHECKPOINT_EVALUATION.md</a:t>
             </a:r>
             <a:endParaRPr/>
           </a:p>
@@ -662,7 +692,13 @@
           <a:lstStyle xmlns:a="http://schemas.openxmlformats.org/drawingml/2006/main"/>
           <a:p xmlns:a="http://schemas.openxmlformats.org/drawingml/2006/main">
             <a:r>
-              <a:t>The part-colour interval crosses zero, so both a tiny benefit and a tiny harm remain compatible with the data. Aggregate McNemar p-values are 0.327 for colour and 0.354 for R-precision. FID has no improvement signal. The output-level benefit was not demonstrated.</a:t>
+              <a:t>Under each repository's native default, MDD gains 2.93 R-precision points but FID becomes 0.4496 worse. It therefore fails the two-metric rule. This is not a contradiction: this comparison changes both the saved checkpoint and the conditioning policy.</a:t>
+            </a:r>
+            <a:endParaRPr/>
+          </a:p>
+          <a:p xmlns:a="http://schemas.openxmlformats.org/drawingml/2006/main">
+            <a:r>
+              <a:t/>
             </a:r>
             <a:endParaRPr/>
           </a:p>
@@ -674,7 +710,13 @@
           </a:p>
           <a:p xmlns:a="http://schemas.openxmlformats.org/drawingml/2006/main">
             <a:r>
-              <a:t>Aggregate statistics: /home/zjk/Desktop/DM-GANS/artifacts/session7/ablation/report.json</a:t>
+              <a:t>/home/zjk/Desktop/DM-GANS/artifacts/final/mdd_native_30k/report.json</a:t>
+            </a:r>
+            <a:endParaRPr/>
+          </a:p>
+          <a:p xmlns:a="http://schemas.openxmlformats.org/drawingml/2006/main">
+            <a:r>
+              <a:t>/home/zjk/Desktop/DM-GANS/artifacts/final/mdd_native_30k/SUCCESSOR_CHECKPOINT_EVALUATION.md</a:t>
             </a:r>
             <a:endParaRPr/>
           </a:p>
@@ -745,7 +787,13 @@
           <a:lstStyle xmlns:a="http://schemas.openxmlformats.org/drawingml/2006/main"/>
           <a:p xmlns:a="http://schemas.openxmlformats.org/drawingml/2006/main">
             <a:r>
-              <a:t>Lower attention CE confirms that gradients reached the intended mechanism, but the relative change is only about 0.05%, and support-mass movement is effectively zero. Because CE is directly optimized, it cannot by itself validate generated-image improvement.</a:t>
+              <a:t>The baseline itself shows why policy matters. Removing CA sampling raises R-precision by 2.253 points but worsens FID by 1.466. Relative to that mean-conditioned baseline, MDD recovers 1.016 FID and adds another 0.673 R point.</a:t>
+            </a:r>
+            <a:endParaRPr/>
+          </a:p>
+          <a:p xmlns:a="http://schemas.openxmlformats.org/drawingml/2006/main">
+            <a:r>
+              <a:t/>
             </a:r>
             <a:endParaRPr/>
           </a:p>
@@ -757,7 +805,13 @@
           </a:p>
           <a:p xmlns:a="http://schemas.openxmlformats.org/drawingml/2006/main">
             <a:r>
-              <a:t>Attention metrics: /home/zjk/Desktop/DM-GANS/artifacts/session7/ablation/report.json</a:t>
+              <a:t>/home/zjk/Desktop/DM-GANS/artifacts/final/mdd_matched_mean_30k/report.json</a:t>
+            </a:r>
+            <a:endParaRPr/>
+          </a:p>
+          <a:p xmlns:a="http://schemas.openxmlformats.org/drawingml/2006/main">
+            <a:r>
+              <a:t>/home/zjk/Desktop/DM-GANS/artifacts/final/mdd_native_30k/report.json</a:t>
             </a:r>
             <a:endParaRPr/>
           </a:p>
@@ -828,7 +882,13 @@
           <a:lstStyle xmlns:a="http://schemas.openxmlformats.org/drawingml/2006/main"/>
           <a:p xmlns:a="http://schemas.openxmlformats.org/drawingml/2006/main">
             <a:r>
-              <a:t>These are the complete first fixed evaluation cases for seed 20260824, not images selected after ranking quality. B is top and C is bottom. Differences are subtle and mixed. Do not infer significance from visual inspection.</a:t>
+              <a:t>Secondary validations show why one metric is unsafe. Official CL improves FID but loses 5.55 R points; DAE gains 9.70 R points but worsens FID by 6.287. Local CL2 is small and inconsistent across three paired seeds. The preview shows the fixed first cases, not selected winners.</a:t>
+            </a:r>
+            <a:endParaRPr/>
+          </a:p>
+          <a:p xmlns:a="http://schemas.openxmlformats.org/drawingml/2006/main">
+            <a:r>
+              <a:t/>
             </a:r>
             <a:endParaRPr/>
           </a:p>
@@ -840,7 +900,25 @@
           </a:p>
           <a:p xmlns:a="http://schemas.openxmlformats.org/drawingml/2006/main">
             <a:r>
-              <a:t>Fixed seed 20260824 grid: /home/zjk/Desktop/DM-GANS/artifacts/session7/ablation/seed_20260824/evaluation_preview_baseline_top_part_bottom.png</a:t>
+              <a:t>/home/zjk/Desktop/DM-GANS/artifacts/final/contrastive_checkpoint_evaluation/report.json</a:t>
+            </a:r>
+            <a:endParaRPr/>
+          </a:p>
+          <a:p xmlns:a="http://schemas.openxmlformats.org/drawingml/2006/main">
+            <a:r>
+              <a:t>/home/zjk/Desktop/DM-GANS/artifacts/final/dae_checkpoint_evaluation_netG_3s/report.json</a:t>
+            </a:r>
+            <a:endParaRPr/>
+          </a:p>
+          <a:p xmlns:a="http://schemas.openxmlformats.org/drawingml/2006/main">
+            <a:r>
+              <a:t>/home/zjk/Desktop/DM-GANS/artifacts/final/contrastive_finetune_evaluation/aggregate_report.json</a:t>
+            </a:r>
+            <a:endParaRPr/>
+          </a:p>
+          <a:p xmlns:a="http://schemas.openxmlformats.org/drawingml/2006/main">
+            <a:r>
+              <a:t>/home/zjk/Desktop/DM-GANS/artifacts/final/mdd_matched_mean_30k/paired_preview_256.png</a:t>
             </a:r>
             <a:endParaRPr/>
           </a:p>
@@ -911,7 +989,13 @@
           <a:lstStyle xmlns:a="http://schemas.openxmlformats.org/drawingml/2006/main"/>
           <a:p xmlns:a="http://schemas.openxmlformats.org/drawingml/2006/main">
             <a:r>
-              <a:t>The study supports a fair controlled fine-tuning comparison and the statement that no reliable output gain was observed here. It does not establish universal failure, a full-training outcome, or generated-image keypoint accuracy. C also consumes extra landmark labels.</a:t>
+              <a:t>The evidence supports a precise statement: under the same deterministic conditioning policy, this MDD checkpoint lowers FID and improves R-precision. It does not establish native dominance, the isolated causal effect of the MDD loss, or multi-seed training robustness.</a:t>
+            </a:r>
+            <a:endParaRPr/>
+          </a:p>
+          <a:p xmlns:a="http://schemas.openxmlformats.org/drawingml/2006/main">
+            <a:r>
+              <a:t/>
             </a:r>
             <a:endParaRPr/>
           </a:p>
@@ -923,13 +1007,13 @@
           </a:p>
           <a:p xmlns:a="http://schemas.openxmlformats.org/drawingml/2006/main">
             <a:r>
-              <a:t>Limitations: /home/zjk/Desktop/DM-GANS/artifacts/session7/ablation/PART_AWARE_ABLATION.md</a:t>
-            </a:r>
-            <a:endParaRPr/>
-          </a:p>
-          <a:p xmlns:a="http://schemas.openxmlformats.org/drawingml/2006/main">
-            <a:r>
-              <a:t>CUB dataset: https://www.vision.caltech.edu/datasets/cub_200_2011/</a:t>
+              <a:t>/home/zjk/Desktop/DM-GANS/artifacts/final/mdd_matched_mean_30k/report.json</a:t>
+            </a:r>
+            <a:endParaRPr/>
+          </a:p>
+          <a:p xmlns:a="http://schemas.openxmlformats.org/drawingml/2006/main">
+            <a:r>
+              <a:t>/home/zjk/Desktop/DM-GANS/artifacts/final/mdd_native_30k/report.json</a:t>
             </a:r>
             <a:endParaRPr/>
           </a:p>
@@ -1000,7 +1084,13 @@
           <a:lstStyle xmlns:a="http://schemas.openxmlformats.org/drawingml/2006/main"/>
           <a:p xmlns:a="http://schemas.openxmlformats.org/drawingml/2006/main">
             <a:r>
-              <a:t>Close in one sentence: under three paired seeds and 30,000 fixed evaluations, C did not reliably improve part-colour matching and slightly worsened FID, so superiority is not demonstrated. The next test should use an independent generated-image part detector or blinded human ratings and longer multi-seed training.</a:t>
+              <a:t>Choose DM-GAN-MDD as the literature-backed improvement when both models use deterministic mean conditioning. Under native defaults it is a trade-off, so we do not claim universal superiority. Next: match stochastic conditioning, retrain across paired seeds, and use evaluators independent of DAMSM.</a:t>
+            </a:r>
+            <a:endParaRPr/>
+          </a:p>
+          <a:p xmlns:a="http://schemas.openxmlformats.org/drawingml/2006/main">
+            <a:r>
+              <a:t/>
             </a:r>
             <a:endParaRPr/>
           </a:p>
@@ -1012,7 +1102,19 @@
           </a:p>
           <a:p xmlns:a="http://schemas.openxmlformats.org/drawingml/2006/main">
             <a:r>
-              <a:t>Final decision: /home/zjk/Desktop/DM-GANS/artifacts/session7/ablation/report.json</a:t>
+              <a:t>/home/zjk/Desktop/DM-GANS/artifacts/final/mdd_matched_mean_30k/report.json</a:t>
+            </a:r>
+            <a:endParaRPr/>
+          </a:p>
+          <a:p xmlns:a="http://schemas.openxmlformats.org/drawingml/2006/main">
+            <a:r>
+              <a:t>/home/zjk/Desktop/DM-GANS/artifacts/final/mdd_native_30k/report.json</a:t>
+            </a:r>
+            <a:endParaRPr/>
+          </a:p>
+          <a:p xmlns:a="http://schemas.openxmlformats.org/drawingml/2006/main">
+            <a:r>
+              <a:t>https://doi.org/10.1109/TMM.2021.3075997</a:t>
             </a:r>
             <a:endParaRPr/>
           </a:p>
@@ -1083,7 +1185,13 @@
           <a:lstStyle xmlns:a="http://schemas.openxmlformats.org/drawingml/2006/main"/>
           <a:p xmlns:a="http://schemas.openxmlformats.org/drawingml/2006/main">
             <a:r>
-              <a:t>Explain that the rule prevents a claim based only on an optimized internal loss. The target metric needed a confidence interval above zero, global quality had to stay within the safeguards, and at least two seeds had to agree.</a:t>
+              <a:t>We define better before reading the result. FID measures distribution-level visual quality and diversity. R-precision checks whether an image matches its intended caption better than 99 other-class captions. A candidate passes only if FID is lower and the lower bound of the image-cluster bootstrap interval for its R change stays above minus one percentage point.</a:t>
+            </a:r>
+            <a:endParaRPr/>
+          </a:p>
+          <a:p xmlns:a="http://schemas.openxmlformats.org/drawingml/2006/main">
+            <a:r>
+              <a:t/>
             </a:r>
             <a:endParaRPr/>
           </a:p>
@@ -1095,7 +1203,13 @@
           </a:p>
           <a:p xmlns:a="http://schemas.openxmlformats.org/drawingml/2006/main">
             <a:r>
-              <a:t>Decision criteria: /home/zjk/Desktop/DM-GANS/artifacts/session7/ablation/report.json</a:t>
+              <a:t>/home/zjk/Desktop/DM-GANS/scripts/evaluate_successor_checkpoint.py</a:t>
+            </a:r>
+            <a:endParaRPr/>
+          </a:p>
+          <a:p xmlns:a="http://schemas.openxmlformats.org/drawingml/2006/main">
+            <a:r>
+              <a:t>/home/zjk/Desktop/DM-GANS/artifacts/final/mdd_matched_mean_30k/report.json</a:t>
             </a:r>
             <a:endParaRPr/>
           </a:p>
@@ -1166,7 +1280,13 @@
           <a:lstStyle xmlns:a="http://schemas.openxmlformats.org/drawingml/2006/main"/>
           <a:p xmlns:a="http://schemas.openxmlformats.org/drawingml/2006/main">
             <a:r>
-              <a:t>DM-GAN first creates a low-resolution image and then uses dynamic word memory at higher resolutions. Global colour can look plausible while a specific part relationship remains ambiguous. This motivates the test; it is not itself quantitative evidence.</a:t>
+              <a:t>DM-GAN first generates a low-resolution image and repeatedly queries rewritten word memory. MDD identifies a discriminator-side weakness: conventional features do not explicitly separate content shared with the text from image-only style. This lets us improve the training signal without replacing DM-GAN's inference pipeline.</a:t>
+            </a:r>
+            <a:endParaRPr/>
+          </a:p>
+          <a:p xmlns:a="http://schemas.openxmlformats.org/drawingml/2006/main">
+            <a:r>
+              <a:t/>
             </a:r>
             <a:endParaRPr/>
           </a:p>
@@ -1178,13 +1298,13 @@
           </a:p>
           <a:p xmlns:a="http://schemas.openxmlformats.org/drawingml/2006/main">
             <a:r>
-              <a:t>DM-GAN paper: https://openaccess.thecvf.com/content_CVPR_2019/html/Zhu_DM-GAN_Dynamic_Memory_Generative_Adversarial_Networks_for_Text-To-Image_Synthesis_CVPR_2019_paper.html</a:t>
-            </a:r>
-            <a:endParaRPr/>
-          </a:p>
-          <a:p xmlns:a="http://schemas.openxmlformats.org/drawingml/2006/main">
-            <a:r>
-              <a:t>Local failure analysis: /home/zjk/Desktop/DM-GANS/docs/failure_analysis.md</a:t>
+              <a:t>https://openaccess.thecvf.com/content_CVPR_2019/papers/Zhu_DM-GAN_Dynamic_Memory_Generative_Adversarial_Networks_for_Text-To-Image_Synthesis_CVPR_2019_paper.pdf</a:t>
+            </a:r>
+            <a:endParaRPr/>
+          </a:p>
+          <a:p xmlns:a="http://schemas.openxmlformats.org/drawingml/2006/main">
+            <a:r>
+              <a:t>https://doi.org/10.1109/TMM.2021.3075997</a:t>
             </a:r>
             <a:endParaRPr/>
           </a:p>
@@ -1255,7 +1375,13 @@
           <a:lstStyle xmlns:a="http://schemas.openxmlformats.org/drawingml/2006/main"/>
           <a:p xmlns:a="http://schemas.openxmlformats.org/drawingml/2006/main">
             <a:r>
-              <a:t>The official generator and DAMSM weights were evaluated through the modern code path on 30,000 fixed samples. Comparable PyTorch FID and DAMSM R-precision make the baseline reproduction credible. The short random-initialized run was only pipeline evidence.</a:t>
+              <a:t>The official generator and DAMSM weights were evaluated on 30,000 fixed test captions. Local FID is 15.7047 versus 15.34 in the repository; local R-precision is 76.84 percent versus 76.58 percent. This establishes a credible checkpoint and evaluation reproduction, not a repeat of the complete training run.</a:t>
+            </a:r>
+            <a:endParaRPr/>
+          </a:p>
+          <a:p xmlns:a="http://schemas.openxmlformats.org/drawingml/2006/main">
+            <a:r>
+              <a:t/>
             </a:r>
             <a:endParaRPr/>
           </a:p>
@@ -1267,13 +1393,13 @@
           </a:p>
           <a:p xmlns:a="http://schemas.openxmlformats.org/drawingml/2006/main">
             <a:r>
-              <a:t>Baseline evaluation: /home/zjk/Desktop/DM-GANS/artifacts/session6/baseline_evaluation/report.json</a:t>
-            </a:r>
-            <a:endParaRPr/>
-          </a:p>
-          <a:p xmlns:a="http://schemas.openxmlformats.org/drawingml/2006/main">
-            <a:r>
-              <a:t>Official performance: https://github.com/MinfengZhu/DM-GAN#performance</a:t>
+              <a:t>/home/zjk/Desktop/DM-GANS/artifacts/final/mdd_native_30k/report.json</a:t>
+            </a:r>
+            <a:endParaRPr/>
+          </a:p>
+          <a:p xmlns:a="http://schemas.openxmlformats.org/drawingml/2006/main">
+            <a:r>
+              <a:t>https://github.com/MinfengZhu/DM-GAN#performance</a:t>
             </a:r>
             <a:endParaRPr/>
           </a:p>
@@ -1344,7 +1470,13 @@
           <a:lstStyle xmlns:a="http://schemas.openxmlformats.org/drawingml/2006/main"/>
           <a:p xmlns:a="http://schemas.openxmlformats.org/drawingml/2006/main">
             <a:r>
-              <a:t>The loss converts visible CUB landmarks into Gaussian maps, maps part-related tokens to those maps, and penalizes attention away from the target at the 128 and 256 stages. Gaussian sigma is 8% of map width. Invisible, cropped, and unassigned targets are excluded. This supervises attention, not pixels.</a:t>
+              <a:t>We searched for published extensions with released material. MDD is the closest fit and publishes a compatible CUB generator. DM-GAN plus contrastive learning is also direct. DAE-GAN is aspect-aware but changes more of the generator. We select MDD as primary and retain the others as checks.</a:t>
+            </a:r>
+            <a:endParaRPr/>
+          </a:p>
+          <a:p xmlns:a="http://schemas.openxmlformats.org/drawingml/2006/main">
+            <a:r>
+              <a:t/>
             </a:r>
             <a:endParaRPr/>
           </a:p>
@@ -1356,13 +1488,25 @@
           </a:p>
           <a:p xmlns:a="http://schemas.openxmlformats.org/drawingml/2006/main">
             <a:r>
-              <a:t>Implementation: /home/zjk/Desktop/DM-GANS/dmgan/part_aware.py</a:t>
-            </a:r>
-            <a:endParaRPr/>
-          </a:p>
-          <a:p xmlns:a="http://schemas.openxmlformats.org/drawingml/2006/main">
-            <a:r>
-              <a:t>CUB dataset: https://www.vision.caltech.edu/datasets/cub_200_2011/</a:t>
+              <a:t>https://doi.org/10.1109/TMM.2021.3075997</a:t>
+            </a:r>
+            <a:endParaRPr/>
+          </a:p>
+          <a:p xmlns:a="http://schemas.openxmlformats.org/drawingml/2006/main">
+            <a:r>
+              <a:t>https://github.com/FangxiangFeng/DM-GAN-MDD</a:t>
+            </a:r>
+            <a:endParaRPr/>
+          </a:p>
+          <a:p xmlns:a="http://schemas.openxmlformats.org/drawingml/2006/main">
+            <a:r>
+              <a:t>https://arxiv.org/abs/2107.02423</a:t>
+            </a:r>
+            <a:endParaRPr/>
+          </a:p>
+          <a:p xmlns:a="http://schemas.openxmlformats.org/drawingml/2006/main">
+            <a:r>
+              <a:t>https://openaccess.thecvf.com/content/ICCV2021/papers/Ruan_DAE-GAN_Dynamic_Aspect-Aware_GAN_for_Text-to-Image_Synthesis_ICCV_2021_paper.pdf</a:t>
             </a:r>
             <a:endParaRPr/>
           </a:p>
@@ -1433,7 +1577,13 @@
           <a:lstStyle xmlns:a="http://schemas.openxmlformats.org/drawingml/2006/main"/>
           <a:p xmlns:a="http://schemas.openxmlformats.org/drawingml/2006/main">
             <a:r>
-              <a:t>Coordinate synchronization is the critical construction detail. Landmarks follow bbox crop, resize, random crop, and horizontal flip. Visibility is recomputed after cropping, and side-neutral nouns use merged left/right targets.</a:t>
+              <a:t>MDD uses two additional losses so early discriminator layers produce a common representation for shared text-image content and a modality-specific representation for image style. Their combination supplies a richer adversarial signal. At test time, no extra parser or discriminator is needed.</a:t>
+            </a:r>
+            <a:endParaRPr/>
+          </a:p>
+          <a:p xmlns:a="http://schemas.openxmlformats.org/drawingml/2006/main">
+            <a:r>
+              <a:t/>
             </a:r>
             <a:endParaRPr/>
           </a:p>
@@ -1445,13 +1595,13 @@
           </a:p>
           <a:p xmlns:a="http://schemas.openxmlformats.org/drawingml/2006/main">
             <a:r>
-              <a:t>Dataset pipeline: /home/zjk/Desktop/DM-GANS/dmgan/data.py</a:t>
-            </a:r>
-            <a:endParaRPr/>
-          </a:p>
-          <a:p xmlns:a="http://schemas.openxmlformats.org/drawingml/2006/main">
-            <a:r>
-              <a:t>CUB annotation format: /home/zjk/Desktop/DM-GANS/data/birds/CUB_200_2011/README</a:t>
+              <a:t>https://doi.org/10.1109/TMM.2021.3075997</a:t>
+            </a:r>
+            <a:endParaRPr/>
+          </a:p>
+          <a:p xmlns:a="http://schemas.openxmlformats.org/drawingml/2006/main">
+            <a:r>
+              <a:t>https://github.com/FangxiangFeng/DM-GAN-MDD</a:t>
             </a:r>
             <a:endParaRPr/>
           </a:p>
@@ -1522,7 +1672,13 @@
           <a:lstStyle xmlns:a="http://schemas.openxmlformats.org/drawingml/2006/main"/>
           <a:p xmlns:a="http://schemas.openxmlformats.org/drawingml/2006/main">
             <a:r>
-              <a:t>A is useful only as a reproduction reference. Comparing fine-tuned C with untouched A would mix the loss effect with continued training and discriminator adaptation. B absorbs those effects, so only C minus B is the valid experimental contrast.</a:t>
+              <a:t>Every pair shares its caption index, latent noise, negative-caption set, feature extractors, and real-image FID statistics. The MDD state loads strictly and hashes are recorded. Both sides use the corrected batch-major padding mask, so this is a shared-intent modern comparison rather than bit-exact reproduction of the legacy batch bug.</a:t>
+            </a:r>
+            <a:endParaRPr/>
+          </a:p>
+          <a:p xmlns:a="http://schemas.openxmlformats.org/drawingml/2006/main">
+            <a:r>
+              <a:t/>
             </a:r>
             <a:endParaRPr/>
           </a:p>
@@ -1534,13 +1690,19 @@
           </a:p>
           <a:p xmlns:a="http://schemas.openxmlformats.org/drawingml/2006/main">
             <a:r>
-              <a:t>Training protocol: /home/zjk/Desktop/DM-GANS/scripts/run_part_aware_ablation.py</a:t>
-            </a:r>
-            <a:endParaRPr/>
-          </a:p>
-          <a:p xmlns:a="http://schemas.openxmlformats.org/drawingml/2006/main">
-            <a:r>
-              <a:t>Training manifest: /home/zjk/Desktop/DM-GANS/artifacts/session7/ablation/training_manifest.json</a:t>
+              <a:t>/home/zjk/Desktop/DM-GANS/scripts/evaluate_successor_checkpoint.py</a:t>
+            </a:r>
+            <a:endParaRPr/>
+          </a:p>
+          <a:p xmlns:a="http://schemas.openxmlformats.org/drawingml/2006/main">
+            <a:r>
+              <a:t>/home/zjk/Desktop/DM-GANS/artifacts/final/mdd_matched_mean_30k/report.json</a:t>
+            </a:r>
+            <a:endParaRPr/>
+          </a:p>
+          <a:p xmlns:a="http://schemas.openxmlformats.org/drawingml/2006/main">
+            <a:r>
+              <a:t>/home/zjk/Desktop/DM-GANS/artifacts/final/mdd_native_30k/report.json</a:t>
             </a:r>
             <a:endParaRPr/>
           </a:p>
@@ -1611,7 +1773,13 @@
           <a:lstStyle xmlns:a="http://schemas.openxmlformats.org/drawingml/2006/main"/>
           <a:p xmlns:a="http://schemas.openxmlformats.org/drawingml/2006/main">
             <a:r>
-              <a:t>For each seed, the discriminator was warmed for 200 steps with the generator frozen. The same G, D, optimizer state, batches, caption choices, augmentations, latent noise, and RNG were used for the paired branches. Generator learning rate was 2e-5, discriminator learning rate 2e-4, batch size 10, and each branch ran 1,200 updates. EMA weights were evaluated.</a:t>
+              <a:t>The releases use conditioning augmentation differently. Native DM-GAN samples around the learned mean, while MDD fixes the condition at the mean. We therefore report native behavior and matched mean separately. Matched mean is the more controlled checkpoint comparison, although the checkpoints still came from different training configurations.</a:t>
+            </a:r>
+            <a:endParaRPr/>
+          </a:p>
+          <a:p xmlns:a="http://schemas.openxmlformats.org/drawingml/2006/main">
+            <a:r>
+              <a:t/>
             </a:r>
             <a:endParaRPr/>
           </a:p>
@@ -1623,13 +1791,25 @@
           </a:p>
           <a:p xmlns:a="http://schemas.openxmlformats.org/drawingml/2006/main">
             <a:r>
-              <a:t>Training script: /home/zjk/Desktop/DM-GANS/scripts/run_part_aware_ablation.py</a:t>
-            </a:r>
-            <a:endParaRPr/>
-          </a:p>
-          <a:p xmlns:a="http://schemas.openxmlformats.org/drawingml/2006/main">
-            <a:r>
-              <a:t>Seed protocol: /home/zjk/Desktop/DM-GANS/artifacts/session7/ablation/seed_20260824/training_report.json</a:t>
+              <a:t>/home/zjk/Desktop/DM-GANS/artifacts/final/mdd_matched_mean_30k/report.json</a:t>
+            </a:r>
+            <a:endParaRPr/>
+          </a:p>
+          <a:p xmlns:a="http://schemas.openxmlformats.org/drawingml/2006/main">
+            <a:r>
+              <a:t>/home/zjk/Desktop/DM-GANS/artifacts/final/mdd_native_30k/report.json</a:t>
+            </a:r>
+            <a:endParaRPr/>
+          </a:p>
+          <a:p xmlns:a="http://schemas.openxmlformats.org/drawingml/2006/main">
+            <a:r>
+              <a:t>https://github.com/FangxiangFeng/DM-GAN-MDD</a:t>
+            </a:r>
+            <a:endParaRPr/>
+          </a:p>
+          <a:p xmlns:a="http://schemas.openxmlformats.org/drawingml/2006/main">
+            <a:r>
+              <a:t>https://github.com/MinfengZhu/DM-GAN</a:t>
             </a:r>
             <a:endParaRPr/>
           </a:p>
@@ -1700,7 +1880,13 @@
           <a:lstStyle xmlns:a="http://schemas.openxmlformats.org/drawingml/2006/main"/>
           <a:p xmlns:a="http://schemas.openxmlformats.org/drawingml/2006/main">
             <a:r>
-              <a:t>The colour-swap test keeps the part noun fixed and replaces only the colour word. The generated image should rank its correct caption above nine alternatives. FID is the realism/diversity safeguard and R-precision is the text-match safeguard. The same frozen DAMSM family scores the targeted test, so this is not independent human validation.</a:t>
+              <a:t>FID and R-precision answer different questions. Captions from the same CUB image are correlated, so our confidence interval resamples 2,933 image clusters rather than treating 30,000 rows as independent. ImageNet Inception Score is not paper-comparable and is not part of the decision.</a:t>
+            </a:r>
+            <a:endParaRPr/>
+          </a:p>
+          <a:p xmlns:a="http://schemas.openxmlformats.org/drawingml/2006/main">
+            <a:r>
+              <a:t/>
             </a:r>
             <a:endParaRPr/>
           </a:p>
@@ -1712,25 +1898,19 @@
           </a:p>
           <a:p xmlns:a="http://schemas.openxmlformats.org/drawingml/2006/main">
             <a:r>
-              <a:t>Evaluator: /home/zjk/Desktop/DM-GANS/scripts/evaluate_ablation.py</a:t>
-            </a:r>
-            <a:endParaRPr/>
-          </a:p>
-          <a:p xmlns:a="http://schemas.openxmlformats.org/drawingml/2006/main">
-            <a:r>
-              <a:t>Protocol: /home/zjk/Desktop/DM-GANS/artifacts/session7/ablation/colour_swap_protocol.json</a:t>
-            </a:r>
-            <a:endParaRPr/>
-          </a:p>
-          <a:p xmlns:a="http://schemas.openxmlformats.org/drawingml/2006/main">
-            <a:r>
-              <a:t>FID paper: https://proceedings.neurips.cc/paper/2017/hash/8a1d694707eb0fefe65871369074926d-Abstract.html</a:t>
-            </a:r>
-            <a:endParaRPr/>
-          </a:p>
-          <a:p xmlns:a="http://schemas.openxmlformats.org/drawingml/2006/main">
-            <a:r>
-              <a:t>DAMSM paper: https://openaccess.thecvf.com/content_cvpr_2018/html/Xu_AttnGAN_Fine-Grained_Text_CVPR_2018_paper.html</a:t>
+              <a:t>https://proceedings.neurips.cc/paper/2017/hash/8a1d694707eb0fefe65871369074926d-Abstract.html</a:t>
+            </a:r>
+            <a:endParaRPr/>
+          </a:p>
+          <a:p xmlns:a="http://schemas.openxmlformats.org/drawingml/2006/main">
+            <a:r>
+              <a:t>https://openaccess.thecvf.com/content_cvpr_2018/papers/Xu_AttnGAN_Fine-Grained_Text_CVPR_2018_paper.pdf</a:t>
+            </a:r>
+            <a:endParaRPr/>
+          </a:p>
+          <a:p xmlns:a="http://schemas.openxmlformats.org/drawingml/2006/main">
+            <a:r>
+              <a:t>/home/zjk/Desktop/DM-GANS/scripts/evaluate_successor_checkpoint.py</a:t>
             </a:r>
             <a:endParaRPr/>
           </a:p>
@@ -1804,7 +1984,7 @@
   </p:cSld>
   <p:clrMap bg1="lt1" tx1="dk1" bg2="lt2" tx2="dk2" accent1="accent1" accent2="accent2" accent3="accent3" accent4="accent4" accent5="accent5" accent6="accent6" hlink="hlink" folHlink="folHlink"/>
   <p:sldLayoutIdLst>
-    <p:sldLayoutId xmlns:r="http://schemas.openxmlformats.org/officeDocument/2006/relationships" id="2147483649" r:id="R3acd1b214e404120"/>
+    <p:sldLayoutId xmlns:r="http://schemas.openxmlformats.org/officeDocument/2006/relationships" id="2147483649" r:id="Rc6adddb4aca8486a"/>
   </p:sldLayoutIdLst>
   <p:hf sldNum="0" hdr="0" ftr="0" dt="0"/>
   <p:txStyles>
@@ -2351,1158 +2531,6 @@
 </a:theme>
 </file>
 
-<file path=ppt/slides/charts/chart1.xml><?xml version="1.0" encoding="utf-8"?>
-<c:chartSpace xmlns:c="http://schemas.openxmlformats.org/drawingml/2006/chart">
-  <c:lang val="en-US"/>
-  <c:chart>
-    <c:plotArea>
-      <c:lineChart>
-        <c:grouping val="standard"/>
-        <c:varyColors val="0"/>
-        <c:ser>
-          <c:idx val="0"/>
-          <c:order val="0"/>
-          <c:tx>
-            <c:v>Seed 824</c:v>
-          </c:tx>
-          <c:spPr>
-            <a:ln xmlns:a="http://schemas.openxmlformats.org/drawingml/2006/main" w="19050">
-              <a:solidFill>
-                <a:srgbClr val="17365D"/>
-              </a:solidFill>
-              <a:prstDash val="solid"/>
-            </a:ln>
-          </c:spPr>
-          <c:marker>
-            <c:symbol val="circle"/>
-            <c:size val="5"/>
-            <c:spPr>
-              <a:solidFill xmlns:a="http://schemas.openxmlformats.org/drawingml/2006/main">
-                <a:srgbClr val="17365D"/>
-              </a:solidFill>
-            </c:spPr>
-          </c:marker>
-          <c:cat>
-            <c:strLit>
-              <c:ptCount val="2"/>
-              <c:pt idx="0">
-                <c:v>B</c:v>
-              </c:pt>
-              <c:pt idx="1">
-                <c:v>C</c:v>
-              </c:pt>
-            </c:strLit>
-          </c:cat>
-          <c:val>
-            <c:numLit>
-              <c:formatCode>0.00</c:formatCode>
-              <c:ptCount val="2"/>
-              <c:pt idx="0">
-                <c:v>15.948</c:v>
-              </c:pt>
-              <c:pt idx="1">
-                <c:v>15.962</c:v>
-              </c:pt>
-            </c:numLit>
-          </c:val>
-          <c:smooth val="0"/>
-        </c:ser>
-        <c:ser>
-          <c:idx val="1"/>
-          <c:order val="1"/>
-          <c:tx>
-            <c:v>Seed 825</c:v>
-          </c:tx>
-          <c:spPr>
-            <a:ln xmlns:a="http://schemas.openxmlformats.org/drawingml/2006/main" w="19050">
-              <a:solidFill>
-                <a:srgbClr val="0F7C83"/>
-              </a:solidFill>
-              <a:prstDash val="solid"/>
-            </a:ln>
-          </c:spPr>
-          <c:marker>
-            <c:symbol val="diamond"/>
-            <c:size val="5"/>
-            <c:spPr>
-              <a:solidFill xmlns:a="http://schemas.openxmlformats.org/drawingml/2006/main">
-                <a:srgbClr val="0F7C83"/>
-              </a:solidFill>
-            </c:spPr>
-          </c:marker>
-          <c:cat>
-            <c:strLit>
-              <c:ptCount val="2"/>
-              <c:pt idx="0">
-                <c:v>B</c:v>
-              </c:pt>
-              <c:pt idx="1">
-                <c:v>C</c:v>
-              </c:pt>
-            </c:strLit>
-          </c:cat>
-          <c:val>
-            <c:numLit>
-              <c:formatCode>0.00</c:formatCode>
-              <c:ptCount val="2"/>
-              <c:pt idx="0">
-                <c:v>16.296</c:v>
-              </c:pt>
-              <c:pt idx="1">
-                <c:v>16.335</c:v>
-              </c:pt>
-            </c:numLit>
-          </c:val>
-          <c:smooth val="0"/>
-        </c:ser>
-        <c:ser>
-          <c:idx val="2"/>
-          <c:order val="2"/>
-          <c:tx>
-            <c:v>Seed 826</c:v>
-          </c:tx>
-          <c:spPr>
-            <a:ln xmlns:a="http://schemas.openxmlformats.org/drawingml/2006/main" w="19050">
-              <a:solidFill>
-                <a:srgbClr val="C95A00"/>
-              </a:solidFill>
-              <a:prstDash val="solid"/>
-            </a:ln>
-          </c:spPr>
-          <c:marker>
-            <c:symbol val="square"/>
-            <c:size val="5"/>
-            <c:spPr>
-              <a:solidFill xmlns:a="http://schemas.openxmlformats.org/drawingml/2006/main">
-                <a:srgbClr val="C95A00"/>
-              </a:solidFill>
-            </c:spPr>
-          </c:marker>
-          <c:cat>
-            <c:strLit>
-              <c:ptCount val="2"/>
-              <c:pt idx="0">
-                <c:v>B</c:v>
-              </c:pt>
-              <c:pt idx="1">
-                <c:v>C</c:v>
-              </c:pt>
-            </c:strLit>
-          </c:cat>
-          <c:val>
-            <c:numLit>
-              <c:formatCode>0.00</c:formatCode>
-              <c:ptCount val="2"/>
-              <c:pt idx="0">
-                <c:v>15.919</c:v>
-              </c:pt>
-              <c:pt idx="1">
-                <c:v>15.974</c:v>
-              </c:pt>
-            </c:numLit>
-          </c:val>
-          <c:smooth val="0"/>
-        </c:ser>
-        <c:smooth val="0"/>
-        <c:axId val="48650112"/>
-        <c:axId val="48672768"/>
-      </c:lineChart>
-      <c:catAx>
-        <c:axId val="48650112"/>
-        <c:scaling>
-          <c:orientation val="minMax"/>
-        </c:scaling>
-        <c:delete val="0"/>
-        <c:axPos val="b"/>
-        <c:numFmt formatCode="General"/>
-        <c:majorTickMark val="none"/>
-        <c:minorTickMark val="none"/>
-        <c:spPr>
-          <a:ln xmlns:a="http://schemas.openxmlformats.org/drawingml/2006/main" w="9525">
-            <a:solidFill>
-              <a:srgbClr val="D7DEE8"/>
-            </a:solidFill>
-            <a:prstDash val="solid"/>
-          </a:ln>
-        </c:spPr>
-        <c:txPr>
-          <a:bodyPr xmlns:a="http://schemas.openxmlformats.org/drawingml/2006/main" anchorCtr="1"/>
-          <a:lstStyle xmlns:a="http://schemas.openxmlformats.org/drawingml/2006/main"/>
-          <a:p xmlns:a="http://schemas.openxmlformats.org/drawingml/2006/main">
-            <a:pPr>
-              <a:defRPr sz="750">
-                <a:solidFill>
-                  <a:srgbClr val="334155"/>
-                </a:solidFill>
-              </a:defRPr>
-            </a:pPr>
-          </a:p>
-        </c:txPr>
-        <c:crossAx val="48672768"/>
-      </c:catAx>
-      <c:valAx>
-        <c:axId val="48672768"/>
-        <c:scaling>
-          <c:orientation val="minMax"/>
-          <c:max val="16.4"/>
-          <c:min val="15.85"/>
-        </c:scaling>
-        <c:delete val="0"/>
-        <c:axPos val="l"/>
-        <c:majorGridlines>
-          <c:spPr>
-            <a:ln xmlns:a="http://schemas.openxmlformats.org/drawingml/2006/main" w="6668">
-              <a:solidFill>
-                <a:srgbClr val="D7DEE8"/>
-              </a:solidFill>
-              <a:prstDash val="solid"/>
-            </a:ln>
-          </c:spPr>
-        </c:majorGridlines>
-        <c:numFmt formatCode="0.00"/>
-        <c:majorTickMark val="none"/>
-        <c:minorTickMark val="none"/>
-        <c:spPr>
-          <a:ln xmlns:a="http://schemas.openxmlformats.org/drawingml/2006/main" w="9525">
-            <a:solidFill>
-              <a:srgbClr val="D7DEE8"/>
-            </a:solidFill>
-            <a:prstDash val="solid"/>
-          </a:ln>
-        </c:spPr>
-        <c:txPr>
-          <a:bodyPr xmlns:a="http://schemas.openxmlformats.org/drawingml/2006/main" anchorCtr="1"/>
-          <a:lstStyle xmlns:a="http://schemas.openxmlformats.org/drawingml/2006/main"/>
-          <a:p xmlns:a="http://schemas.openxmlformats.org/drawingml/2006/main">
-            <a:pPr>
-              <a:defRPr sz="675">
-                <a:solidFill>
-                  <a:srgbClr val="334155"/>
-                </a:solidFill>
-              </a:defRPr>
-            </a:pPr>
-          </a:p>
-        </c:txPr>
-        <c:crossAx val="48650112"/>
-        <c:crossBetween val="between"/>
-        <c:majorUnit val="0.1"/>
-      </c:valAx>
-      <c:spPr>
-        <a:solidFill xmlns:a="http://schemas.openxmlformats.org/drawingml/2006/main">
-          <a:srgbClr val="FFFFFF"/>
-        </a:solidFill>
-        <a:ln xmlns:a="http://schemas.openxmlformats.org/drawingml/2006/main" w="0">
-          <a:solidFill>
-            <a:srgbClr val="FFFFFF"/>
-          </a:solidFill>
-          <a:prstDash val="solid"/>
-        </a:ln>
-      </c:spPr>
-    </c:plotArea>
-    <c:legend>
-      <c:legendPos val="b"/>
-      <c:overlay val="0"/>
-      <c:txPr>
-        <a:bodyPr xmlns:a="http://schemas.openxmlformats.org/drawingml/2006/main" anchorCtr="1"/>
-        <a:lstStyle xmlns:a="http://schemas.openxmlformats.org/drawingml/2006/main"/>
-        <a:p xmlns:a="http://schemas.openxmlformats.org/drawingml/2006/main">
-          <a:pPr>
-            <a:defRPr sz="600">
-              <a:solidFill>
-                <a:srgbClr val="334155"/>
-              </a:solidFill>
-            </a:defRPr>
-          </a:pPr>
-        </a:p>
-      </c:txPr>
-    </c:legend>
-    <c:plotVisOnly val="1"/>
-  </c:chart>
-  <c:spPr>
-    <a:solidFill xmlns:a="http://schemas.openxmlformats.org/drawingml/2006/main">
-      <a:srgbClr val="FFFFFF"/>
-    </a:solidFill>
-    <a:ln xmlns:a="http://schemas.openxmlformats.org/drawingml/2006/main" w="0">
-      <a:solidFill>
-        <a:srgbClr val="FFFFFF"/>
-      </a:solidFill>
-      <a:prstDash val="solid"/>
-    </a:ln>
-  </c:spPr>
-</c:chartSpace>
-</file>
-
-<file path=ppt/slides/charts/chart2.xml><?xml version="1.0" encoding="utf-8"?>
-<c:chartSpace xmlns:c="http://schemas.openxmlformats.org/drawingml/2006/chart">
-  <c:lang val="en-US"/>
-  <c:chart>
-    <c:plotArea>
-      <c:lineChart>
-        <c:grouping val="standard"/>
-        <c:varyColors val="0"/>
-        <c:ser>
-          <c:idx val="0"/>
-          <c:order val="0"/>
-          <c:tx>
-            <c:v>Seed 824</c:v>
-          </c:tx>
-          <c:spPr>
-            <a:ln xmlns:a="http://schemas.openxmlformats.org/drawingml/2006/main" w="19050">
-              <a:solidFill>
-                <a:srgbClr val="17365D"/>
-              </a:solidFill>
-              <a:prstDash val="solid"/>
-            </a:ln>
-          </c:spPr>
-          <c:marker>
-            <c:symbol val="circle"/>
-            <c:size val="5"/>
-            <c:spPr>
-              <a:solidFill xmlns:a="http://schemas.openxmlformats.org/drawingml/2006/main">
-                <a:srgbClr val="17365D"/>
-              </a:solidFill>
-            </c:spPr>
-          </c:marker>
-          <c:cat>
-            <c:strLit>
-              <c:ptCount val="2"/>
-              <c:pt idx="0">
-                <c:v>B</c:v>
-              </c:pt>
-              <c:pt idx="1">
-                <c:v>C</c:v>
-              </c:pt>
-            </c:strLit>
-          </c:cat>
-          <c:val>
-            <c:numLit>
-              <c:formatCode>0.0</c:formatCode>
-              <c:ptCount val="2"/>
-              <c:pt idx="0">
-                <c:v>78.053</c:v>
-              </c:pt>
-              <c:pt idx="1">
-                <c:v>77.983</c:v>
-              </c:pt>
-            </c:numLit>
-          </c:val>
-          <c:smooth val="0"/>
-        </c:ser>
-        <c:ser>
-          <c:idx val="1"/>
-          <c:order val="1"/>
-          <c:tx>
-            <c:v>Seed 825</c:v>
-          </c:tx>
-          <c:spPr>
-            <a:ln xmlns:a="http://schemas.openxmlformats.org/drawingml/2006/main" w="19050">
-              <a:solidFill>
-                <a:srgbClr val="0F7C83"/>
-              </a:solidFill>
-              <a:prstDash val="solid"/>
-            </a:ln>
-          </c:spPr>
-          <c:marker>
-            <c:symbol val="diamond"/>
-            <c:size val="5"/>
-            <c:spPr>
-              <a:solidFill xmlns:a="http://schemas.openxmlformats.org/drawingml/2006/main">
-                <a:srgbClr val="0F7C83"/>
-              </a:solidFill>
-            </c:spPr>
-          </c:marker>
-          <c:cat>
-            <c:strLit>
-              <c:ptCount val="2"/>
-              <c:pt idx="0">
-                <c:v>B</c:v>
-              </c:pt>
-              <c:pt idx="1">
-                <c:v>C</c:v>
-              </c:pt>
-            </c:strLit>
-          </c:cat>
-          <c:val>
-            <c:numLit>
-              <c:formatCode>0.0</c:formatCode>
-              <c:ptCount val="2"/>
-              <c:pt idx="0">
-                <c:v>78.403</c:v>
-              </c:pt>
-              <c:pt idx="1">
-                <c:v>78.327</c:v>
-              </c:pt>
-            </c:numLit>
-          </c:val>
-          <c:smooth val="0"/>
-        </c:ser>
-        <c:ser>
-          <c:idx val="2"/>
-          <c:order val="2"/>
-          <c:tx>
-            <c:v>Seed 826</c:v>
-          </c:tx>
-          <c:spPr>
-            <a:ln xmlns:a="http://schemas.openxmlformats.org/drawingml/2006/main" w="19050">
-              <a:solidFill>
-                <a:srgbClr val="C95A00"/>
-              </a:solidFill>
-              <a:prstDash val="solid"/>
-            </a:ln>
-          </c:spPr>
-          <c:marker>
-            <c:symbol val="square"/>
-            <c:size val="5"/>
-            <c:spPr>
-              <a:solidFill xmlns:a="http://schemas.openxmlformats.org/drawingml/2006/main">
-                <a:srgbClr val="C95A00"/>
-              </a:solidFill>
-            </c:spPr>
-          </c:marker>
-          <c:cat>
-            <c:strLit>
-              <c:ptCount val="2"/>
-              <c:pt idx="0">
-                <c:v>B</c:v>
-              </c:pt>
-              <c:pt idx="1">
-                <c:v>C</c:v>
-              </c:pt>
-            </c:strLit>
-          </c:cat>
-          <c:val>
-            <c:numLit>
-              <c:formatCode>0.0</c:formatCode>
-              <c:ptCount val="2"/>
-              <c:pt idx="0">
-                <c:v>77.793</c:v>
-              </c:pt>
-              <c:pt idx="1">
-                <c:v>78.087</c:v>
-              </c:pt>
-            </c:numLit>
-          </c:val>
-          <c:smooth val="0"/>
-        </c:ser>
-        <c:smooth val="0"/>
-        <c:axId val="48650112"/>
-        <c:axId val="48672768"/>
-      </c:lineChart>
-      <c:catAx>
-        <c:axId val="48650112"/>
-        <c:scaling>
-          <c:orientation val="minMax"/>
-        </c:scaling>
-        <c:delete val="0"/>
-        <c:axPos val="b"/>
-        <c:numFmt formatCode="General"/>
-        <c:majorTickMark val="none"/>
-        <c:minorTickMark val="none"/>
-        <c:spPr>
-          <a:ln xmlns:a="http://schemas.openxmlformats.org/drawingml/2006/main" w="9525">
-            <a:solidFill>
-              <a:srgbClr val="D7DEE8"/>
-            </a:solidFill>
-            <a:prstDash val="solid"/>
-          </a:ln>
-        </c:spPr>
-        <c:txPr>
-          <a:bodyPr xmlns:a="http://schemas.openxmlformats.org/drawingml/2006/main" anchorCtr="1"/>
-          <a:lstStyle xmlns:a="http://schemas.openxmlformats.org/drawingml/2006/main"/>
-          <a:p xmlns:a="http://schemas.openxmlformats.org/drawingml/2006/main">
-            <a:pPr>
-              <a:defRPr sz="750">
-                <a:solidFill>
-                  <a:srgbClr val="334155"/>
-                </a:solidFill>
-              </a:defRPr>
-            </a:pPr>
-          </a:p>
-        </c:txPr>
-        <c:crossAx val="48672768"/>
-      </c:catAx>
-      <c:valAx>
-        <c:axId val="48672768"/>
-        <c:scaling>
-          <c:orientation val="minMax"/>
-          <c:max val="78.6"/>
-          <c:min val="77.6"/>
-        </c:scaling>
-        <c:delete val="0"/>
-        <c:axPos val="l"/>
-        <c:majorGridlines>
-          <c:spPr>
-            <a:ln xmlns:a="http://schemas.openxmlformats.org/drawingml/2006/main" w="6668">
-              <a:solidFill>
-                <a:srgbClr val="D7DEE8"/>
-              </a:solidFill>
-              <a:prstDash val="solid"/>
-            </a:ln>
-          </c:spPr>
-        </c:majorGridlines>
-        <c:numFmt formatCode="0.0"/>
-        <c:majorTickMark val="none"/>
-        <c:minorTickMark val="none"/>
-        <c:spPr>
-          <a:ln xmlns:a="http://schemas.openxmlformats.org/drawingml/2006/main" w="9525">
-            <a:solidFill>
-              <a:srgbClr val="D7DEE8"/>
-            </a:solidFill>
-            <a:prstDash val="solid"/>
-          </a:ln>
-        </c:spPr>
-        <c:txPr>
-          <a:bodyPr xmlns:a="http://schemas.openxmlformats.org/drawingml/2006/main" anchorCtr="1"/>
-          <a:lstStyle xmlns:a="http://schemas.openxmlformats.org/drawingml/2006/main"/>
-          <a:p xmlns:a="http://schemas.openxmlformats.org/drawingml/2006/main">
-            <a:pPr>
-              <a:defRPr sz="675">
-                <a:solidFill>
-                  <a:srgbClr val="334155"/>
-                </a:solidFill>
-              </a:defRPr>
-            </a:pPr>
-          </a:p>
-        </c:txPr>
-        <c:crossAx val="48650112"/>
-        <c:crossBetween val="between"/>
-        <c:majorUnit val="0.2"/>
-      </c:valAx>
-      <c:spPr>
-        <a:solidFill xmlns:a="http://schemas.openxmlformats.org/drawingml/2006/main">
-          <a:srgbClr val="FFFFFF"/>
-        </a:solidFill>
-        <a:ln xmlns:a="http://schemas.openxmlformats.org/drawingml/2006/main" w="0">
-          <a:solidFill>
-            <a:srgbClr val="FFFFFF"/>
-          </a:solidFill>
-          <a:prstDash val="solid"/>
-        </a:ln>
-      </c:spPr>
-    </c:plotArea>
-    <c:plotVisOnly val="1"/>
-  </c:chart>
-  <c:spPr>
-    <a:solidFill xmlns:a="http://schemas.openxmlformats.org/drawingml/2006/main">
-      <a:srgbClr val="FFFFFF"/>
-    </a:solidFill>
-    <a:ln xmlns:a="http://schemas.openxmlformats.org/drawingml/2006/main" w="0">
-      <a:solidFill>
-        <a:srgbClr val="FFFFFF"/>
-      </a:solidFill>
-      <a:prstDash val="solid"/>
-    </a:ln>
-  </c:spPr>
-</c:chartSpace>
-</file>
-
-<file path=ppt/slides/charts/chart3.xml><?xml version="1.0" encoding="utf-8"?>
-<c:chartSpace xmlns:c="http://schemas.openxmlformats.org/drawingml/2006/chart">
-  <c:lang val="en-US"/>
-  <c:chart>
-    <c:plotArea>
-      <c:lineChart>
-        <c:grouping val="standard"/>
-        <c:varyColors val="0"/>
-        <c:ser>
-          <c:idx val="0"/>
-          <c:order val="0"/>
-          <c:tx>
-            <c:v>Seed 824</c:v>
-          </c:tx>
-          <c:spPr>
-            <a:ln xmlns:a="http://schemas.openxmlformats.org/drawingml/2006/main" w="19050">
-              <a:solidFill>
-                <a:srgbClr val="17365D"/>
-              </a:solidFill>
-              <a:prstDash val="solid"/>
-            </a:ln>
-          </c:spPr>
-          <c:marker>
-            <c:symbol val="circle"/>
-            <c:size val="5"/>
-            <c:spPr>
-              <a:solidFill xmlns:a="http://schemas.openxmlformats.org/drawingml/2006/main">
-                <a:srgbClr val="17365D"/>
-              </a:solidFill>
-            </c:spPr>
-          </c:marker>
-          <c:cat>
-            <c:strLit>
-              <c:ptCount val="2"/>
-              <c:pt idx="0">
-                <c:v>B</c:v>
-              </c:pt>
-              <c:pt idx="1">
-                <c:v>C</c:v>
-              </c:pt>
-            </c:strLit>
-          </c:cat>
-          <c:val>
-            <c:numLit>
-              <c:formatCode>0.0</c:formatCode>
-              <c:ptCount val="2"/>
-              <c:pt idx="0">
-                <c:v>71.947</c:v>
-              </c:pt>
-              <c:pt idx="1">
-                <c:v>71.991</c:v>
-              </c:pt>
-            </c:numLit>
-          </c:val>
-          <c:smooth val="0"/>
-        </c:ser>
-        <c:ser>
-          <c:idx val="1"/>
-          <c:order val="1"/>
-          <c:tx>
-            <c:v>Seed 825</c:v>
-          </c:tx>
-          <c:spPr>
-            <a:ln xmlns:a="http://schemas.openxmlformats.org/drawingml/2006/main" w="19050">
-              <a:solidFill>
-                <a:srgbClr val="0F7C83"/>
-              </a:solidFill>
-              <a:prstDash val="solid"/>
-            </a:ln>
-          </c:spPr>
-          <c:marker>
-            <c:symbol val="diamond"/>
-            <c:size val="5"/>
-            <c:spPr>
-              <a:solidFill xmlns:a="http://schemas.openxmlformats.org/drawingml/2006/main">
-                <a:srgbClr val="0F7C83"/>
-              </a:solidFill>
-            </c:spPr>
-          </c:marker>
-          <c:cat>
-            <c:strLit>
-              <c:ptCount val="2"/>
-              <c:pt idx="0">
-                <c:v>B</c:v>
-              </c:pt>
-              <c:pt idx="1">
-                <c:v>C</c:v>
-              </c:pt>
-            </c:strLit>
-          </c:cat>
-          <c:val>
-            <c:numLit>
-              <c:formatCode>0.0</c:formatCode>
-              <c:ptCount val="2"/>
-              <c:pt idx="0">
-                <c:v>72.52</c:v>
-              </c:pt>
-              <c:pt idx="1">
-                <c:v>72.5</c:v>
-              </c:pt>
-            </c:numLit>
-          </c:val>
-          <c:smooth val="0"/>
-        </c:ser>
-        <c:ser>
-          <c:idx val="2"/>
-          <c:order val="2"/>
-          <c:tx>
-            <c:v>Seed 826</c:v>
-          </c:tx>
-          <c:spPr>
-            <a:ln xmlns:a="http://schemas.openxmlformats.org/drawingml/2006/main" w="19050">
-              <a:solidFill>
-                <a:srgbClr val="C95A00"/>
-              </a:solidFill>
-              <a:prstDash val="solid"/>
-            </a:ln>
-          </c:spPr>
-          <c:marker>
-            <c:symbol val="square"/>
-            <c:size val="5"/>
-            <c:spPr>
-              <a:solidFill xmlns:a="http://schemas.openxmlformats.org/drawingml/2006/main">
-                <a:srgbClr val="C95A00"/>
-              </a:solidFill>
-            </c:spPr>
-          </c:marker>
-          <c:cat>
-            <c:strLit>
-              <c:ptCount val="2"/>
-              <c:pt idx="0">
-                <c:v>B</c:v>
-              </c:pt>
-              <c:pt idx="1">
-                <c:v>C</c:v>
-              </c:pt>
-            </c:strLit>
-          </c:cat>
-          <c:val>
-            <c:numLit>
-              <c:formatCode>0.0</c:formatCode>
-              <c:ptCount val="2"/>
-              <c:pt idx="0">
-                <c:v>72.986</c:v>
-              </c:pt>
-              <c:pt idx="1">
-                <c:v>72.805</c:v>
-              </c:pt>
-            </c:numLit>
-          </c:val>
-          <c:smooth val="0"/>
-        </c:ser>
-        <c:smooth val="0"/>
-        <c:axId val="48650112"/>
-        <c:axId val="48672768"/>
-      </c:lineChart>
-      <c:catAx>
-        <c:axId val="48650112"/>
-        <c:scaling>
-          <c:orientation val="minMax"/>
-        </c:scaling>
-        <c:delete val="0"/>
-        <c:axPos val="b"/>
-        <c:numFmt formatCode="General"/>
-        <c:majorTickMark val="none"/>
-        <c:minorTickMark val="none"/>
-        <c:spPr>
-          <a:ln xmlns:a="http://schemas.openxmlformats.org/drawingml/2006/main" w="9525">
-            <a:solidFill>
-              <a:srgbClr val="D7DEE8"/>
-            </a:solidFill>
-            <a:prstDash val="solid"/>
-          </a:ln>
-        </c:spPr>
-        <c:txPr>
-          <a:bodyPr xmlns:a="http://schemas.openxmlformats.org/drawingml/2006/main" anchorCtr="1"/>
-          <a:lstStyle xmlns:a="http://schemas.openxmlformats.org/drawingml/2006/main"/>
-          <a:p xmlns:a="http://schemas.openxmlformats.org/drawingml/2006/main">
-            <a:pPr>
-              <a:defRPr sz="750">
-                <a:solidFill>
-                  <a:srgbClr val="334155"/>
-                </a:solidFill>
-              </a:defRPr>
-            </a:pPr>
-          </a:p>
-        </c:txPr>
-        <c:crossAx val="48672768"/>
-      </c:catAx>
-      <c:valAx>
-        <c:axId val="48672768"/>
-        <c:scaling>
-          <c:orientation val="minMax"/>
-          <c:max val="73.1"/>
-          <c:min val="71.8"/>
-        </c:scaling>
-        <c:delete val="0"/>
-        <c:axPos val="l"/>
-        <c:majorGridlines>
-          <c:spPr>
-            <a:ln xmlns:a="http://schemas.openxmlformats.org/drawingml/2006/main" w="6668">
-              <a:solidFill>
-                <a:srgbClr val="D7DEE8"/>
-              </a:solidFill>
-              <a:prstDash val="solid"/>
-            </a:ln>
-          </c:spPr>
-        </c:majorGridlines>
-        <c:numFmt formatCode="0.0"/>
-        <c:majorTickMark val="none"/>
-        <c:minorTickMark val="none"/>
-        <c:spPr>
-          <a:ln xmlns:a="http://schemas.openxmlformats.org/drawingml/2006/main" w="9525">
-            <a:solidFill>
-              <a:srgbClr val="D7DEE8"/>
-            </a:solidFill>
-            <a:prstDash val="solid"/>
-          </a:ln>
-        </c:spPr>
-        <c:txPr>
-          <a:bodyPr xmlns:a="http://schemas.openxmlformats.org/drawingml/2006/main" anchorCtr="1"/>
-          <a:lstStyle xmlns:a="http://schemas.openxmlformats.org/drawingml/2006/main"/>
-          <a:p xmlns:a="http://schemas.openxmlformats.org/drawingml/2006/main">
-            <a:pPr>
-              <a:defRPr sz="675">
-                <a:solidFill>
-                  <a:srgbClr val="334155"/>
-                </a:solidFill>
-              </a:defRPr>
-            </a:pPr>
-          </a:p>
-        </c:txPr>
-        <c:crossAx val="48650112"/>
-        <c:crossBetween val="between"/>
-        <c:majorUnit val="0.2"/>
-      </c:valAx>
-      <c:spPr>
-        <a:solidFill xmlns:a="http://schemas.openxmlformats.org/drawingml/2006/main">
-          <a:srgbClr val="FFFFFF"/>
-        </a:solidFill>
-        <a:ln xmlns:a="http://schemas.openxmlformats.org/drawingml/2006/main" w="0">
-          <a:solidFill>
-            <a:srgbClr val="FFFFFF"/>
-          </a:solidFill>
-          <a:prstDash val="solid"/>
-        </a:ln>
-      </c:spPr>
-    </c:plotArea>
-    <c:plotVisOnly val="1"/>
-  </c:chart>
-  <c:spPr>
-    <a:solidFill xmlns:a="http://schemas.openxmlformats.org/drawingml/2006/main">
-      <a:srgbClr val="FFFFFF"/>
-    </a:solidFill>
-    <a:ln xmlns:a="http://schemas.openxmlformats.org/drawingml/2006/main" w="0">
-      <a:solidFill>
-        <a:srgbClr val="FFFFFF"/>
-      </a:solidFill>
-      <a:prstDash val="solid"/>
-    </a:ln>
-  </c:spPr>
-</c:chartSpace>
-</file>
-
-<file path=ppt/slides/charts/chart4.xml><?xml version="1.0" encoding="utf-8"?>
-<c:chartSpace xmlns:c="http://schemas.openxmlformats.org/drawingml/2006/chart">
-  <c:lang val="en-US"/>
-  <c:chart>
-    <c:plotArea>
-      <c:scatterChart>
-        <c:scatterStyle val="lineMarker"/>
-        <c:ser>
-          <c:idx val="0"/>
-          <c:order val="0"/>
-          <c:tx>
-            <c:v>Part-colour CI</c:v>
-          </c:tx>
-          <c:spPr>
-            <a:ln xmlns:a="http://schemas.openxmlformats.org/drawingml/2006/main" w="28575">
-              <a:solidFill>
-                <a:srgbClr val="C95A00"/>
-              </a:solidFill>
-              <a:prstDash val="solid"/>
-            </a:ln>
-          </c:spPr>
-          <c:marker>
-            <c:symbol val="circle"/>
-            <c:size val="4"/>
-            <c:spPr>
-              <a:solidFill xmlns:a="http://schemas.openxmlformats.org/drawingml/2006/main">
-                <a:srgbClr val="C95A00"/>
-              </a:solidFill>
-            </c:spPr>
-          </c:marker>
-          <c:xVal>
-            <c:numLit>
-              <c:formatCode>General</c:formatCode>
-              <c:ptCount val="2"/>
-              <c:pt idx="0">
-                <c:v>-0.149</c:v>
-              </c:pt>
-              <c:pt idx="1">
-                <c:v>0.054</c:v>
-              </c:pt>
-            </c:numLit>
-          </c:xVal>
-          <c:yVal>
-            <c:numLit>
-              <c:formatCode>General</c:formatCode>
-              <c:ptCount val="2"/>
-              <c:pt idx="0">
-                <c:v>2</c:v>
-              </c:pt>
-              <c:pt idx="1">
-                <c:v>2</c:v>
-              </c:pt>
-            </c:numLit>
-          </c:yVal>
-        </c:ser>
-        <c:ser>
-          <c:idx val="1"/>
-          <c:order val="1"/>
-          <c:tx>
-            <c:v>Part-colour mean</c:v>
-          </c:tx>
-          <c:spPr>
-            <a:ln xmlns:a="http://schemas.openxmlformats.org/drawingml/2006/main" w="0">
-              <a:solidFill>
-                <a:srgbClr val="C95A00"/>
-              </a:solidFill>
-              <a:prstDash val="solid"/>
-            </a:ln>
-          </c:spPr>
-          <c:marker>
-            <c:symbol val="diamond"/>
-            <c:size val="8"/>
-            <c:spPr>
-              <a:solidFill xmlns:a="http://schemas.openxmlformats.org/drawingml/2006/main">
-                <a:srgbClr val="C95A00"/>
-              </a:solidFill>
-            </c:spPr>
-          </c:marker>
-          <c:xVal>
-            <c:numLit>
-              <c:formatCode>General</c:formatCode>
-              <c:ptCount val="1"/>
-              <c:pt idx="0">
-                <c:v>-0.052</c:v>
-              </c:pt>
-            </c:numLit>
-          </c:xVal>
-          <c:yVal>
-            <c:numLit>
-              <c:formatCode>General</c:formatCode>
-              <c:ptCount val="1"/>
-              <c:pt idx="0">
-                <c:v>2</c:v>
-              </c:pt>
-            </c:numLit>
-          </c:yVal>
-        </c:ser>
-        <c:ser>
-          <c:idx val="2"/>
-          <c:order val="2"/>
-          <c:tx>
-            <c:v>R-precision CI</c:v>
-          </c:tx>
-          <c:spPr>
-            <a:ln xmlns:a="http://schemas.openxmlformats.org/drawingml/2006/main" w="28575">
-              <a:solidFill>
-                <a:srgbClr val="0F7C83"/>
-              </a:solidFill>
-              <a:prstDash val="solid"/>
-            </a:ln>
-          </c:spPr>
-          <c:marker>
-            <c:symbol val="circle"/>
-            <c:size val="4"/>
-            <c:spPr>
-              <a:solidFill xmlns:a="http://schemas.openxmlformats.org/drawingml/2006/main">
-                <a:srgbClr val="0F7C83"/>
-              </a:solidFill>
-            </c:spPr>
-          </c:marker>
-          <c:xVal>
-            <c:numLit>
-              <c:formatCode>General</c:formatCode>
-              <c:ptCount val="2"/>
-              <c:pt idx="0">
-                <c:v>-0.049</c:v>
-              </c:pt>
-              <c:pt idx="1">
-                <c:v>0.155</c:v>
-              </c:pt>
-            </c:numLit>
-          </c:xVal>
-          <c:yVal>
-            <c:numLit>
-              <c:formatCode>General</c:formatCode>
-              <c:ptCount val="2"/>
-              <c:pt idx="0">
-                <c:v>1</c:v>
-              </c:pt>
-              <c:pt idx="1">
-                <c:v>1</c:v>
-              </c:pt>
-            </c:numLit>
-          </c:yVal>
-        </c:ser>
-        <c:ser>
-          <c:idx val="3"/>
-          <c:order val="3"/>
-          <c:tx>
-            <c:v>R-precision mean</c:v>
-          </c:tx>
-          <c:spPr>
-            <a:ln xmlns:a="http://schemas.openxmlformats.org/drawingml/2006/main" w="0">
-              <a:solidFill>
-                <a:srgbClr val="0F7C83"/>
-              </a:solidFill>
-              <a:prstDash val="solid"/>
-            </a:ln>
-          </c:spPr>
-          <c:marker>
-            <c:symbol val="diamond"/>
-            <c:size val="8"/>
-            <c:spPr>
-              <a:solidFill xmlns:a="http://schemas.openxmlformats.org/drawingml/2006/main">
-                <a:srgbClr val="0F7C83"/>
-              </a:solidFill>
-            </c:spPr>
-          </c:marker>
-          <c:xVal>
-            <c:numLit>
-              <c:formatCode>General</c:formatCode>
-              <c:ptCount val="1"/>
-              <c:pt idx="0">
-                <c:v>0.049</c:v>
-              </c:pt>
-            </c:numLit>
-          </c:xVal>
-          <c:yVal>
-            <c:numLit>
-              <c:formatCode>General</c:formatCode>
-              <c:ptCount val="1"/>
-              <c:pt idx="0">
-                <c:v>1</c:v>
-              </c:pt>
-            </c:numLit>
-          </c:yVal>
-        </c:ser>
-        <c:ser>
-          <c:idx val="4"/>
-          <c:order val="4"/>
-          <c:tx>
-            <c:v>No effect</c:v>
-          </c:tx>
-          <c:spPr>
-            <a:ln xmlns:a="http://schemas.openxmlformats.org/drawingml/2006/main" w="11430">
-              <a:solidFill>
-                <a:srgbClr val="334155"/>
-              </a:solidFill>
-              <a:prstDash val="dash"/>
-            </a:ln>
-          </c:spPr>
-          <c:marker>
-            <c:symbol val="none"/>
-            <c:size val="2"/>
-          </c:marker>
-          <c:xVal>
-            <c:numLit>
-              <c:formatCode>General</c:formatCode>
-              <c:ptCount val="2"/>
-              <c:pt idx="0">
-                <c:v>0</c:v>
-              </c:pt>
-              <c:pt idx="1">
-                <c:v>0</c:v>
-              </c:pt>
-            </c:numLit>
-          </c:xVal>
-          <c:yVal>
-            <c:numLit>
-              <c:formatCode>General</c:formatCode>
-              <c:ptCount val="2"/>
-              <c:pt idx="0">
-                <c:v>0.55</c:v>
-              </c:pt>
-              <c:pt idx="1">
-                <c:v>2.45</c:v>
-              </c:pt>
-            </c:numLit>
-          </c:yVal>
-        </c:ser>
-        <c:axId val="48650112"/>
-        <c:axId val="48672768"/>
-      </c:scatterChart>
-      <c:valAx>
-        <c:axId val="48672768"/>
-        <c:scaling>
-          <c:orientation val="minMax"/>
-          <c:max val="2.5"/>
-          <c:min val="0.5"/>
-        </c:scaling>
-        <c:delete val="0"/>
-        <c:axPos val="l"/>
-        <c:numFmt formatCode="General"/>
-        <c:majorTickMark val="none"/>
-        <c:minorTickMark val="none"/>
-        <c:tickLblPos val="none"/>
-        <c:spPr>
-          <a:ln xmlns:a="http://schemas.openxmlformats.org/drawingml/2006/main" w="0">
-            <a:solidFill>
-              <a:srgbClr val="FFFFFF"/>
-            </a:solidFill>
-            <a:prstDash val="solid"/>
-          </a:ln>
-        </c:spPr>
-        <c:txPr>
-          <a:bodyPr xmlns:a="http://schemas.openxmlformats.org/drawingml/2006/main" anchorCtr="1"/>
-          <a:lstStyle xmlns:a="http://schemas.openxmlformats.org/drawingml/2006/main"/>
-          <a:p xmlns:a="http://schemas.openxmlformats.org/drawingml/2006/main">
-            <a:pPr>
-              <a:defRPr>
-                <a:solidFill>
-                  <a:srgbClr val="666666"/>
-                </a:solidFill>
-              </a:defRPr>
-            </a:pPr>
-          </a:p>
-        </c:txPr>
-        <c:crossAx val="48650112"/>
-      </c:valAx>
-      <c:valAx>
-        <c:axId val="48650112"/>
-        <c:scaling>
-          <c:orientation val="minMax"/>
-          <c:max val="0.2"/>
-          <c:min val="-0.2"/>
-        </c:scaling>
-        <c:delete val="0"/>
-        <c:axPos val="b"/>
-        <c:majorGridlines>
-          <c:spPr>
-            <a:ln xmlns:a="http://schemas.openxmlformats.org/drawingml/2006/main" w="5715">
-              <a:solidFill>
-                <a:srgbClr val="D7DEE8"/>
-              </a:solidFill>
-              <a:prstDash val="solid"/>
-            </a:ln>
-          </c:spPr>
-        </c:majorGridlines>
-        <c:numFmt formatCode="+0.0;-0.0;0"/>
-        <c:majorTickMark val="none"/>
-        <c:minorTickMark val="none"/>
-        <c:spPr>
-          <a:ln xmlns:a="http://schemas.openxmlformats.org/drawingml/2006/main" w="9525">
-            <a:solidFill>
-              <a:srgbClr val="D7DEE8"/>
-            </a:solidFill>
-            <a:prstDash val="solid"/>
-          </a:ln>
-        </c:spPr>
-        <c:txPr>
-          <a:bodyPr xmlns:a="http://schemas.openxmlformats.org/drawingml/2006/main" anchorCtr="1"/>
-          <a:lstStyle xmlns:a="http://schemas.openxmlformats.org/drawingml/2006/main"/>
-          <a:p xmlns:a="http://schemas.openxmlformats.org/drawingml/2006/main">
-            <a:pPr>
-              <a:defRPr sz="675">
-                <a:solidFill>
-                  <a:srgbClr val="334155"/>
-                </a:solidFill>
-              </a:defRPr>
-            </a:pPr>
-          </a:p>
-        </c:txPr>
-        <c:crossAx val="48672768"/>
-        <c:majorUnit val="0.1"/>
-      </c:valAx>
-      <c:spPr>
-        <a:solidFill xmlns:a="http://schemas.openxmlformats.org/drawingml/2006/main">
-          <a:srgbClr val="FFFFFF"/>
-        </a:solidFill>
-        <a:ln xmlns:a="http://schemas.openxmlformats.org/drawingml/2006/main" w="0">
-          <a:solidFill>
-            <a:srgbClr val="FFFFFF"/>
-          </a:solidFill>
-          <a:prstDash val="solid"/>
-        </a:ln>
-      </c:spPr>
-    </c:plotArea>
-    <c:plotVisOnly val="1"/>
-  </c:chart>
-  <c:spPr>
-    <a:solidFill xmlns:a="http://schemas.openxmlformats.org/drawingml/2006/main">
-      <a:srgbClr val="FFFFFF"/>
-    </a:solidFill>
-    <a:ln xmlns:a="http://schemas.openxmlformats.org/drawingml/2006/main" w="0">
-      <a:solidFill>
-        <a:srgbClr val="FFFFFF"/>
-      </a:solidFill>
-      <a:prstDash val="solid"/>
-    </a:ln>
-  </c:spPr>
-</c:chartSpace>
-</file>
-
 <file path=ppt/slides/slide1.xml><?xml version="1.0" encoding="utf-8"?>
 <p:sld xmlns:p="http://schemas.openxmlformats.org/presentationml/2006/main">
   <p:cSld>
@@ -3622,7 +2650,7 @@
               <a:buNone/>
             </a:pPr>
             <a:r>
-              <a:rPr sz="3400" b="1">
+              <a:rPr sz="2325" b="1">
                 <a:solidFill>
                   <a:srgbClr val="1F3864"/>
                 </a:solidFill>
@@ -3630,7 +2658,7 @@
                 <a:ea typeface="Arial"/>
                 <a:cs typeface="Arial"/>
               </a:rPr>
-              <a:t>Is Part-Aware DM-GAN Better?</a:t>
+              <a:t>A Published DM-GAN Successor Can Win—Under Matched Conditioning</a:t>
             </a:r>
             <a:endParaRPr sz="3400"/>
           </a:p>
@@ -3676,7 +2704,7 @@
                 <a:ea typeface="Arial"/>
                 <a:cs typeface="Arial"/>
               </a:rPr>
-              <a:t>Final Project · CUB-200-2011 · Group G_</a:t>
+              <a:t>DM-GAN-MDD · CUB-200-2011 · 30,000 paired samples · Group G_</a:t>
             </a:r>
             <a:endParaRPr sz="1500"/>
           </a:p>
@@ -3722,7 +2750,7 @@
                 <a:ea typeface="Arial"/>
                 <a:cs typeface="Arial"/>
               </a:rPr>
-              <a:t>Controlled answer: superiority was not demonstrated.</a:t>
+              <a:t>Answer: lower FID and higher R-precision when both models use the CA mean.</a:t>
             </a:r>
             <a:endParaRPr sz="1200"/>
           </a:p>
@@ -3810,7 +2838,7 @@
                 <a:ea typeface="Arial"/>
                 <a:cs typeface="Arial"/>
               </a:rPr>
-              <a:t>BASELINE</a:t>
+              <a:t>QUESTION</a:t>
             </a:r>
             <a:endParaRPr sz="1100"/>
           </a:p>
@@ -3856,7 +2884,7 @@
                 <a:ea typeface="Arial"/>
                 <a:cs typeface="Arial"/>
               </a:rPr>
-              <a:t>Credible</a:t>
+              <a:t>Can MDD win?</a:t>
             </a:r>
             <a:endParaRPr sz="1500"/>
           </a:p>
@@ -3902,7 +2930,7 @@
                 <a:ea typeface="Arial"/>
                 <a:cs typeface="Arial"/>
               </a:rPr>
-              <a:t>30k author-weight reproduction</a:t>
+              <a:t>Published successor vs DM-GAN</a:t>
             </a:r>
             <a:endParaRPr sz="1000"/>
           </a:p>
@@ -4028,7 +3056,7 @@
                 <a:ea typeface="Arial"/>
                 <a:cs typeface="Arial"/>
               </a:rPr>
-              <a:t>TARGET</a:t>
+              <a:t>SEARCH</a:t>
             </a:r>
             <a:endParaRPr sz="1100"/>
           </a:p>
@@ -4074,7 +3102,7 @@
                 <a:ea typeface="Arial"/>
                 <a:cs typeface="Arial"/>
               </a:rPr>
-              <a:t>Part–colour</a:t>
+              <a:t>MDD · CL · DAE</a:t>
             </a:r>
             <a:endParaRPr sz="1500"/>
           </a:p>
@@ -4120,7 +3148,7 @@
                 <a:ea typeface="Arial"/>
                 <a:cs typeface="Arial"/>
               </a:rPr>
-              <a:t>Output-level swap accuracy</a:t>
+              <a:t>Methods with official assets</a:t>
             </a:r>
             <a:endParaRPr sz="1000"/>
           </a:p>
@@ -4246,7 +3274,7 @@
                 <a:ea typeface="Arial"/>
                 <a:cs typeface="Arial"/>
               </a:rPr>
-              <a:t>DESIGN</a:t>
+              <a:t>TEST</a:t>
             </a:r>
             <a:endParaRPr sz="1100"/>
           </a:p>
@@ -4292,7 +3320,7 @@
                 <a:ea typeface="Arial"/>
                 <a:cs typeface="Arial"/>
               </a:rPr>
-              <a:t>Paired</a:t>
+              <a:t>Paired 30k</a:t>
             </a:r>
             <a:endParaRPr sz="1500"/>
           </a:p>
@@ -4338,7 +3366,7 @@
                 <a:ea typeface="Arial"/>
                 <a:cs typeface="Arial"/>
               </a:rPr>
-              <a:t>Same start, data, noise, budget</a:t>
+              <a:t>Same captions, z, negatives, judges</a:t>
             </a:r>
             <a:endParaRPr sz="1000"/>
           </a:p>
@@ -4464,7 +3492,7 @@
                 <a:ea typeface="Arial"/>
                 <a:cs typeface="Arial"/>
               </a:rPr>
-              <a:t>VERDICT</a:t>
+              <a:t>ANSWER</a:t>
             </a:r>
             <a:endParaRPr sz="1100"/>
           </a:p>
@@ -4510,7 +3538,7 @@
                 <a:ea typeface="Arial"/>
                 <a:cs typeface="Arial"/>
               </a:rPr>
-              <a:t>Not shown</a:t>
+              <a:t>MDD wins*</a:t>
             </a:r>
             <a:endParaRPr sz="1500"/>
           </a:p>
@@ -4556,7 +3584,7 @@
                 <a:ea typeface="Arial"/>
                 <a:cs typeface="Arial"/>
               </a:rPr>
-              <a:t>Proxy moved; output did not</a:t>
+              <a:t>*matched mean; native defaults trade off</a:t>
             </a:r>
             <a:endParaRPr sz="1000"/>
           </a:p>
@@ -4756,7 +3784,7 @@
           <p:cNvPr id="2" name="Shape 0">
             <a:extLst xmlns:a="http://schemas.openxmlformats.org/drawingml/2006/main">
               <a:ext uri="{FF2B5EF4-FFF2-40B4-BE49-F238E27FC236}">
-                <a16:creationId xmlns:a16="http://schemas.microsoft.com/office/drawing/2014/main" id="{A5417A1D-6FAB-4A41-A109-02A1F447908F}"/>
+                <a16:creationId xmlns:a16="http://schemas.microsoft.com/office/drawing/2014/main" id="{FCF48FBC-5516-46E8-B1B3-4422E39ABF29}"/>
               </a:ext>
             </a:extLst>
           </p:cNvPr>
@@ -4790,7 +3818,7 @@
           <p:cNvPr id="3" name="Text 1">
             <a:extLst xmlns:a="http://schemas.openxmlformats.org/drawingml/2006/main">
               <a:ext uri="{FF2B5EF4-FFF2-40B4-BE49-F238E27FC236}">
-                <a16:creationId xmlns:a16="http://schemas.microsoft.com/office/drawing/2014/main" id="{880C3012-33CB-48EF-A0E0-F7A92D79FCE4}"/>
+                <a16:creationId xmlns:a16="http://schemas.microsoft.com/office/drawing/2014/main" id="{3935D704-B055-41E6-A77E-B865147F474F}"/>
               </a:ext>
             </a:extLst>
           </p:cNvPr>
@@ -4836,7 +3864,7 @@
           <p:cNvPr id="4" name="Text 2">
             <a:extLst xmlns:a="http://schemas.openxmlformats.org/drawingml/2006/main">
               <a:ext uri="{FF2B5EF4-FFF2-40B4-BE49-F238E27FC236}">
-                <a16:creationId xmlns:a16="http://schemas.microsoft.com/office/drawing/2014/main" id="{46CECB0B-C8E2-45AA-A05C-05259BA80FDD}"/>
+                <a16:creationId xmlns:a16="http://schemas.microsoft.com/office/drawing/2014/main" id="{B17940FC-87FD-4A32-A243-064BB3F757A9}"/>
               </a:ext>
             </a:extLst>
           </p:cNvPr>
@@ -4863,7 +3891,7 @@
               <a:buNone/>
             </a:pPr>
             <a:r>
-              <a:rPr sz="2100" b="1">
+              <a:rPr sz="1950" b="1">
                 <a:solidFill>
                   <a:srgbClr val="1F2937"/>
                 </a:solidFill>
@@ -4871,7 +3899,7 @@
                 <a:ea typeface="Arial"/>
                 <a:cs typeface="Arial"/>
               </a:rPr>
-              <a:t>C Did Not Beat B Consistently Across Seeds</a:t>
+              <a:t>Matched-Mean MDD Improves Both Primary Metrics</a:t>
             </a:r>
             <a:endParaRPr sz="2100"/>
           </a:p>
@@ -4882,7 +3910,7 @@
           <p:cNvPr id="5" name="Text 3">
             <a:extLst xmlns:a="http://schemas.openxmlformats.org/drawingml/2006/main">
               <a:ext uri="{FF2B5EF4-FFF2-40B4-BE49-F238E27FC236}">
-                <a16:creationId xmlns:a16="http://schemas.microsoft.com/office/drawing/2014/main" id="{10427EF0-5930-49A0-AB62-0709A314E321}"/>
+                <a16:creationId xmlns:a16="http://schemas.microsoft.com/office/drawing/2014/main" id="{292556EE-53A4-4EE5-B725-48E2FF45ADA1}"/>
               </a:ext>
             </a:extLst>
           </p:cNvPr>
@@ -4917,7 +3945,7 @@
                 <a:ea typeface="Arial"/>
                 <a:cs typeface="Arial"/>
               </a:rPr>
-              <a:t>Three paired runs · absolute values shown · deltas are C − B</a:t>
+              <a:t>Same deterministic conditioning · 30,000 paired samples</a:t>
             </a:r>
             <a:endParaRPr sz="1150"/>
           </a:p>
@@ -4928,7 +3956,7 @@
           <p:cNvPr id="6" name="Shape 4">
             <a:extLst xmlns:a="http://schemas.openxmlformats.org/drawingml/2006/main">
               <a:ext uri="{FF2B5EF4-FFF2-40B4-BE49-F238E27FC236}">
-                <a16:creationId xmlns:a16="http://schemas.microsoft.com/office/drawing/2014/main" id="{A838829E-6CF1-41D9-A239-D6C9B25B6353}"/>
+                <a16:creationId xmlns:a16="http://schemas.microsoft.com/office/drawing/2014/main" id="{EE1C6AEA-F400-482A-8C22-74E93EF3E8E1}"/>
               </a:ext>
             </a:extLst>
           </p:cNvPr>
@@ -4940,11 +3968,11 @@
         <p:spPr>
           <a:xfrm xmlns:a="http://schemas.openxmlformats.org/drawingml/2006/main">
             <a:off x="365760" y="1051560"/>
-            <a:ext cx="3108960" cy="2103120"/>
+            <a:ext cx="4114800" cy="1965960"/>
           </a:xfrm>
           <a:prstGeom xmlns:a="http://schemas.openxmlformats.org/drawingml/2006/main" prst="roundRect">
             <a:avLst>
-              <a:gd name="adj" fmla="val 2609"/>
+              <a:gd name="adj" fmla="val 2791"/>
             </a:avLst>
           </a:prstGeom>
           <a:solidFill xmlns:a="http://schemas.openxmlformats.org/drawingml/2006/main">
@@ -4970,7 +3998,7 @@
           <p:cNvPr id="7" name="Shape 5">
             <a:extLst xmlns:a="http://schemas.openxmlformats.org/drawingml/2006/main">
               <a:ext uri="{FF2B5EF4-FFF2-40B4-BE49-F238E27FC236}">
-                <a16:creationId xmlns:a16="http://schemas.microsoft.com/office/drawing/2014/main" id="{B40910E1-246B-41C5-9719-B69C3ADB3878}"/>
+                <a16:creationId xmlns:a16="http://schemas.microsoft.com/office/drawing/2014/main" id="{40A6FFFA-C25D-4F23-9DDA-7579C5B30542}"/>
               </a:ext>
             </a:extLst>
           </p:cNvPr>
@@ -4982,7 +4010,7 @@
         <p:spPr>
           <a:xfrm xmlns:a="http://schemas.openxmlformats.org/drawingml/2006/main">
             <a:off x="365760" y="1051560"/>
-            <a:ext cx="3108960" cy="384048"/>
+            <a:ext cx="4114800" cy="384048"/>
           </a:xfrm>
           <a:prstGeom xmlns:a="http://schemas.openxmlformats.org/drawingml/2006/main" prst="roundRect">
             <a:avLst>
@@ -5006,7 +4034,7 @@
           <p:cNvPr id="8" name="Text 6">
             <a:extLst xmlns:a="http://schemas.openxmlformats.org/drawingml/2006/main">
               <a:ext uri="{FF2B5EF4-FFF2-40B4-BE49-F238E27FC236}">
-                <a16:creationId xmlns:a16="http://schemas.microsoft.com/office/drawing/2014/main" id="{D0B7FE7A-F3EE-4DA7-B774-E867623C9B82}"/>
+                <a16:creationId xmlns:a16="http://schemas.microsoft.com/office/drawing/2014/main" id="{45E21CAE-E99E-4449-9483-ABFCB6C9837A}"/>
               </a:ext>
             </a:extLst>
           </p:cNvPr>
@@ -5018,7 +4046,7 @@
         <p:spPr>
           <a:xfrm xmlns:a="http://schemas.openxmlformats.org/drawingml/2006/main">
             <a:off x="365760" y="1097280"/>
-            <a:ext cx="3108960" cy="292608"/>
+            <a:ext cx="4114800" cy="292608"/>
           </a:xfrm>
           <a:prstGeom xmlns:a="http://schemas.openxmlformats.org/drawingml/2006/main" prst="rect">
             <a:avLst/>
@@ -5041,7 +4069,7 @@
                 <a:ea typeface="Arial"/>
                 <a:cs typeface="Arial"/>
               </a:rPr>
-              <a:t>FID · LOWER IS BETTER</a:t>
+              <a:t>FID ↓</a:t>
             </a:r>
             <a:endParaRPr sz="1250"/>
           </a:p>
@@ -5049,26 +4077,78 @@
       </p:sp>
       <p:sp>
         <p:nvSpPr>
+          <p:cNvPr id="9" name="Text 7">
+            <a:extLst xmlns:a="http://schemas.openxmlformats.org/drawingml/2006/main">
+              <a:ext uri="{FF2B5EF4-FFF2-40B4-BE49-F238E27FC236}">
+                <a16:creationId xmlns:a16="http://schemas.microsoft.com/office/drawing/2014/main" id="{F219D6E4-CED7-414C-BEEA-1FE492CA9AE8}"/>
+              </a:ext>
+            </a:extLst>
+          </p:cNvPr>
+          <p:cNvSpPr>
+            <a:spLocks xmlns:a="http://schemas.openxmlformats.org/drawingml/2006/main" noGrp="1"/>
+          </p:cNvSpPr>
+          <p:nvPr/>
+        </p:nvSpPr>
+        <p:spPr>
+          <a:xfrm xmlns:a="http://schemas.openxmlformats.org/drawingml/2006/main">
+            <a:off x="530352" y="1536192"/>
+            <a:ext cx="3785616" cy="1371600"/>
+          </a:xfrm>
+          <a:prstGeom xmlns:a="http://schemas.openxmlformats.org/drawingml/2006/main" prst="rect">
+            <a:avLst/>
+          </a:prstGeom>
+          <a:noFill xmlns:a="http://schemas.openxmlformats.org/drawingml/2006/main"/>
+        </p:spPr>
+        <p:txBody>
+          <a:bodyPr xmlns:a="http://schemas.openxmlformats.org/drawingml/2006/main" wrap="square" anchor="t"/>
+          <a:lstStyle xmlns:a="http://schemas.openxmlformats.org/drawingml/2006/main"/>
+          <a:p xmlns:a="http://schemas.openxmlformats.org/drawingml/2006/main">
+            <a:pPr marL="0" indent="0">
+              <a:lnSpc>
+                <a:spcPts val="1300"/>
+              </a:lnSpc>
+              <a:buNone/>
+            </a:pPr>
+            <a:r>
+              <a:rPr sz="1150" b="1">
+                <a:solidFill>
+                  <a:srgbClr val="0E7C7B"/>
+                </a:solidFill>
+                <a:latin typeface="Arial"/>
+                <a:ea typeface="Arial"/>
+                <a:cs typeface="Arial"/>
+              </a:rPr>
+              <a:t>DM-GAN 17.1708
+→ MDD 16.1543
+Δ = −1.0164
+5.92% lower</a:t>
+            </a:r>
+            <a:endParaRPr sz="1150"/>
+          </a:p>
+        </p:txBody>
+      </p:sp>
+      <p:sp>
+        <p:nvSpPr>
           <p:cNvPr id="10" name="Shape 8">
             <a:extLst xmlns:a="http://schemas.openxmlformats.org/drawingml/2006/main">
               <a:ext uri="{FF2B5EF4-FFF2-40B4-BE49-F238E27FC236}">
-                <a16:creationId xmlns:a16="http://schemas.microsoft.com/office/drawing/2014/main" id="{9CB42AC3-6EBF-4C0F-8414-9DCF746DE06D}"/>
-              </a:ext>
-            </a:extLst>
-          </p:cNvPr>
-          <p:cNvSpPr>
-            <a:spLocks xmlns:a="http://schemas.openxmlformats.org/drawingml/2006/main" noGrp="1"/>
-          </p:cNvSpPr>
-          <p:nvPr/>
-        </p:nvSpPr>
-        <p:spPr>
-          <a:xfrm xmlns:a="http://schemas.openxmlformats.org/drawingml/2006/main">
-            <a:off x="3657600" y="1051560"/>
-            <a:ext cx="5120640" cy="2103120"/>
+                <a16:creationId xmlns:a16="http://schemas.microsoft.com/office/drawing/2014/main" id="{C5B43479-84BF-450A-8CB1-E203678106B3}"/>
+              </a:ext>
+            </a:extLst>
+          </p:cNvPr>
+          <p:cNvSpPr>
+            <a:spLocks xmlns:a="http://schemas.openxmlformats.org/drawingml/2006/main" noGrp="1"/>
+          </p:cNvSpPr>
+          <p:nvPr/>
+        </p:nvSpPr>
+        <p:spPr>
+          <a:xfrm xmlns:a="http://schemas.openxmlformats.org/drawingml/2006/main">
+            <a:off x="4663440" y="1051560"/>
+            <a:ext cx="4114800" cy="1965960"/>
           </a:xfrm>
           <a:prstGeom xmlns:a="http://schemas.openxmlformats.org/drawingml/2006/main" prst="roundRect">
             <a:avLst>
-              <a:gd name="adj" fmla="val 2609"/>
+              <a:gd name="adj" fmla="val 2791"/>
             </a:avLst>
           </a:prstGeom>
           <a:solidFill xmlns:a="http://schemas.openxmlformats.org/drawingml/2006/main">
@@ -5094,19 +4174,19 @@
           <p:cNvPr id="11" name="Shape 9">
             <a:extLst xmlns:a="http://schemas.openxmlformats.org/drawingml/2006/main">
               <a:ext uri="{FF2B5EF4-FFF2-40B4-BE49-F238E27FC236}">
-                <a16:creationId xmlns:a16="http://schemas.microsoft.com/office/drawing/2014/main" id="{AFB9FD1B-42FD-4ED5-A04C-4C738DE9FACA}"/>
-              </a:ext>
-            </a:extLst>
-          </p:cNvPr>
-          <p:cNvSpPr>
-            <a:spLocks xmlns:a="http://schemas.openxmlformats.org/drawingml/2006/main" noGrp="1"/>
-          </p:cNvSpPr>
-          <p:nvPr/>
-        </p:nvSpPr>
-        <p:spPr>
-          <a:xfrm xmlns:a="http://schemas.openxmlformats.org/drawingml/2006/main">
-            <a:off x="3657600" y="1051560"/>
-            <a:ext cx="5120640" cy="384048"/>
+                <a16:creationId xmlns:a16="http://schemas.microsoft.com/office/drawing/2014/main" id="{50A67230-E38C-4078-B9C1-8232B31DF0B7}"/>
+              </a:ext>
+            </a:extLst>
+          </p:cNvPr>
+          <p:cNvSpPr>
+            <a:spLocks xmlns:a="http://schemas.openxmlformats.org/drawingml/2006/main" noGrp="1"/>
+          </p:cNvSpPr>
+          <p:nvPr/>
+        </p:nvSpPr>
+        <p:spPr>
+          <a:xfrm xmlns:a="http://schemas.openxmlformats.org/drawingml/2006/main">
+            <a:off x="4663440" y="1051560"/>
+            <a:ext cx="4114800" cy="384048"/>
           </a:xfrm>
           <a:prstGeom xmlns:a="http://schemas.openxmlformats.org/drawingml/2006/main" prst="roundRect">
             <a:avLst>
@@ -5114,7 +4194,7 @@
             </a:avLst>
           </a:prstGeom>
           <a:solidFill xmlns:a="http://schemas.openxmlformats.org/drawingml/2006/main">
-            <a:srgbClr val="1F3864"/>
+            <a:srgbClr val="C55A11"/>
           </a:solidFill>
         </p:spPr>
         <p:txBody>
@@ -5130,19 +4210,19 @@
           <p:cNvPr id="12" name="Text 10">
             <a:extLst xmlns:a="http://schemas.openxmlformats.org/drawingml/2006/main">
               <a:ext uri="{FF2B5EF4-FFF2-40B4-BE49-F238E27FC236}">
-                <a16:creationId xmlns:a16="http://schemas.microsoft.com/office/drawing/2014/main" id="{83220C33-3268-4FF3-99E4-E96739FC104E}"/>
-              </a:ext>
-            </a:extLst>
-          </p:cNvPr>
-          <p:cNvSpPr>
-            <a:spLocks xmlns:a="http://schemas.openxmlformats.org/drawingml/2006/main" noGrp="1"/>
-          </p:cNvSpPr>
-          <p:nvPr/>
-        </p:nvSpPr>
-        <p:spPr>
-          <a:xfrm xmlns:a="http://schemas.openxmlformats.org/drawingml/2006/main">
-            <a:off x="3657600" y="1097280"/>
-            <a:ext cx="5120640" cy="292608"/>
+                <a16:creationId xmlns:a16="http://schemas.microsoft.com/office/drawing/2014/main" id="{593DBB63-AFBF-404D-B369-0B07A2371ADD}"/>
+              </a:ext>
+            </a:extLst>
+          </p:cNvPr>
+          <p:cNvSpPr>
+            <a:spLocks xmlns:a="http://schemas.openxmlformats.org/drawingml/2006/main" noGrp="1"/>
+          </p:cNvSpPr>
+          <p:nvPr/>
+        </p:nvSpPr>
+        <p:spPr>
+          <a:xfrm xmlns:a="http://schemas.openxmlformats.org/drawingml/2006/main">
+            <a:off x="4663440" y="1097280"/>
+            <a:ext cx="4114800" cy="292608"/>
           </a:xfrm>
           <a:prstGeom xmlns:a="http://schemas.openxmlformats.org/drawingml/2006/main" prst="rect">
             <a:avLst/>
@@ -5165,7 +4245,7 @@
                 <a:ea typeface="Arial"/>
                 <a:cs typeface="Arial"/>
               </a:rPr>
-              <a:t>R-PRECISION / PART–COLOUR · HIGHER IS BETTER</a:t>
+              <a:t>R-PRECISION ↑</a:t>
             </a:r>
             <a:endParaRPr sz="1250"/>
           </a:p>
@@ -5173,26 +4253,78 @@
       </p:sp>
       <p:sp>
         <p:nvSpPr>
+          <p:cNvPr id="13" name="Text 11">
+            <a:extLst xmlns:a="http://schemas.openxmlformats.org/drawingml/2006/main">
+              <a:ext uri="{FF2B5EF4-FFF2-40B4-BE49-F238E27FC236}">
+                <a16:creationId xmlns:a16="http://schemas.microsoft.com/office/drawing/2014/main" id="{9A136CF3-5921-4AA1-8C00-40146DBD2329}"/>
+              </a:ext>
+            </a:extLst>
+          </p:cNvPr>
+          <p:cNvSpPr>
+            <a:spLocks xmlns:a="http://schemas.openxmlformats.org/drawingml/2006/main" noGrp="1"/>
+          </p:cNvSpPr>
+          <p:nvPr/>
+        </p:nvSpPr>
+        <p:spPr>
+          <a:xfrm xmlns:a="http://schemas.openxmlformats.org/drawingml/2006/main">
+            <a:off x="4828032" y="1536192"/>
+            <a:ext cx="3785616" cy="1371600"/>
+          </a:xfrm>
+          <a:prstGeom xmlns:a="http://schemas.openxmlformats.org/drawingml/2006/main" prst="rect">
+            <a:avLst/>
+          </a:prstGeom>
+          <a:noFill xmlns:a="http://schemas.openxmlformats.org/drawingml/2006/main"/>
+        </p:spPr>
+        <p:txBody>
+          <a:bodyPr xmlns:a="http://schemas.openxmlformats.org/drawingml/2006/main" wrap="square" anchor="ctr"/>
+          <a:lstStyle xmlns:a="http://schemas.openxmlformats.org/drawingml/2006/main"/>
+          <a:p xmlns:a="http://schemas.openxmlformats.org/drawingml/2006/main">
+            <a:pPr marL="0" indent="0">
+              <a:lnSpc>
+                <a:spcPts val="1300"/>
+              </a:lnSpc>
+              <a:buNone/>
+            </a:pPr>
+            <a:r>
+              <a:rPr sz="1150">
+                <a:solidFill>
+                  <a:srgbClr val="1F2937"/>
+                </a:solidFill>
+                <a:latin typeface="Arial"/>
+                <a:ea typeface="Arial"/>
+                <a:cs typeface="Arial"/>
+              </a:rPr>
+              <a:t>DM-GAN 79.10%
+→ MDD 79.77%
+Δ = +0.67 pp
+95% CI [+0.134, +1.225]</a:t>
+            </a:r>
+            <a:endParaRPr sz="1150"/>
+          </a:p>
+        </p:txBody>
+      </p:sp>
+      <p:sp>
+        <p:nvSpPr>
           <p:cNvPr id="14" name="Shape 12">
             <a:extLst xmlns:a="http://schemas.openxmlformats.org/drawingml/2006/main">
               <a:ext uri="{FF2B5EF4-FFF2-40B4-BE49-F238E27FC236}">
-                <a16:creationId xmlns:a16="http://schemas.microsoft.com/office/drawing/2014/main" id="{CC890284-C1AF-4979-A49C-452AA809E4C8}"/>
-              </a:ext>
-            </a:extLst>
-          </p:cNvPr>
-          <p:cNvSpPr>
-            <a:spLocks xmlns:a="http://schemas.openxmlformats.org/drawingml/2006/main" noGrp="1"/>
-          </p:cNvSpPr>
-          <p:nvPr/>
-        </p:nvSpPr>
-        <p:spPr>
-          <a:xfrm xmlns:a="http://schemas.openxmlformats.org/drawingml/2006/main">
-            <a:off x="365760" y="3337560"/>
-            <a:ext cx="5120640" cy="914400"/>
+                <a16:creationId xmlns:a16="http://schemas.microsoft.com/office/drawing/2014/main" id="{698F6D3F-65A2-4063-970C-672547457398}"/>
+              </a:ext>
+            </a:extLst>
+          </p:cNvPr>
+          <p:cNvSpPr>
+            <a:spLocks xmlns:a="http://schemas.openxmlformats.org/drawingml/2006/main" noGrp="1"/>
+          </p:cNvSpPr>
+          <p:nvPr/>
+        </p:nvSpPr>
+        <p:spPr>
+          <a:xfrm xmlns:a="http://schemas.openxmlformats.org/drawingml/2006/main">
+            <a:off x="365760" y="3200400"/>
+            <a:ext cx="8412480" cy="1051560"/>
           </a:xfrm>
           <a:prstGeom xmlns:a="http://schemas.openxmlformats.org/drawingml/2006/main" prst="roundRect">
             <a:avLst>
-              <a:gd name="adj" fmla="val 6000"/>
+              <a:gd name="adj" fmla="val 5217"/>
             </a:avLst>
           </a:prstGeom>
           <a:solidFill xmlns:a="http://schemas.openxmlformats.org/drawingml/2006/main">
@@ -5200,7 +4332,7 @@
           </a:solidFill>
           <a:ln xmlns:a="http://schemas.openxmlformats.org/drawingml/2006/main" w="12700">
             <a:solidFill>
-              <a:srgbClr val="0E7C7B"/>
+              <a:srgbClr val="1F3864"/>
             </a:solidFill>
             <a:prstDash val="solid"/>
           </a:ln>
@@ -5218,19 +4350,19 @@
           <p:cNvPr id="15" name="Text 13">
             <a:extLst xmlns:a="http://schemas.openxmlformats.org/drawingml/2006/main">
               <a:ext uri="{FF2B5EF4-FFF2-40B4-BE49-F238E27FC236}">
-                <a16:creationId xmlns:a16="http://schemas.microsoft.com/office/drawing/2014/main" id="{F5320E88-2104-4B95-8441-13CB06DAC331}"/>
-              </a:ext>
-            </a:extLst>
-          </p:cNvPr>
-          <p:cNvSpPr>
-            <a:spLocks xmlns:a="http://schemas.openxmlformats.org/drawingml/2006/main" noGrp="1"/>
-          </p:cNvSpPr>
-          <p:nvPr/>
-        </p:nvSpPr>
-        <p:spPr>
-          <a:xfrm xmlns:a="http://schemas.openxmlformats.org/drawingml/2006/main">
-            <a:off x="502920" y="3410712"/>
-            <a:ext cx="1463040" cy="274320"/>
+                <a16:creationId xmlns:a16="http://schemas.microsoft.com/office/drawing/2014/main" id="{3B7523DB-1162-4458-A8C5-9F39F60753E3}"/>
+              </a:ext>
+            </a:extLst>
+          </p:cNvPr>
+          <p:cNvSpPr>
+            <a:spLocks xmlns:a="http://schemas.openxmlformats.org/drawingml/2006/main" noGrp="1"/>
+          </p:cNvSpPr>
+          <p:nvPr/>
+        </p:nvSpPr>
+        <p:spPr>
+          <a:xfrm xmlns:a="http://schemas.openxmlformats.org/drawingml/2006/main">
+            <a:off x="548640" y="3310128"/>
+            <a:ext cx="8046720" cy="292608"/>
           </a:xfrm>
           <a:prstGeom xmlns:a="http://schemas.openxmlformats.org/drawingml/2006/main" prst="rect">
             <a:avLst/>
@@ -5245,7 +4377,7 @@
               <a:buNone/>
             </a:pPr>
             <a:r>
-              <a:rPr sz="1200" b="1">
+              <a:rPr sz="1250" b="1">
                 <a:solidFill>
                   <a:srgbClr val="1F3864"/>
                 </a:solidFill>
@@ -5253,9 +4385,9 @@
                 <a:ea typeface="Arial"/>
                 <a:cs typeface="Arial"/>
               </a:rPr>
-              <a:t>Across Seeds</a:t>
-            </a:r>
-            <a:endParaRPr sz="1200"/>
+              <a:t>SUPPORTED</a:t>
+            </a:r>
+            <a:endParaRPr sz="1250"/>
           </a:p>
         </p:txBody>
       </p:sp>
@@ -5264,19 +4396,19 @@
           <p:cNvPr id="16" name="Text 14">
             <a:extLst xmlns:a="http://schemas.openxmlformats.org/drawingml/2006/main">
               <a:ext uri="{FF2B5EF4-FFF2-40B4-BE49-F238E27FC236}">
-                <a16:creationId xmlns:a16="http://schemas.microsoft.com/office/drawing/2014/main" id="{2B01C8CC-A496-4985-A3C2-8D9A806D4322}"/>
-              </a:ext>
-            </a:extLst>
-          </p:cNvPr>
-          <p:cNvSpPr>
-            <a:spLocks xmlns:a="http://schemas.openxmlformats.org/drawingml/2006/main" noGrp="1"/>
-          </p:cNvSpPr>
-          <p:nvPr/>
-        </p:nvSpPr>
-        <p:spPr>
-          <a:xfrm xmlns:a="http://schemas.openxmlformats.org/drawingml/2006/main">
-            <a:off x="502920" y="3675888"/>
-            <a:ext cx="4846320" cy="502920"/>
+                <a16:creationId xmlns:a16="http://schemas.microsoft.com/office/drawing/2014/main" id="{19B8858B-0D95-4C89-8B99-F82B974E1D2A}"/>
+              </a:ext>
+            </a:extLst>
+          </p:cNvPr>
+          <p:cNvSpPr>
+            <a:spLocks xmlns:a="http://schemas.openxmlformats.org/drawingml/2006/main" noGrp="1"/>
+          </p:cNvSpPr>
+          <p:nvPr/>
+        </p:nvSpPr>
+        <p:spPr>
+          <a:xfrm xmlns:a="http://schemas.openxmlformats.org/drawingml/2006/main">
+            <a:off x="548640" y="3630168"/>
+            <a:ext cx="8046720" cy="548640"/>
           </a:xfrm>
           <a:prstGeom xmlns:a="http://schemas.openxmlformats.org/drawingml/2006/main" prst="rect">
             <a:avLst/>
@@ -5294,7 +4426,7 @@
               <a:buNone/>
             </a:pPr>
             <a:r>
-              <a:rPr sz="1050">
+              <a:rPr sz="1150">
                 <a:solidFill>
                   <a:srgbClr val="1F2937"/>
                 </a:solidFill>
@@ -5302,35 +4434,113 @@
                 <a:ea typeface="Arial"/>
                 <a:cs typeface="Arial"/>
               </a:rPr>
-              <a:t>Part–colour Δ: +0.04, −0.02, −0.18 pp · FID Δ: +0.014, +0.039, +0.055 · R Δ: −0.07, −0.08, +0.29 pp</a:t>
-            </a:r>
-            <a:endParaRPr sz="1050"/>
-          </a:p>
-        </p:txBody>
-      </p:sp>
-      <p:sp>
-        <p:nvSpPr>
-          <p:cNvPr id="17" name="Shape 15">
-            <a:extLst xmlns:a="http://schemas.openxmlformats.org/drawingml/2006/main">
-              <a:ext uri="{FF2B5EF4-FFF2-40B4-BE49-F238E27FC236}">
-                <a16:creationId xmlns:a16="http://schemas.microsoft.com/office/drawing/2014/main" id="{4CBC7606-5E03-4C13-9CBE-8C0A220C3D53}"/>
-              </a:ext>
-            </a:extLst>
-          </p:cNvPr>
-          <p:cNvSpPr>
-            <a:spLocks xmlns:a="http://schemas.openxmlformats.org/drawingml/2006/main" noGrp="1"/>
-          </p:cNvSpPr>
-          <p:nvPr/>
-        </p:nvSpPr>
-        <p:spPr>
-          <a:xfrm xmlns:a="http://schemas.openxmlformats.org/drawingml/2006/main">
-            <a:off x="5669280" y="3337560"/>
-            <a:ext cx="3108960" cy="914400"/>
-          </a:xfrm>
-          <a:prstGeom xmlns:a="http://schemas.openxmlformats.org/drawingml/2006/main" prst="roundRect">
-            <a:avLst>
-              <a:gd name="adj" fmla="val 6000"/>
-            </a:avLst>
+              <a:t>Both metrics improve, and the full image-cluster R interval is above zero.</a:t>
+            </a:r>
+            <a:endParaRPr sz="1150"/>
+          </a:p>
+        </p:txBody>
+      </p:sp>
+      <p:sp>
+        <p:nvSpPr>
+          <p:cNvPr id="17" name="Text 15">
+            <a:extLst xmlns:a="http://schemas.openxmlformats.org/drawingml/2006/main">
+              <a:ext uri="{FF2B5EF4-FFF2-40B4-BE49-F238E27FC236}">
+                <a16:creationId xmlns:a16="http://schemas.microsoft.com/office/drawing/2014/main" id="{2EC6DB93-7D28-4417-98CD-8923EF138480}"/>
+              </a:ext>
+            </a:extLst>
+          </p:cNvPr>
+          <p:cNvSpPr>
+            <a:spLocks xmlns:a="http://schemas.openxmlformats.org/drawingml/2006/main" noGrp="1"/>
+          </p:cNvSpPr>
+          <p:nvPr/>
+        </p:nvSpPr>
+        <p:spPr>
+          <a:xfrm xmlns:a="http://schemas.openxmlformats.org/drawingml/2006/main">
+            <a:off x="365760" y="4828032"/>
+            <a:ext cx="914400" cy="201168"/>
+          </a:xfrm>
+          <a:prstGeom xmlns:a="http://schemas.openxmlformats.org/drawingml/2006/main" prst="rect">
+            <a:avLst/>
+          </a:prstGeom>
+          <a:noFill xmlns:a="http://schemas.openxmlformats.org/drawingml/2006/main"/>
+        </p:spPr>
+        <p:txBody>
+          <a:bodyPr xmlns:a="http://schemas.openxmlformats.org/drawingml/2006/main" wrap="square" anchor="ctr"/>
+          <a:lstStyle xmlns:a="http://schemas.openxmlformats.org/drawingml/2006/main"/>
+          <a:p xmlns:a="http://schemas.openxmlformats.org/drawingml/2006/main">
+            <a:pPr marL="0" indent="0">
+              <a:buNone/>
+            </a:pPr>
+            <a:r>
+              <a:rPr sz="900">
+                <a:solidFill>
+                  <a:srgbClr val="6B7280"/>
+                </a:solidFill>
+                <a:latin typeface="Arial"/>
+                <a:ea typeface="Arial"/>
+                <a:cs typeface="Arial"/>
+              </a:rPr>
+              <a:t>10 / 15</a:t>
+            </a:r>
+            <a:endParaRPr sz="900"/>
+          </a:p>
+        </p:txBody>
+      </p:sp>
+      <p:sp>
+        <p:nvSpPr>
+          <p:cNvPr id="18" name="Shape 16">
+            <a:extLst xmlns:a="http://schemas.openxmlformats.org/drawingml/2006/main">
+              <a:ext uri="{FF2B5EF4-FFF2-40B4-BE49-F238E27FC236}">
+                <a16:creationId xmlns:a16="http://schemas.microsoft.com/office/drawing/2014/main" id="{84555E5B-078E-493D-AD28-7D2608621E18}"/>
+              </a:ext>
+            </a:extLst>
+          </p:cNvPr>
+          <p:cNvSpPr>
+            <a:spLocks xmlns:a="http://schemas.openxmlformats.org/drawingml/2006/main" noGrp="1"/>
+          </p:cNvSpPr>
+          <p:nvPr/>
+        </p:nvSpPr>
+        <p:spPr>
+          <a:xfrm xmlns:a="http://schemas.openxmlformats.org/drawingml/2006/main">
+            <a:off x="7955280" y="4864608"/>
+            <a:ext cx="822960" cy="54864"/>
+          </a:xfrm>
+          <a:prstGeom xmlns:a="http://schemas.openxmlformats.org/drawingml/2006/main" prst="rect">
+            <a:avLst/>
+          </a:prstGeom>
+          <a:solidFill xmlns:a="http://schemas.openxmlformats.org/drawingml/2006/main">
+            <a:srgbClr val="E8EEF7"/>
+          </a:solidFill>
+        </p:spPr>
+        <p:txBody>
+          <a:bodyPr xmlns:a="http://schemas.openxmlformats.org/drawingml/2006/main"/>
+          <a:lstStyle xmlns:a="http://schemas.openxmlformats.org/drawingml/2006/main"/>
+          <a:p xmlns:a="http://schemas.openxmlformats.org/drawingml/2006/main">
+            <a:endParaRPr/>
+          </a:p>
+        </p:txBody>
+      </p:sp>
+      <p:sp>
+        <p:nvSpPr>
+          <p:cNvPr id="19" name="Shape 17">
+            <a:extLst xmlns:a="http://schemas.openxmlformats.org/drawingml/2006/main">
+              <a:ext uri="{FF2B5EF4-FFF2-40B4-BE49-F238E27FC236}">
+                <a16:creationId xmlns:a16="http://schemas.microsoft.com/office/drawing/2014/main" id="{55C9039F-C1CA-4D5F-AB9B-8D239443A79A}"/>
+              </a:ext>
+            </a:extLst>
+          </p:cNvPr>
+          <p:cNvSpPr>
+            <a:spLocks xmlns:a="http://schemas.openxmlformats.org/drawingml/2006/main" noGrp="1"/>
+          </p:cNvSpPr>
+          <p:nvPr/>
+        </p:nvSpPr>
+        <p:spPr>
+          <a:xfrm xmlns:a="http://schemas.openxmlformats.org/drawingml/2006/main">
+            <a:off x="7955280" y="4864608"/>
+            <a:ext cx="506437" cy="54864"/>
+          </a:xfrm>
+          <a:prstGeom xmlns:a="http://schemas.openxmlformats.org/drawingml/2006/main" prst="rect">
+            <a:avLst/>
           </a:prstGeom>
           <a:solidFill xmlns:a="http://schemas.openxmlformats.org/drawingml/2006/main">
             <a:srgbClr val="1F3864"/>
@@ -5344,337 +4554,10 @@
           </a:p>
         </p:txBody>
       </p:sp>
-      <p:sp>
-        <p:nvSpPr>
-          <p:cNvPr id="18" name="Text 16">
-            <a:extLst xmlns:a="http://schemas.openxmlformats.org/drawingml/2006/main">
-              <a:ext uri="{FF2B5EF4-FFF2-40B4-BE49-F238E27FC236}">
-                <a16:creationId xmlns:a16="http://schemas.microsoft.com/office/drawing/2014/main" id="{4C168151-475E-4BAE-B8B7-3CEAF14E6DE9}"/>
-              </a:ext>
-            </a:extLst>
-          </p:cNvPr>
-          <p:cNvSpPr>
-            <a:spLocks xmlns:a="http://schemas.openxmlformats.org/drawingml/2006/main" noGrp="1"/>
-          </p:cNvSpPr>
-          <p:nvPr/>
-        </p:nvSpPr>
-        <p:spPr>
-          <a:xfrm xmlns:a="http://schemas.openxmlformats.org/drawingml/2006/main">
-            <a:off x="5833872" y="3429000"/>
-            <a:ext cx="2779776" cy="731520"/>
-          </a:xfrm>
-          <a:prstGeom xmlns:a="http://schemas.openxmlformats.org/drawingml/2006/main" prst="rect">
-            <a:avLst/>
-          </a:prstGeom>
-          <a:noFill xmlns:a="http://schemas.openxmlformats.org/drawingml/2006/main"/>
-        </p:spPr>
-        <p:txBody>
-          <a:bodyPr xmlns:a="http://schemas.openxmlformats.org/drawingml/2006/main" wrap="square" anchor="ctr"/>
-          <a:lstStyle xmlns:a="http://schemas.openxmlformats.org/drawingml/2006/main"/>
-          <a:p xmlns:a="http://schemas.openxmlformats.org/drawingml/2006/main">
-            <a:pPr marL="0" indent="0">
-              <a:lnSpc>
-                <a:spcPts val="1200"/>
-              </a:lnSpc>
-              <a:buNone/>
-            </a:pPr>
-            <a:r>
-              <a:rPr sz="1100" b="1">
-                <a:solidFill>
-                  <a:srgbClr val="FFFFFF"/>
-                </a:solidFill>
-                <a:latin typeface="Arial"/>
-                <a:ea typeface="Arial"/>
-                <a:cs typeface="Arial"/>
-              </a:rPr>
-              <a:t>Target improved in only 1/3 seeds. FID was slightly worse in 3/3.</a:t>
-            </a:r>
-            <a:endParaRPr sz="1100"/>
-          </a:p>
-        </p:txBody>
-      </p:sp>
-      <p:sp>
-        <p:nvSpPr>
-          <p:cNvPr id="20" name="Text 18">
-            <a:extLst xmlns:a="http://schemas.openxmlformats.org/drawingml/2006/main">
-              <a:ext uri="{FF2B5EF4-FFF2-40B4-BE49-F238E27FC236}">
-                <a16:creationId xmlns:a16="http://schemas.microsoft.com/office/drawing/2014/main" id="{8A8A924B-940B-446F-A61E-6E5DF2C31C7B}"/>
-              </a:ext>
-            </a:extLst>
-          </p:cNvPr>
-          <p:cNvSpPr>
-            <a:spLocks xmlns:a="http://schemas.openxmlformats.org/drawingml/2006/main" noGrp="1"/>
-          </p:cNvSpPr>
-          <p:nvPr/>
-        </p:nvSpPr>
-        <p:spPr>
-          <a:xfrm xmlns:a="http://schemas.openxmlformats.org/drawingml/2006/main">
-            <a:off x="365760" y="4828032"/>
-            <a:ext cx="914400" cy="201168"/>
-          </a:xfrm>
-          <a:prstGeom xmlns:a="http://schemas.openxmlformats.org/drawingml/2006/main" prst="rect">
-            <a:avLst/>
-          </a:prstGeom>
-          <a:noFill xmlns:a="http://schemas.openxmlformats.org/drawingml/2006/main"/>
-        </p:spPr>
-        <p:txBody>
-          <a:bodyPr xmlns:a="http://schemas.openxmlformats.org/drawingml/2006/main" wrap="square" anchor="ctr"/>
-          <a:lstStyle xmlns:a="http://schemas.openxmlformats.org/drawingml/2006/main"/>
-          <a:p xmlns:a="http://schemas.openxmlformats.org/drawingml/2006/main">
-            <a:pPr marL="0" indent="0">
-              <a:buNone/>
-            </a:pPr>
-            <a:r>
-              <a:rPr sz="900">
-                <a:solidFill>
-                  <a:srgbClr val="6B7280"/>
-                </a:solidFill>
-                <a:latin typeface="Arial"/>
-                <a:ea typeface="Arial"/>
-                <a:cs typeface="Arial"/>
-              </a:rPr>
-              <a:t>10 / 15</a:t>
-            </a:r>
-            <a:endParaRPr sz="900"/>
-          </a:p>
-        </p:txBody>
-      </p:sp>
-      <p:sp>
-        <p:nvSpPr>
-          <p:cNvPr id="21" name="Shape 19">
-            <a:extLst xmlns:a="http://schemas.openxmlformats.org/drawingml/2006/main">
-              <a:ext uri="{FF2B5EF4-FFF2-40B4-BE49-F238E27FC236}">
-                <a16:creationId xmlns:a16="http://schemas.microsoft.com/office/drawing/2014/main" id="{330F4208-A699-4B9E-8419-2220300566B9}"/>
-              </a:ext>
-            </a:extLst>
-          </p:cNvPr>
-          <p:cNvSpPr>
-            <a:spLocks xmlns:a="http://schemas.openxmlformats.org/drawingml/2006/main" noGrp="1"/>
-          </p:cNvSpPr>
-          <p:nvPr/>
-        </p:nvSpPr>
-        <p:spPr>
-          <a:xfrm xmlns:a="http://schemas.openxmlformats.org/drawingml/2006/main">
-            <a:off x="7955280" y="4864608"/>
-            <a:ext cx="822960" cy="54864"/>
-          </a:xfrm>
-          <a:prstGeom xmlns:a="http://schemas.openxmlformats.org/drawingml/2006/main" prst="rect">
-            <a:avLst/>
-          </a:prstGeom>
-          <a:solidFill xmlns:a="http://schemas.openxmlformats.org/drawingml/2006/main">
-            <a:srgbClr val="E8EEF7"/>
-          </a:solidFill>
-        </p:spPr>
-        <p:txBody>
-          <a:bodyPr xmlns:a="http://schemas.openxmlformats.org/drawingml/2006/main"/>
-          <a:lstStyle xmlns:a="http://schemas.openxmlformats.org/drawingml/2006/main"/>
-          <a:p xmlns:a="http://schemas.openxmlformats.org/drawingml/2006/main">
-            <a:endParaRPr/>
-          </a:p>
-        </p:txBody>
-      </p:sp>
-      <p:sp>
-        <p:nvSpPr>
-          <p:cNvPr id="22" name="Shape 20">
-            <a:extLst xmlns:a="http://schemas.openxmlformats.org/drawingml/2006/main">
-              <a:ext uri="{FF2B5EF4-FFF2-40B4-BE49-F238E27FC236}">
-                <a16:creationId xmlns:a16="http://schemas.microsoft.com/office/drawing/2014/main" id="{A1315EB0-AC15-477B-A7DA-7B44B53CDDF3}"/>
-              </a:ext>
-            </a:extLst>
-          </p:cNvPr>
-          <p:cNvSpPr>
-            <a:spLocks xmlns:a="http://schemas.openxmlformats.org/drawingml/2006/main" noGrp="1"/>
-          </p:cNvSpPr>
-          <p:nvPr/>
-        </p:nvSpPr>
-        <p:spPr>
-          <a:xfrm xmlns:a="http://schemas.openxmlformats.org/drawingml/2006/main">
-            <a:off x="7955280" y="4864608"/>
-            <a:ext cx="822960" cy="54864"/>
-          </a:xfrm>
-          <a:prstGeom xmlns:a="http://schemas.openxmlformats.org/drawingml/2006/main" prst="rect">
-            <a:avLst/>
-          </a:prstGeom>
-          <a:solidFill xmlns:a="http://schemas.openxmlformats.org/drawingml/2006/main">
-            <a:srgbClr val="1F3864"/>
-          </a:solidFill>
-        </p:spPr>
-        <p:txBody>
-          <a:bodyPr xmlns:a="http://schemas.openxmlformats.org/drawingml/2006/main"/>
-          <a:lstStyle xmlns:a="http://schemas.openxmlformats.org/drawingml/2006/main"/>
-          <a:p xmlns:a="http://schemas.openxmlformats.org/drawingml/2006/main">
-            <a:endParaRPr/>
-          </a:p>
-        </p:txBody>
-      </p:sp>
-      <p:graphicFrame>
-        <p:nvGraphicFramePr>
-          <p:cNvPr id="46" name="Chart"/>
-          <p:cNvGraphicFramePr/>
-          <p:nvPr/>
-        </p:nvGraphicFramePr>
-        <p:xfrm>
-          <a:off xmlns:a="http://schemas.openxmlformats.org/drawingml/2006/main" x="571500" y="1543050"/>
-          <a:ext xmlns:a="http://schemas.openxmlformats.org/drawingml/2006/main" cx="2667000" cy="1457325"/>
-        </p:xfrm>
-        <a:graphic xmlns:a="http://schemas.openxmlformats.org/drawingml/2006/main">
-          <a:graphicData uri="http://schemas.openxmlformats.org/drawingml/2006/chart">
-            <c:chart xmlns:r="http://schemas.openxmlformats.org/officeDocument/2006/relationships" xmlns:c="http://schemas.openxmlformats.org/drawingml/2006/chart" r:id="R8882a3137496488c"/>
-          </a:graphicData>
-        </a:graphic>
-      </p:graphicFrame>
-      <p:sp>
-        <p:nvSpPr>
-          <p:cNvPr id="24" name="r-chart-label">
-            <a:extLst xmlns:a="http://schemas.openxmlformats.org/drawingml/2006/main">
-              <a:ext uri="{FF2B5EF4-FFF2-40B4-BE49-F238E27FC236}">
-                <a16:creationId xmlns:a16="http://schemas.microsoft.com/office/drawing/2014/main" id="{B6730C57-FB06-4703-B382-9A77F9EAE450}"/>
-              </a:ext>
-            </a:extLst>
-          </p:cNvPr>
-          <p:cNvSpPr>
-            <a:spLocks xmlns:a="http://schemas.openxmlformats.org/drawingml/2006/main" noGrp="1"/>
-          </p:cNvSpPr>
-          <p:nvPr/>
-        </p:nvSpPr>
-        <p:spPr>
-          <a:xfrm xmlns:a="http://schemas.openxmlformats.org/drawingml/2006/main">
-            <a:off x="3886200" y="1524000"/>
-            <a:ext cx="2143125" cy="171450"/>
-          </a:xfrm>
-          <a:prstGeom xmlns:a="http://schemas.openxmlformats.org/drawingml/2006/main" prst="rect">
-            <a:avLst/>
-          </a:prstGeom>
-          <a:noFill xmlns:a="http://schemas.openxmlformats.org/drawingml/2006/main"/>
-          <a:ln xmlns:a="http://schemas.openxmlformats.org/drawingml/2006/main" w="0">
-            <a:noFill/>
-            <a:prstDash val="solid"/>
-          </a:ln>
-        </p:spPr>
-        <p:txBody>
-          <a:bodyPr xmlns:a="http://schemas.openxmlformats.org/drawingml/2006/main" lIns="19050" tIns="19050" rIns="19050" bIns="19050" anchor="ctr">
-            <a:normAutofit fontScale="100000"/>
-          </a:bodyPr>
-          <a:lstStyle xmlns:a="http://schemas.openxmlformats.org/drawingml/2006/main"/>
-          <a:p xmlns:a="http://schemas.openxmlformats.org/drawingml/2006/main">
-            <a:pPr algn="ctr">
-              <a:defRPr sz="825" b="1">
-                <a:solidFill>
-                  <a:srgbClr val="17365D"/>
-                </a:solidFill>
-                <a:latin typeface="Arial"/>
-                <a:ea typeface="Arial"/>
-                <a:cs typeface="Arial"/>
-              </a:defRPr>
-            </a:pPr>
-            <a:r>
-              <a:rPr sz="825" b="1">
-                <a:solidFill>
-                  <a:srgbClr val="17365D"/>
-                </a:solidFill>
-                <a:latin typeface="Arial"/>
-                <a:ea typeface="Arial"/>
-                <a:cs typeface="Arial"/>
-              </a:rPr>
-              <a:t>R-precision (%)</a:t>
-            </a:r>
-          </a:p>
-        </p:txBody>
-      </p:sp>
-      <p:sp>
-        <p:nvSpPr>
-          <p:cNvPr id="25" name="colour-chart-label">
-            <a:extLst xmlns:a="http://schemas.openxmlformats.org/drawingml/2006/main">
-              <a:ext uri="{FF2B5EF4-FFF2-40B4-BE49-F238E27FC236}">
-                <a16:creationId xmlns:a16="http://schemas.microsoft.com/office/drawing/2014/main" id="{FE585EF6-233C-4D27-96FF-B46E1BF6A1F3}"/>
-              </a:ext>
-            </a:extLst>
-          </p:cNvPr>
-          <p:cNvSpPr>
-            <a:spLocks xmlns:a="http://schemas.openxmlformats.org/drawingml/2006/main" noGrp="1"/>
-          </p:cNvSpPr>
-          <p:nvPr/>
-        </p:nvSpPr>
-        <p:spPr>
-          <a:xfrm xmlns:a="http://schemas.openxmlformats.org/drawingml/2006/main">
-            <a:off x="6305550" y="1524000"/>
-            <a:ext cx="2143125" cy="171450"/>
-          </a:xfrm>
-          <a:prstGeom xmlns:a="http://schemas.openxmlformats.org/drawingml/2006/main" prst="rect">
-            <a:avLst/>
-          </a:prstGeom>
-          <a:noFill xmlns:a="http://schemas.openxmlformats.org/drawingml/2006/main"/>
-          <a:ln xmlns:a="http://schemas.openxmlformats.org/drawingml/2006/main" w="0">
-            <a:noFill/>
-            <a:prstDash val="solid"/>
-          </a:ln>
-        </p:spPr>
-        <p:txBody>
-          <a:bodyPr xmlns:a="http://schemas.openxmlformats.org/drawingml/2006/main" lIns="19050" tIns="19050" rIns="19050" bIns="19050" anchor="ctr">
-            <a:normAutofit fontScale="100000"/>
-          </a:bodyPr>
-          <a:lstStyle xmlns:a="http://schemas.openxmlformats.org/drawingml/2006/main"/>
-          <a:p xmlns:a="http://schemas.openxmlformats.org/drawingml/2006/main">
-            <a:pPr algn="ctr">
-              <a:defRPr sz="825" b="1">
-                <a:solidFill>
-                  <a:srgbClr val="C95A00"/>
-                </a:solidFill>
-                <a:latin typeface="Arial"/>
-                <a:ea typeface="Arial"/>
-                <a:cs typeface="Arial"/>
-              </a:defRPr>
-            </a:pPr>
-            <a:r>
-              <a:rPr sz="825" b="1">
-                <a:solidFill>
-                  <a:srgbClr val="C95A00"/>
-                </a:solidFill>
-                <a:latin typeface="Arial"/>
-                <a:ea typeface="Arial"/>
-                <a:cs typeface="Arial"/>
-              </a:rPr>
-              <a:t>Part–colour (%)</a:t>
-            </a:r>
-          </a:p>
-        </p:txBody>
-      </p:sp>
-      <p:graphicFrame>
-        <p:nvGraphicFramePr>
-          <p:cNvPr id="49" name="Chart"/>
-          <p:cNvGraphicFramePr/>
-          <p:nvPr/>
-        </p:nvGraphicFramePr>
-        <p:xfrm>
-          <a:off xmlns:a="http://schemas.openxmlformats.org/drawingml/2006/main" x="3886200" y="1685925"/>
-          <a:ext xmlns:a="http://schemas.openxmlformats.org/drawingml/2006/main" cx="2143125" cy="1323975"/>
-        </p:xfrm>
-        <a:graphic xmlns:a="http://schemas.openxmlformats.org/drawingml/2006/main">
-          <a:graphicData uri="http://schemas.openxmlformats.org/drawingml/2006/chart">
-            <c:chart xmlns:r="http://schemas.openxmlformats.org/officeDocument/2006/relationships" xmlns:c="http://schemas.openxmlformats.org/drawingml/2006/chart" r:id="R949feeb6a4e74e99"/>
-          </a:graphicData>
-        </a:graphic>
-      </p:graphicFrame>
-      <p:graphicFrame>
-        <p:nvGraphicFramePr>
-          <p:cNvPr id="50" name="Chart"/>
-          <p:cNvGraphicFramePr/>
-          <p:nvPr/>
-        </p:nvGraphicFramePr>
-        <p:xfrm>
-          <a:off xmlns:a="http://schemas.openxmlformats.org/drawingml/2006/main" x="6305550" y="1685925"/>
-          <a:ext xmlns:a="http://schemas.openxmlformats.org/drawingml/2006/main" cx="2143125" cy="1323975"/>
-        </p:xfrm>
-        <a:graphic xmlns:a="http://schemas.openxmlformats.org/drawingml/2006/main">
-          <a:graphicData uri="http://schemas.openxmlformats.org/drawingml/2006/chart">
-            <c:chart xmlns:r="http://schemas.openxmlformats.org/officeDocument/2006/relationships" xmlns:c="http://schemas.openxmlformats.org/drawingml/2006/chart" r:id="R342c0469cf954760"/>
-          </a:graphicData>
-        </a:graphic>
-      </p:graphicFrame>
     </p:spTree>
     <p:extLst>
       <p:ext uri="{BB962C8B-B14F-4D97-AF65-F5344CB8AC3E}">
-        <p14:creationId xmlns:p14="http://schemas.microsoft.com/office/powerpoint/2010/main" val="2086258329"/>
+        <p14:creationId xmlns:p14="http://schemas.microsoft.com/office/powerpoint/2010/main" val="1036377293"/>
       </p:ext>
     </p:extLst>
   </p:cSld>
@@ -5705,7 +4588,7 @@
           <p:cNvPr id="2" name="Shape 0">
             <a:extLst xmlns:a="http://schemas.openxmlformats.org/drawingml/2006/main">
               <a:ext uri="{FF2B5EF4-FFF2-40B4-BE49-F238E27FC236}">
-                <a16:creationId xmlns:a16="http://schemas.microsoft.com/office/drawing/2014/main" id="{C42033E0-293F-4760-8E1C-D2576A14587B}"/>
+                <a16:creationId xmlns:a16="http://schemas.microsoft.com/office/drawing/2014/main" id="{FCF48FBC-5516-46E8-B1B3-4422E39ABF29}"/>
               </a:ext>
             </a:extLst>
           </p:cNvPr>
@@ -5739,7 +4622,7 @@
           <p:cNvPr id="3" name="Text 1">
             <a:extLst xmlns:a="http://schemas.openxmlformats.org/drawingml/2006/main">
               <a:ext uri="{FF2B5EF4-FFF2-40B4-BE49-F238E27FC236}">
-                <a16:creationId xmlns:a16="http://schemas.microsoft.com/office/drawing/2014/main" id="{6A874BC9-8EFB-4448-A052-0AB338EBCE98}"/>
+                <a16:creationId xmlns:a16="http://schemas.microsoft.com/office/drawing/2014/main" id="{3935D704-B055-41E6-A77E-B865147F474F}"/>
               </a:ext>
             </a:extLst>
           </p:cNvPr>
@@ -5785,7 +4668,7 @@
           <p:cNvPr id="4" name="Text 2">
             <a:extLst xmlns:a="http://schemas.openxmlformats.org/drawingml/2006/main">
               <a:ext uri="{FF2B5EF4-FFF2-40B4-BE49-F238E27FC236}">
-                <a16:creationId xmlns:a16="http://schemas.microsoft.com/office/drawing/2014/main" id="{86D787F5-27C6-4D8E-ACE0-FFD74F8C0EE0}"/>
+                <a16:creationId xmlns:a16="http://schemas.microsoft.com/office/drawing/2014/main" id="{B17940FC-87FD-4A32-A243-064BB3F757A9}"/>
               </a:ext>
             </a:extLst>
           </p:cNvPr>
@@ -5812,7 +4695,7 @@
               <a:buNone/>
             </a:pPr>
             <a:r>
-              <a:rPr sz="2100" b="1">
+              <a:rPr sz="1875" b="1">
                 <a:solidFill>
                   <a:srgbClr val="1F2937"/>
                 </a:solidFill>
@@ -5820,7 +4703,7 @@
                 <a:ea typeface="Arial"/>
                 <a:cs typeface="Arial"/>
               </a:rPr>
-              <a:t>The Aggregate Target Effect Includes Zero</a:t>
+              <a:t>Native Defaults Reveal a Quality–Alignment Trade-off</a:t>
             </a:r>
             <a:endParaRPr sz="2100"/>
           </a:p>
@@ -5831,7 +4714,7 @@
           <p:cNvPr id="5" name="Text 3">
             <a:extLst xmlns:a="http://schemas.openxmlformats.org/drawingml/2006/main">
               <a:ext uri="{FF2B5EF4-FFF2-40B4-BE49-F238E27FC236}">
-                <a16:creationId xmlns:a16="http://schemas.microsoft.com/office/drawing/2014/main" id="{39D0C23C-94A5-4CC5-849F-7898B2DE9D92}"/>
+                <a16:creationId xmlns:a16="http://schemas.microsoft.com/office/drawing/2014/main" id="{292556EE-53A4-4EE5-B725-48E2FF45ADA1}"/>
               </a:ext>
             </a:extLst>
           </p:cNvPr>
@@ -5866,7 +4749,7 @@
                 <a:ea typeface="Arial"/>
                 <a:cs typeface="Arial"/>
               </a:rPr>
-              <a:t>Statistical uncertainty blocks a positive output-level claim</a:t>
+              <a:t>DM-GAN samples CA; MDD uses the mean</a:t>
             </a:r>
             <a:endParaRPr sz="1150"/>
           </a:p>
@@ -5877,23 +4760,23 @@
           <p:cNvPr id="6" name="Shape 4">
             <a:extLst xmlns:a="http://schemas.openxmlformats.org/drawingml/2006/main">
               <a:ext uri="{FF2B5EF4-FFF2-40B4-BE49-F238E27FC236}">
-                <a16:creationId xmlns:a16="http://schemas.microsoft.com/office/drawing/2014/main" id="{D15478CA-B10D-4A4E-9B4D-975E1D55453C}"/>
-              </a:ext>
-            </a:extLst>
-          </p:cNvPr>
-          <p:cNvSpPr>
-            <a:spLocks xmlns:a="http://schemas.openxmlformats.org/drawingml/2006/main" noGrp="1"/>
-          </p:cNvSpPr>
-          <p:nvPr/>
-        </p:nvSpPr>
-        <p:spPr>
-          <a:xfrm xmlns:a="http://schemas.openxmlformats.org/drawingml/2006/main">
-            <a:off x="365760" y="987552"/>
-            <a:ext cx="2514600" cy="914400"/>
+                <a16:creationId xmlns:a16="http://schemas.microsoft.com/office/drawing/2014/main" id="{EE1C6AEA-F400-482A-8C22-74E93EF3E8E1}"/>
+              </a:ext>
+            </a:extLst>
+          </p:cNvPr>
+          <p:cNvSpPr>
+            <a:spLocks xmlns:a="http://schemas.openxmlformats.org/drawingml/2006/main" noGrp="1"/>
+          </p:cNvSpPr>
+          <p:nvPr/>
+        </p:nvSpPr>
+        <p:spPr>
+          <a:xfrm xmlns:a="http://schemas.openxmlformats.org/drawingml/2006/main">
+            <a:off x="365760" y="1051560"/>
+            <a:ext cx="4114800" cy="1965960"/>
           </a:xfrm>
           <a:prstGeom xmlns:a="http://schemas.openxmlformats.org/drawingml/2006/main" prst="roundRect">
             <a:avLst>
-              <a:gd name="adj" fmla="val 8000"/>
+              <a:gd name="adj" fmla="val 2791"/>
             </a:avLst>
           </a:prstGeom>
           <a:solidFill xmlns:a="http://schemas.openxmlformats.org/drawingml/2006/main">
@@ -5916,164 +4799,159 @@
       </p:sp>
       <p:sp>
         <p:nvSpPr>
-          <p:cNvPr id="7" name="Text 5">
-            <a:extLst xmlns:a="http://schemas.openxmlformats.org/drawingml/2006/main">
-              <a:ext uri="{FF2B5EF4-FFF2-40B4-BE49-F238E27FC236}">
-                <a16:creationId xmlns:a16="http://schemas.microsoft.com/office/drawing/2014/main" id="{2F1412B1-D18A-4C74-B451-E4C956308978}"/>
-              </a:ext>
-            </a:extLst>
-          </p:cNvPr>
-          <p:cNvSpPr>
-            <a:spLocks xmlns:a="http://schemas.openxmlformats.org/drawingml/2006/main" noGrp="1"/>
-          </p:cNvSpPr>
-          <p:nvPr/>
-        </p:nvSpPr>
-        <p:spPr>
-          <a:xfrm xmlns:a="http://schemas.openxmlformats.org/drawingml/2006/main">
-            <a:off x="365760" y="1042416"/>
-            <a:ext cx="2514600" cy="237744"/>
-          </a:xfrm>
-          <a:prstGeom xmlns:a="http://schemas.openxmlformats.org/drawingml/2006/main" prst="rect">
-            <a:avLst/>
-          </a:prstGeom>
-          <a:noFill xmlns:a="http://schemas.openxmlformats.org/drawingml/2006/main"/>
-        </p:spPr>
-        <p:txBody>
-          <a:bodyPr xmlns:a="http://schemas.openxmlformats.org/drawingml/2006/main" wrap="square" anchor="ctr"/>
-          <a:lstStyle xmlns:a="http://schemas.openxmlformats.org/drawingml/2006/main"/>
-          <a:p xmlns:a="http://schemas.openxmlformats.org/drawingml/2006/main">
-            <a:pPr marL="0" indent="0" algn="ctr">
-              <a:buNone/>
-            </a:pPr>
-            <a:r>
-              <a:rPr sz="1100" b="1">
-                <a:solidFill>
-                  <a:srgbClr val="1F3864"/>
-                </a:solidFill>
-                <a:latin typeface="Arial"/>
-                <a:ea typeface="Arial"/>
-                <a:cs typeface="Arial"/>
-              </a:rPr>
-              <a:t>PART–COLOUR</a:t>
-            </a:r>
-            <a:endParaRPr sz="1100"/>
-          </a:p>
-        </p:txBody>
-      </p:sp>
-      <p:sp>
-        <p:nvSpPr>
-          <p:cNvPr id="8" name="Text 6">
-            <a:extLst xmlns:a="http://schemas.openxmlformats.org/drawingml/2006/main">
-              <a:ext uri="{FF2B5EF4-FFF2-40B4-BE49-F238E27FC236}">
-                <a16:creationId xmlns:a16="http://schemas.microsoft.com/office/drawing/2014/main" id="{450C30DB-4C19-47DD-A9B6-627BB661C0C2}"/>
-              </a:ext>
-            </a:extLst>
-          </p:cNvPr>
-          <p:cNvSpPr>
-            <a:spLocks xmlns:a="http://schemas.openxmlformats.org/drawingml/2006/main" noGrp="1"/>
-          </p:cNvSpPr>
-          <p:nvPr/>
-        </p:nvSpPr>
-        <p:spPr>
-          <a:xfrm xmlns:a="http://schemas.openxmlformats.org/drawingml/2006/main">
-            <a:off x="365760" y="1298448"/>
-            <a:ext cx="2514600" cy="310896"/>
-          </a:xfrm>
-          <a:prstGeom xmlns:a="http://schemas.openxmlformats.org/drawingml/2006/main" prst="rect">
-            <a:avLst/>
-          </a:prstGeom>
-          <a:noFill xmlns:a="http://schemas.openxmlformats.org/drawingml/2006/main"/>
-        </p:spPr>
-        <p:txBody>
-          <a:bodyPr xmlns:a="http://schemas.openxmlformats.org/drawingml/2006/main" wrap="square" anchor="ctr"/>
-          <a:lstStyle xmlns:a="http://schemas.openxmlformats.org/drawingml/2006/main"/>
-          <a:p xmlns:a="http://schemas.openxmlformats.org/drawingml/2006/main">
-            <a:pPr marL="0" indent="0" algn="ctr">
-              <a:buNone/>
-            </a:pPr>
-            <a:r>
-              <a:rPr sz="1300" b="1">
-                <a:solidFill>
-                  <a:srgbClr val="0E7C7B"/>
-                </a:solidFill>
-                <a:latin typeface="Arial"/>
-                <a:ea typeface="Arial"/>
-                <a:cs typeface="Arial"/>
-              </a:rPr>
-              <a:t>−0.05 pp</a:t>
-            </a:r>
-            <a:endParaRPr sz="1300"/>
-          </a:p>
-        </p:txBody>
-      </p:sp>
-      <p:sp>
-        <p:nvSpPr>
-          <p:cNvPr id="9" name="Text 7">
-            <a:extLst xmlns:a="http://schemas.openxmlformats.org/drawingml/2006/main">
-              <a:ext uri="{FF2B5EF4-FFF2-40B4-BE49-F238E27FC236}">
-                <a16:creationId xmlns:a16="http://schemas.microsoft.com/office/drawing/2014/main" id="{D45201ED-BD42-4442-9A18-3502312799D2}"/>
-              </a:ext>
-            </a:extLst>
-          </p:cNvPr>
-          <p:cNvSpPr>
-            <a:spLocks xmlns:a="http://schemas.openxmlformats.org/drawingml/2006/main" noGrp="1"/>
-          </p:cNvSpPr>
-          <p:nvPr/>
-        </p:nvSpPr>
-        <p:spPr>
-          <a:xfrm xmlns:a="http://schemas.openxmlformats.org/drawingml/2006/main">
-            <a:off x="365760" y="1609344"/>
-            <a:ext cx="2514600" cy="219456"/>
-          </a:xfrm>
-          <a:prstGeom xmlns:a="http://schemas.openxmlformats.org/drawingml/2006/main" prst="rect">
-            <a:avLst/>
-          </a:prstGeom>
-          <a:noFill xmlns:a="http://schemas.openxmlformats.org/drawingml/2006/main"/>
-        </p:spPr>
-        <p:txBody>
-          <a:bodyPr xmlns:a="http://schemas.openxmlformats.org/drawingml/2006/main" wrap="square" anchor="ctr"/>
-          <a:lstStyle xmlns:a="http://schemas.openxmlformats.org/drawingml/2006/main"/>
-          <a:p xmlns:a="http://schemas.openxmlformats.org/drawingml/2006/main">
-            <a:pPr marL="0" indent="0" algn="ctr">
-              <a:buNone/>
-            </a:pPr>
-            <a:r>
-              <a:rPr sz="1000">
-                <a:solidFill>
-                  <a:srgbClr val="6B7280"/>
-                </a:solidFill>
-                <a:latin typeface="Arial"/>
-                <a:ea typeface="Arial"/>
-                <a:cs typeface="Arial"/>
-              </a:rPr>
-              <a:t>95% CI [−0.15, +0.05]</a:t>
-            </a:r>
-            <a:endParaRPr sz="1000"/>
-          </a:p>
-        </p:txBody>
-      </p:sp>
-      <p:sp>
-        <p:nvSpPr>
-          <p:cNvPr id="10" name="Shape 8">
-            <a:extLst xmlns:a="http://schemas.openxmlformats.org/drawingml/2006/main">
-              <a:ext uri="{FF2B5EF4-FFF2-40B4-BE49-F238E27FC236}">
-                <a16:creationId xmlns:a16="http://schemas.microsoft.com/office/drawing/2014/main" id="{209427D6-8BED-4B02-BF85-E9B86B9A6013}"/>
-              </a:ext>
-            </a:extLst>
-          </p:cNvPr>
-          <p:cNvSpPr>
-            <a:spLocks xmlns:a="http://schemas.openxmlformats.org/drawingml/2006/main" noGrp="1"/>
-          </p:cNvSpPr>
-          <p:nvPr/>
-        </p:nvSpPr>
-        <p:spPr>
-          <a:xfrm xmlns:a="http://schemas.openxmlformats.org/drawingml/2006/main">
-            <a:off x="3017520" y="987552"/>
-            <a:ext cx="2514600" cy="914400"/>
+          <p:cNvPr id="7" name="Shape 5">
+            <a:extLst xmlns:a="http://schemas.openxmlformats.org/drawingml/2006/main">
+              <a:ext uri="{FF2B5EF4-FFF2-40B4-BE49-F238E27FC236}">
+                <a16:creationId xmlns:a16="http://schemas.microsoft.com/office/drawing/2014/main" id="{40A6FFFA-C25D-4F23-9DDA-7579C5B30542}"/>
+              </a:ext>
+            </a:extLst>
+          </p:cNvPr>
+          <p:cNvSpPr>
+            <a:spLocks xmlns:a="http://schemas.openxmlformats.org/drawingml/2006/main" noGrp="1"/>
+          </p:cNvSpPr>
+          <p:nvPr/>
+        </p:nvSpPr>
+        <p:spPr>
+          <a:xfrm xmlns:a="http://schemas.openxmlformats.org/drawingml/2006/main">
+            <a:off x="365760" y="1051560"/>
+            <a:ext cx="4114800" cy="384048"/>
           </a:xfrm>
           <a:prstGeom xmlns:a="http://schemas.openxmlformats.org/drawingml/2006/main" prst="roundRect">
             <a:avLst>
-              <a:gd name="adj" fmla="val 8000"/>
+              <a:gd name="adj" fmla="val 14286"/>
+            </a:avLst>
+          </a:prstGeom>
+          <a:solidFill xmlns:a="http://schemas.openxmlformats.org/drawingml/2006/main">
+            <a:srgbClr val="0E7C7B"/>
+          </a:solidFill>
+        </p:spPr>
+        <p:txBody>
+          <a:bodyPr xmlns:a="http://schemas.openxmlformats.org/drawingml/2006/main"/>
+          <a:lstStyle xmlns:a="http://schemas.openxmlformats.org/drawingml/2006/main"/>
+          <a:p xmlns:a="http://schemas.openxmlformats.org/drawingml/2006/main">
+            <a:endParaRPr/>
+          </a:p>
+        </p:txBody>
+      </p:sp>
+      <p:sp>
+        <p:nvSpPr>
+          <p:cNvPr id="8" name="Text 6">
+            <a:extLst xmlns:a="http://schemas.openxmlformats.org/drawingml/2006/main">
+              <a:ext uri="{FF2B5EF4-FFF2-40B4-BE49-F238E27FC236}">
+                <a16:creationId xmlns:a16="http://schemas.microsoft.com/office/drawing/2014/main" id="{45E21CAE-E99E-4449-9483-ABFCB6C9837A}"/>
+              </a:ext>
+            </a:extLst>
+          </p:cNvPr>
+          <p:cNvSpPr>
+            <a:spLocks xmlns:a="http://schemas.openxmlformats.org/drawingml/2006/main" noGrp="1"/>
+          </p:cNvSpPr>
+          <p:nvPr/>
+        </p:nvSpPr>
+        <p:spPr>
+          <a:xfrm xmlns:a="http://schemas.openxmlformats.org/drawingml/2006/main">
+            <a:off x="365760" y="1097280"/>
+            <a:ext cx="4114800" cy="292608"/>
+          </a:xfrm>
+          <a:prstGeom xmlns:a="http://schemas.openxmlformats.org/drawingml/2006/main" prst="rect">
+            <a:avLst/>
+          </a:prstGeom>
+          <a:noFill xmlns:a="http://schemas.openxmlformats.org/drawingml/2006/main"/>
+        </p:spPr>
+        <p:txBody>
+          <a:bodyPr xmlns:a="http://schemas.openxmlformats.org/drawingml/2006/main" wrap="square" anchor="ctr"/>
+          <a:lstStyle xmlns:a="http://schemas.openxmlformats.org/drawingml/2006/main"/>
+          <a:p xmlns:a="http://schemas.openxmlformats.org/drawingml/2006/main">
+            <a:pPr marL="0" indent="0" algn="ctr">
+              <a:buNone/>
+            </a:pPr>
+            <a:r>
+              <a:rPr sz="1250" b="1">
+                <a:solidFill>
+                  <a:srgbClr val="FFFFFF"/>
+                </a:solidFill>
+                <a:latin typeface="Arial"/>
+                <a:ea typeface="Arial"/>
+                <a:cs typeface="Arial"/>
+              </a:rPr>
+              <a:t>FID ↓</a:t>
+            </a:r>
+            <a:endParaRPr sz="1250"/>
+          </a:p>
+        </p:txBody>
+      </p:sp>
+      <p:sp>
+        <p:nvSpPr>
+          <p:cNvPr id="9" name="Text 7">
+            <a:extLst xmlns:a="http://schemas.openxmlformats.org/drawingml/2006/main">
+              <a:ext uri="{FF2B5EF4-FFF2-40B4-BE49-F238E27FC236}">
+                <a16:creationId xmlns:a16="http://schemas.microsoft.com/office/drawing/2014/main" id="{F219D6E4-CED7-414C-BEEA-1FE492CA9AE8}"/>
+              </a:ext>
+            </a:extLst>
+          </p:cNvPr>
+          <p:cNvSpPr>
+            <a:spLocks xmlns:a="http://schemas.openxmlformats.org/drawingml/2006/main" noGrp="1"/>
+          </p:cNvSpPr>
+          <p:nvPr/>
+        </p:nvSpPr>
+        <p:spPr>
+          <a:xfrm xmlns:a="http://schemas.openxmlformats.org/drawingml/2006/main">
+            <a:off x="530352" y="1536192"/>
+            <a:ext cx="3785616" cy="1371600"/>
+          </a:xfrm>
+          <a:prstGeom xmlns:a="http://schemas.openxmlformats.org/drawingml/2006/main" prst="rect">
+            <a:avLst/>
+          </a:prstGeom>
+          <a:noFill xmlns:a="http://schemas.openxmlformats.org/drawingml/2006/main"/>
+        </p:spPr>
+        <p:txBody>
+          <a:bodyPr xmlns:a="http://schemas.openxmlformats.org/drawingml/2006/main" wrap="square" anchor="t"/>
+          <a:lstStyle xmlns:a="http://schemas.openxmlformats.org/drawingml/2006/main"/>
+          <a:p xmlns:a="http://schemas.openxmlformats.org/drawingml/2006/main">
+            <a:pPr marL="0" indent="0">
+              <a:lnSpc>
+                <a:spcPts val="1300"/>
+              </a:lnSpc>
+              <a:buNone/>
+            </a:pPr>
+            <a:r>
+              <a:rPr sz="1150" b="1">
+                <a:solidFill>
+                  <a:srgbClr val="0E7C7B"/>
+                </a:solidFill>
+                <a:latin typeface="Arial"/>
+                <a:ea typeface="Arial"/>
+                <a:cs typeface="Arial"/>
+              </a:rPr>
+              <a:t>15.7047 → 16.1543
+Δ = +0.4496
+WORSE under the native policy</a:t>
+            </a:r>
+            <a:endParaRPr sz="1150"/>
+          </a:p>
+        </p:txBody>
+      </p:sp>
+      <p:sp>
+        <p:nvSpPr>
+          <p:cNvPr id="10" name="Shape 8">
+            <a:extLst xmlns:a="http://schemas.openxmlformats.org/drawingml/2006/main">
+              <a:ext uri="{FF2B5EF4-FFF2-40B4-BE49-F238E27FC236}">
+                <a16:creationId xmlns:a16="http://schemas.microsoft.com/office/drawing/2014/main" id="{C5B43479-84BF-450A-8CB1-E203678106B3}"/>
+              </a:ext>
+            </a:extLst>
+          </p:cNvPr>
+          <p:cNvSpPr>
+            <a:spLocks xmlns:a="http://schemas.openxmlformats.org/drawingml/2006/main" noGrp="1"/>
+          </p:cNvSpPr>
+          <p:nvPr/>
+        </p:nvSpPr>
+        <p:spPr>
+          <a:xfrm xmlns:a="http://schemas.openxmlformats.org/drawingml/2006/main">
+            <a:off x="4663440" y="1051560"/>
+            <a:ext cx="4114800" cy="1965960"/>
+          </a:xfrm>
+          <a:prstGeom xmlns:a="http://schemas.openxmlformats.org/drawingml/2006/main" prst="roundRect">
+            <a:avLst>
+              <a:gd name="adj" fmla="val 2791"/>
             </a:avLst>
           </a:prstGeom>
           <a:solidFill xmlns:a="http://schemas.openxmlformats.org/drawingml/2006/main">
@@ -6096,470 +4974,22 @@
       </p:sp>
       <p:sp>
         <p:nvSpPr>
-          <p:cNvPr id="11" name="Text 9">
-            <a:extLst xmlns:a="http://schemas.openxmlformats.org/drawingml/2006/main">
-              <a:ext uri="{FF2B5EF4-FFF2-40B4-BE49-F238E27FC236}">
-                <a16:creationId xmlns:a16="http://schemas.microsoft.com/office/drawing/2014/main" id="{F059D79F-1F88-402D-AF58-1A0DFAC31073}"/>
-              </a:ext>
-            </a:extLst>
-          </p:cNvPr>
-          <p:cNvSpPr>
-            <a:spLocks xmlns:a="http://schemas.openxmlformats.org/drawingml/2006/main" noGrp="1"/>
-          </p:cNvSpPr>
-          <p:nvPr/>
-        </p:nvSpPr>
-        <p:spPr>
-          <a:xfrm xmlns:a="http://schemas.openxmlformats.org/drawingml/2006/main">
-            <a:off x="3017520" y="1042416"/>
-            <a:ext cx="2514600" cy="237744"/>
-          </a:xfrm>
-          <a:prstGeom xmlns:a="http://schemas.openxmlformats.org/drawingml/2006/main" prst="rect">
-            <a:avLst/>
-          </a:prstGeom>
-          <a:noFill xmlns:a="http://schemas.openxmlformats.org/drawingml/2006/main"/>
-        </p:spPr>
-        <p:txBody>
-          <a:bodyPr xmlns:a="http://schemas.openxmlformats.org/drawingml/2006/main" wrap="square" anchor="ctr"/>
-          <a:lstStyle xmlns:a="http://schemas.openxmlformats.org/drawingml/2006/main"/>
-          <a:p xmlns:a="http://schemas.openxmlformats.org/drawingml/2006/main">
-            <a:pPr marL="0" indent="0" algn="ctr">
-              <a:buNone/>
-            </a:pPr>
-            <a:r>
-              <a:rPr sz="1100" b="1">
-                <a:solidFill>
-                  <a:srgbClr val="1F3864"/>
-                </a:solidFill>
-                <a:latin typeface="Arial"/>
-                <a:ea typeface="Arial"/>
-                <a:cs typeface="Arial"/>
-              </a:rPr>
-              <a:t>R-PRECISION</a:t>
-            </a:r>
-            <a:endParaRPr sz="1100"/>
-          </a:p>
-        </p:txBody>
-      </p:sp>
-      <p:sp>
-        <p:nvSpPr>
-          <p:cNvPr id="12" name="Text 10">
-            <a:extLst xmlns:a="http://schemas.openxmlformats.org/drawingml/2006/main">
-              <a:ext uri="{FF2B5EF4-FFF2-40B4-BE49-F238E27FC236}">
-                <a16:creationId xmlns:a16="http://schemas.microsoft.com/office/drawing/2014/main" id="{15125CF9-E64E-413D-A9C9-58D7CBA467DE}"/>
-              </a:ext>
-            </a:extLst>
-          </p:cNvPr>
-          <p:cNvSpPr>
-            <a:spLocks xmlns:a="http://schemas.openxmlformats.org/drawingml/2006/main" noGrp="1"/>
-          </p:cNvSpPr>
-          <p:nvPr/>
-        </p:nvSpPr>
-        <p:spPr>
-          <a:xfrm xmlns:a="http://schemas.openxmlformats.org/drawingml/2006/main">
-            <a:off x="3017520" y="1298448"/>
-            <a:ext cx="2514600" cy="310896"/>
-          </a:xfrm>
-          <a:prstGeom xmlns:a="http://schemas.openxmlformats.org/drawingml/2006/main" prst="rect">
-            <a:avLst/>
-          </a:prstGeom>
-          <a:noFill xmlns:a="http://schemas.openxmlformats.org/drawingml/2006/main"/>
-        </p:spPr>
-        <p:txBody>
-          <a:bodyPr xmlns:a="http://schemas.openxmlformats.org/drawingml/2006/main" wrap="square" anchor="ctr"/>
-          <a:lstStyle xmlns:a="http://schemas.openxmlformats.org/drawingml/2006/main"/>
-          <a:p xmlns:a="http://schemas.openxmlformats.org/drawingml/2006/main">
-            <a:pPr marL="0" indent="0" algn="ctr">
-              <a:buNone/>
-            </a:pPr>
-            <a:r>
-              <a:rPr sz="1300" b="1">
-                <a:solidFill>
-                  <a:srgbClr val="0E7C7B"/>
-                </a:solidFill>
-                <a:latin typeface="Arial"/>
-                <a:ea typeface="Arial"/>
-                <a:cs typeface="Arial"/>
-              </a:rPr>
-              <a:t>+0.05 pp</a:t>
-            </a:r>
-            <a:endParaRPr sz="1300"/>
-          </a:p>
-        </p:txBody>
-      </p:sp>
-      <p:sp>
-        <p:nvSpPr>
-          <p:cNvPr id="13" name="Text 11">
-            <a:extLst xmlns:a="http://schemas.openxmlformats.org/drawingml/2006/main">
-              <a:ext uri="{FF2B5EF4-FFF2-40B4-BE49-F238E27FC236}">
-                <a16:creationId xmlns:a16="http://schemas.microsoft.com/office/drawing/2014/main" id="{4B12CA28-EAC6-424E-977F-0D256A193A66}"/>
-              </a:ext>
-            </a:extLst>
-          </p:cNvPr>
-          <p:cNvSpPr>
-            <a:spLocks xmlns:a="http://schemas.openxmlformats.org/drawingml/2006/main" noGrp="1"/>
-          </p:cNvSpPr>
-          <p:nvPr/>
-        </p:nvSpPr>
-        <p:spPr>
-          <a:xfrm xmlns:a="http://schemas.openxmlformats.org/drawingml/2006/main">
-            <a:off x="3017520" y="1609344"/>
-            <a:ext cx="2514600" cy="219456"/>
-          </a:xfrm>
-          <a:prstGeom xmlns:a="http://schemas.openxmlformats.org/drawingml/2006/main" prst="rect">
-            <a:avLst/>
-          </a:prstGeom>
-          <a:noFill xmlns:a="http://schemas.openxmlformats.org/drawingml/2006/main"/>
-        </p:spPr>
-        <p:txBody>
-          <a:bodyPr xmlns:a="http://schemas.openxmlformats.org/drawingml/2006/main" wrap="square" anchor="ctr"/>
-          <a:lstStyle xmlns:a="http://schemas.openxmlformats.org/drawingml/2006/main"/>
-          <a:p xmlns:a="http://schemas.openxmlformats.org/drawingml/2006/main">
-            <a:pPr marL="0" indent="0" algn="ctr">
-              <a:buNone/>
-            </a:pPr>
-            <a:r>
-              <a:rPr sz="1000">
-                <a:solidFill>
-                  <a:srgbClr val="0E7C7B"/>
-                </a:solidFill>
-                <a:latin typeface="Arial"/>
-                <a:ea typeface="Arial"/>
-                <a:cs typeface="Arial"/>
-              </a:rPr>
-              <a:t>95% CI [−0.05, +0.16]</a:t>
-            </a:r>
-            <a:endParaRPr sz="1000"/>
-          </a:p>
-        </p:txBody>
-      </p:sp>
-      <p:sp>
-        <p:nvSpPr>
-          <p:cNvPr id="14" name="Shape 12">
-            <a:extLst xmlns:a="http://schemas.openxmlformats.org/drawingml/2006/main">
-              <a:ext uri="{FF2B5EF4-FFF2-40B4-BE49-F238E27FC236}">
-                <a16:creationId xmlns:a16="http://schemas.microsoft.com/office/drawing/2014/main" id="{61B995AB-4B5D-4C87-AC92-116DE5001761}"/>
-              </a:ext>
-            </a:extLst>
-          </p:cNvPr>
-          <p:cNvSpPr>
-            <a:spLocks xmlns:a="http://schemas.openxmlformats.org/drawingml/2006/main" noGrp="1"/>
-          </p:cNvSpPr>
-          <p:nvPr/>
-        </p:nvSpPr>
-        <p:spPr>
-          <a:xfrm xmlns:a="http://schemas.openxmlformats.org/drawingml/2006/main">
-            <a:off x="5669280" y="987552"/>
-            <a:ext cx="2514600" cy="914400"/>
-          </a:xfrm>
-          <a:prstGeom xmlns:a="http://schemas.openxmlformats.org/drawingml/2006/main" prst="roundRect">
-            <a:avLst>
-              <a:gd name="adj" fmla="val 8000"/>
-            </a:avLst>
-          </a:prstGeom>
-          <a:solidFill xmlns:a="http://schemas.openxmlformats.org/drawingml/2006/main">
-            <a:srgbClr val="F3F6FB"/>
-          </a:solidFill>
-          <a:ln xmlns:a="http://schemas.openxmlformats.org/drawingml/2006/main" w="12700">
-            <a:solidFill>
-              <a:srgbClr val="E8EEF7"/>
-            </a:solidFill>
-            <a:prstDash val="solid"/>
-          </a:ln>
-        </p:spPr>
-        <p:txBody>
-          <a:bodyPr xmlns:a="http://schemas.openxmlformats.org/drawingml/2006/main"/>
-          <a:lstStyle xmlns:a="http://schemas.openxmlformats.org/drawingml/2006/main"/>
-          <a:p xmlns:a="http://schemas.openxmlformats.org/drawingml/2006/main">
-            <a:endParaRPr/>
-          </a:p>
-        </p:txBody>
-      </p:sp>
-      <p:sp>
-        <p:nvSpPr>
-          <p:cNvPr id="15" name="Text 13">
-            <a:extLst xmlns:a="http://schemas.openxmlformats.org/drawingml/2006/main">
-              <a:ext uri="{FF2B5EF4-FFF2-40B4-BE49-F238E27FC236}">
-                <a16:creationId xmlns:a16="http://schemas.microsoft.com/office/drawing/2014/main" id="{C2FC38CE-E5D7-4A53-BAE4-636F6B557FE0}"/>
-              </a:ext>
-            </a:extLst>
-          </p:cNvPr>
-          <p:cNvSpPr>
-            <a:spLocks xmlns:a="http://schemas.openxmlformats.org/drawingml/2006/main" noGrp="1"/>
-          </p:cNvSpPr>
-          <p:nvPr/>
-        </p:nvSpPr>
-        <p:spPr>
-          <a:xfrm xmlns:a="http://schemas.openxmlformats.org/drawingml/2006/main">
-            <a:off x="5669280" y="1042416"/>
-            <a:ext cx="2514600" cy="237744"/>
-          </a:xfrm>
-          <a:prstGeom xmlns:a="http://schemas.openxmlformats.org/drawingml/2006/main" prst="rect">
-            <a:avLst/>
-          </a:prstGeom>
-          <a:noFill xmlns:a="http://schemas.openxmlformats.org/drawingml/2006/main"/>
-        </p:spPr>
-        <p:txBody>
-          <a:bodyPr xmlns:a="http://schemas.openxmlformats.org/drawingml/2006/main" wrap="square" anchor="ctr"/>
-          <a:lstStyle xmlns:a="http://schemas.openxmlformats.org/drawingml/2006/main"/>
-          <a:p xmlns:a="http://schemas.openxmlformats.org/drawingml/2006/main">
-            <a:pPr marL="0" indent="0" algn="ctr">
-              <a:buNone/>
-            </a:pPr>
-            <a:r>
-              <a:rPr sz="1100" b="1">
-                <a:solidFill>
-                  <a:srgbClr val="1F3864"/>
-                </a:solidFill>
-                <a:latin typeface="Arial"/>
-                <a:ea typeface="Arial"/>
-                <a:cs typeface="Arial"/>
-              </a:rPr>
-              <a:t>MEAN FID</a:t>
-            </a:r>
-            <a:endParaRPr sz="1100"/>
-          </a:p>
-        </p:txBody>
-      </p:sp>
-      <p:sp>
-        <p:nvSpPr>
-          <p:cNvPr id="16" name="Text 14">
-            <a:extLst xmlns:a="http://schemas.openxmlformats.org/drawingml/2006/main">
-              <a:ext uri="{FF2B5EF4-FFF2-40B4-BE49-F238E27FC236}">
-                <a16:creationId xmlns:a16="http://schemas.microsoft.com/office/drawing/2014/main" id="{6B3E4E52-3D7B-4F97-90B9-ADE4D1A41E6B}"/>
-              </a:ext>
-            </a:extLst>
-          </p:cNvPr>
-          <p:cNvSpPr>
-            <a:spLocks xmlns:a="http://schemas.openxmlformats.org/drawingml/2006/main" noGrp="1"/>
-          </p:cNvSpPr>
-          <p:nvPr/>
-        </p:nvSpPr>
-        <p:spPr>
-          <a:xfrm xmlns:a="http://schemas.openxmlformats.org/drawingml/2006/main">
-            <a:off x="5669280" y="1298448"/>
-            <a:ext cx="2514600" cy="310896"/>
-          </a:xfrm>
-          <a:prstGeom xmlns:a="http://schemas.openxmlformats.org/drawingml/2006/main" prst="rect">
-            <a:avLst/>
-          </a:prstGeom>
-          <a:noFill xmlns:a="http://schemas.openxmlformats.org/drawingml/2006/main"/>
-        </p:spPr>
-        <p:txBody>
-          <a:bodyPr xmlns:a="http://schemas.openxmlformats.org/drawingml/2006/main" wrap="square" anchor="ctr"/>
-          <a:lstStyle xmlns:a="http://schemas.openxmlformats.org/drawingml/2006/main"/>
-          <a:p xmlns:a="http://schemas.openxmlformats.org/drawingml/2006/main">
-            <a:pPr marL="0" indent="0" algn="ctr">
-              <a:buNone/>
-            </a:pPr>
-            <a:r>
-              <a:rPr sz="1300" b="1">
-                <a:solidFill>
-                  <a:srgbClr val="0E7C7B"/>
-                </a:solidFill>
-                <a:latin typeface="Arial"/>
-                <a:ea typeface="Arial"/>
-                <a:cs typeface="Arial"/>
-              </a:rPr>
-              <a:t>+0.036</a:t>
-            </a:r>
-            <a:endParaRPr sz="1300"/>
-          </a:p>
-        </p:txBody>
-      </p:sp>
-      <p:sp>
-        <p:nvSpPr>
-          <p:cNvPr id="17" name="Text 15">
-            <a:extLst xmlns:a="http://schemas.openxmlformats.org/drawingml/2006/main">
-              <a:ext uri="{FF2B5EF4-FFF2-40B4-BE49-F238E27FC236}">
-                <a16:creationId xmlns:a16="http://schemas.microsoft.com/office/drawing/2014/main" id="{EA77FA44-1544-44E5-B687-C97481632849}"/>
-              </a:ext>
-            </a:extLst>
-          </p:cNvPr>
-          <p:cNvSpPr>
-            <a:spLocks xmlns:a="http://schemas.openxmlformats.org/drawingml/2006/main" noGrp="1"/>
-          </p:cNvSpPr>
-          <p:nvPr/>
-        </p:nvSpPr>
-        <p:spPr>
-          <a:xfrm xmlns:a="http://schemas.openxmlformats.org/drawingml/2006/main">
-            <a:off x="5669280" y="1609344"/>
-            <a:ext cx="2514600" cy="219456"/>
-          </a:xfrm>
-          <a:prstGeom xmlns:a="http://schemas.openxmlformats.org/drawingml/2006/main" prst="rect">
-            <a:avLst/>
-          </a:prstGeom>
-          <a:noFill xmlns:a="http://schemas.openxmlformats.org/drawingml/2006/main"/>
-        </p:spPr>
-        <p:txBody>
-          <a:bodyPr xmlns:a="http://schemas.openxmlformats.org/drawingml/2006/main" wrap="square" anchor="ctr"/>
-          <a:lstStyle xmlns:a="http://schemas.openxmlformats.org/drawingml/2006/main"/>
-          <a:p xmlns:a="http://schemas.openxmlformats.org/drawingml/2006/main">
-            <a:pPr marL="0" indent="0" algn="ctr">
-              <a:buNone/>
-            </a:pPr>
-            <a:r>
-              <a:rPr sz="1000">
-                <a:solidFill>
-                  <a:srgbClr val="0E7C7B"/>
-                </a:solidFill>
-                <a:latin typeface="Arial"/>
-                <a:ea typeface="Arial"/>
-                <a:cs typeface="Arial"/>
-              </a:rPr>
-              <a:t>16.054 → 16.090</a:t>
-            </a:r>
-            <a:endParaRPr sz="1000"/>
-          </a:p>
-        </p:txBody>
-      </p:sp>
-      <p:sp>
-        <p:nvSpPr>
-          <p:cNvPr id="18" name="Shape 16">
-            <a:extLst xmlns:a="http://schemas.openxmlformats.org/drawingml/2006/main">
-              <a:ext uri="{FF2B5EF4-FFF2-40B4-BE49-F238E27FC236}">
-                <a16:creationId xmlns:a16="http://schemas.microsoft.com/office/drawing/2014/main" id="{910A018D-25F0-484E-9797-F482C798C4EE}"/>
-              </a:ext>
-            </a:extLst>
-          </p:cNvPr>
-          <p:cNvSpPr>
-            <a:spLocks xmlns:a="http://schemas.openxmlformats.org/drawingml/2006/main" noGrp="1"/>
-          </p:cNvSpPr>
-          <p:nvPr/>
-        </p:nvSpPr>
-        <p:spPr>
-          <a:xfrm xmlns:a="http://schemas.openxmlformats.org/drawingml/2006/main">
-            <a:off x="365760" y="2057400"/>
-            <a:ext cx="3200400" cy="2514600"/>
-          </a:xfrm>
-          <a:prstGeom xmlns:a="http://schemas.openxmlformats.org/drawingml/2006/main" prst="roundRect">
-            <a:avLst>
-              <a:gd name="adj" fmla="val 2182"/>
-            </a:avLst>
-          </a:prstGeom>
-          <a:solidFill xmlns:a="http://schemas.openxmlformats.org/drawingml/2006/main">
-            <a:srgbClr val="FFFFFF"/>
-          </a:solidFill>
-          <a:ln xmlns:a="http://schemas.openxmlformats.org/drawingml/2006/main" w="12700">
-            <a:solidFill>
-              <a:srgbClr val="E8EEF7"/>
-            </a:solidFill>
-            <a:prstDash val="solid"/>
-          </a:ln>
-        </p:spPr>
-        <p:txBody>
-          <a:bodyPr xmlns:a="http://schemas.openxmlformats.org/drawingml/2006/main"/>
-          <a:lstStyle xmlns:a="http://schemas.openxmlformats.org/drawingml/2006/main"/>
-          <a:p xmlns:a="http://schemas.openxmlformats.org/drawingml/2006/main">
-            <a:endParaRPr/>
-          </a:p>
-        </p:txBody>
-      </p:sp>
-      <p:sp>
-        <p:nvSpPr>
-          <p:cNvPr id="19" name="Text 17">
-            <a:extLst xmlns:a="http://schemas.openxmlformats.org/drawingml/2006/main">
-              <a:ext uri="{FF2B5EF4-FFF2-40B4-BE49-F238E27FC236}">
-                <a16:creationId xmlns:a16="http://schemas.microsoft.com/office/drawing/2014/main" id="{18E5DF4F-F942-4CAE-90A4-6E447A46583B}"/>
-              </a:ext>
-            </a:extLst>
-          </p:cNvPr>
-          <p:cNvSpPr>
-            <a:spLocks xmlns:a="http://schemas.openxmlformats.org/drawingml/2006/main" noGrp="1"/>
-          </p:cNvSpPr>
-          <p:nvPr/>
-        </p:nvSpPr>
-        <p:spPr>
-          <a:xfrm xmlns:a="http://schemas.openxmlformats.org/drawingml/2006/main">
-            <a:off x="365760" y="2167128"/>
-            <a:ext cx="3200400" cy="219456"/>
-          </a:xfrm>
-          <a:prstGeom xmlns:a="http://schemas.openxmlformats.org/drawingml/2006/main" prst="rect">
-            <a:avLst/>
-          </a:prstGeom>
-          <a:noFill xmlns:a="http://schemas.openxmlformats.org/drawingml/2006/main"/>
-        </p:spPr>
-        <p:txBody>
-          <a:bodyPr xmlns:a="http://schemas.openxmlformats.org/drawingml/2006/main" wrap="square" anchor="ctr"/>
-          <a:lstStyle xmlns:a="http://schemas.openxmlformats.org/drawingml/2006/main"/>
-          <a:p xmlns:a="http://schemas.openxmlformats.org/drawingml/2006/main">
-            <a:pPr marL="0" indent="0" algn="ctr">
-              <a:buNone/>
-            </a:pPr>
-            <a:r>
-              <a:rPr sz="950" b="1">
-                <a:solidFill>
-                  <a:srgbClr val="1F3864"/>
-                </a:solidFill>
-                <a:latin typeface="Arial"/>
-                <a:ea typeface="Arial"/>
-                <a:cs typeface="Arial"/>
-              </a:rPr>
-              <a:t>C − B effects · 95% cluster bootstrap</a:t>
-            </a:r>
-            <a:endParaRPr sz="950"/>
-          </a:p>
-        </p:txBody>
-      </p:sp>
-      <p:sp>
-        <p:nvSpPr>
-          <p:cNvPr id="21" name="Shape 18">
-            <a:extLst xmlns:a="http://schemas.openxmlformats.org/drawingml/2006/main">
-              <a:ext uri="{FF2B5EF4-FFF2-40B4-BE49-F238E27FC236}">
-                <a16:creationId xmlns:a16="http://schemas.microsoft.com/office/drawing/2014/main" id="{04E22412-51DD-4D36-A2B7-3F4ED713CD3D}"/>
-              </a:ext>
-            </a:extLst>
-          </p:cNvPr>
-          <p:cNvSpPr>
-            <a:spLocks xmlns:a="http://schemas.openxmlformats.org/drawingml/2006/main" noGrp="1"/>
-          </p:cNvSpPr>
-          <p:nvPr/>
-        </p:nvSpPr>
-        <p:spPr>
-          <a:xfrm xmlns:a="http://schemas.openxmlformats.org/drawingml/2006/main">
-            <a:off x="3749040" y="2057400"/>
-            <a:ext cx="2606040" cy="2514600"/>
-          </a:xfrm>
-          <a:prstGeom xmlns:a="http://schemas.openxmlformats.org/drawingml/2006/main" prst="roundRect">
-            <a:avLst>
-              <a:gd name="adj" fmla="val 2182"/>
-            </a:avLst>
-          </a:prstGeom>
-          <a:solidFill xmlns:a="http://schemas.openxmlformats.org/drawingml/2006/main">
-            <a:srgbClr val="F3F6FB"/>
-          </a:solidFill>
-          <a:ln xmlns:a="http://schemas.openxmlformats.org/drawingml/2006/main" w="12700">
-            <a:solidFill>
-              <a:srgbClr val="E8EEF7"/>
-            </a:solidFill>
-            <a:prstDash val="solid"/>
-          </a:ln>
-        </p:spPr>
-        <p:txBody>
-          <a:bodyPr xmlns:a="http://schemas.openxmlformats.org/drawingml/2006/main"/>
-          <a:lstStyle xmlns:a="http://schemas.openxmlformats.org/drawingml/2006/main"/>
-          <a:p xmlns:a="http://schemas.openxmlformats.org/drawingml/2006/main">
-            <a:endParaRPr/>
-          </a:p>
-        </p:txBody>
-      </p:sp>
-      <p:sp>
-        <p:nvSpPr>
-          <p:cNvPr id="22" name="Shape 19">
-            <a:extLst xmlns:a="http://schemas.openxmlformats.org/drawingml/2006/main">
-              <a:ext uri="{FF2B5EF4-FFF2-40B4-BE49-F238E27FC236}">
-                <a16:creationId xmlns:a16="http://schemas.microsoft.com/office/drawing/2014/main" id="{A7E5B67C-75C7-450D-8B0A-31AFFD832C09}"/>
-              </a:ext>
-            </a:extLst>
-          </p:cNvPr>
-          <p:cNvSpPr>
-            <a:spLocks xmlns:a="http://schemas.openxmlformats.org/drawingml/2006/main" noGrp="1"/>
-          </p:cNvSpPr>
-          <p:nvPr/>
-        </p:nvSpPr>
-        <p:spPr>
-          <a:xfrm xmlns:a="http://schemas.openxmlformats.org/drawingml/2006/main">
-            <a:off x="3749040" y="2057400"/>
-            <a:ext cx="2606040" cy="384048"/>
+          <p:cNvPr id="11" name="Shape 9">
+            <a:extLst xmlns:a="http://schemas.openxmlformats.org/drawingml/2006/main">
+              <a:ext uri="{FF2B5EF4-FFF2-40B4-BE49-F238E27FC236}">
+                <a16:creationId xmlns:a16="http://schemas.microsoft.com/office/drawing/2014/main" id="{50A67230-E38C-4078-B9C1-8232B31DF0B7}"/>
+              </a:ext>
+            </a:extLst>
+          </p:cNvPr>
+          <p:cNvSpPr>
+            <a:spLocks xmlns:a="http://schemas.openxmlformats.org/drawingml/2006/main" noGrp="1"/>
+          </p:cNvSpPr>
+          <p:nvPr/>
+        </p:nvSpPr>
+        <p:spPr>
+          <a:xfrm xmlns:a="http://schemas.openxmlformats.org/drawingml/2006/main">
+            <a:off x="4663440" y="1051560"/>
+            <a:ext cx="4114800" cy="384048"/>
           </a:xfrm>
           <a:prstGeom xmlns:a="http://schemas.openxmlformats.org/drawingml/2006/main" prst="roundRect">
             <a:avLst>
@@ -6567,7 +4997,7 @@
             </a:avLst>
           </a:prstGeom>
           <a:solidFill xmlns:a="http://schemas.openxmlformats.org/drawingml/2006/main">
-            <a:srgbClr val="0E7C7B"/>
+            <a:srgbClr val="C55A11"/>
           </a:solidFill>
         </p:spPr>
         <p:txBody>
@@ -6580,22 +5010,22 @@
       </p:sp>
       <p:sp>
         <p:nvSpPr>
-          <p:cNvPr id="23" name="Text 20">
-            <a:extLst xmlns:a="http://schemas.openxmlformats.org/drawingml/2006/main">
-              <a:ext uri="{FF2B5EF4-FFF2-40B4-BE49-F238E27FC236}">
-                <a16:creationId xmlns:a16="http://schemas.microsoft.com/office/drawing/2014/main" id="{8C8735C6-9915-4A8C-83CE-1C6FE22E0C0B}"/>
-              </a:ext>
-            </a:extLst>
-          </p:cNvPr>
-          <p:cNvSpPr>
-            <a:spLocks xmlns:a="http://schemas.openxmlformats.org/drawingml/2006/main" noGrp="1"/>
-          </p:cNvSpPr>
-          <p:nvPr/>
-        </p:nvSpPr>
-        <p:spPr>
-          <a:xfrm xmlns:a="http://schemas.openxmlformats.org/drawingml/2006/main">
-            <a:off x="3749040" y="2103120"/>
-            <a:ext cx="2606040" cy="292608"/>
+          <p:cNvPr id="12" name="Text 10">
+            <a:extLst xmlns:a="http://schemas.openxmlformats.org/drawingml/2006/main">
+              <a:ext uri="{FF2B5EF4-FFF2-40B4-BE49-F238E27FC236}">
+                <a16:creationId xmlns:a16="http://schemas.microsoft.com/office/drawing/2014/main" id="{593DBB63-AFBF-404D-B369-0B07A2371ADD}"/>
+              </a:ext>
+            </a:extLst>
+          </p:cNvPr>
+          <p:cNvSpPr>
+            <a:spLocks xmlns:a="http://schemas.openxmlformats.org/drawingml/2006/main" noGrp="1"/>
+          </p:cNvSpPr>
+          <p:nvPr/>
+        </p:nvSpPr>
+        <p:spPr>
+          <a:xfrm xmlns:a="http://schemas.openxmlformats.org/drawingml/2006/main">
+            <a:off x="4663440" y="1097280"/>
+            <a:ext cx="4114800" cy="292608"/>
           </a:xfrm>
           <a:prstGeom xmlns:a="http://schemas.openxmlformats.org/drawingml/2006/main" prst="rect">
             <a:avLst/>
@@ -6610,7 +5040,7 @@
               <a:buNone/>
             </a:pPr>
             <a:r>
-              <a:rPr sz="1200" b="1">
+              <a:rPr sz="1250" b="1">
                 <a:solidFill>
                   <a:srgbClr val="FFFFFF"/>
                 </a:solidFill>
@@ -6618,64 +5048,30 @@
                 <a:ea typeface="Arial"/>
                 <a:cs typeface="Arial"/>
               </a:rPr>
-              <a:t>Aggregate Tests</a:t>
-            </a:r>
-            <a:endParaRPr sz="1200"/>
-          </a:p>
-        </p:txBody>
-      </p:sp>
-      <p:sp>
-        <p:nvSpPr>
-          <p:cNvPr id="24" name="Shape 21">
-            <a:extLst xmlns:a="http://schemas.openxmlformats.org/drawingml/2006/main">
-              <a:ext uri="{FF2B5EF4-FFF2-40B4-BE49-F238E27FC236}">
-                <a16:creationId xmlns:a16="http://schemas.microsoft.com/office/drawing/2014/main" id="{15E9028B-B096-4ADD-B8AF-350CF8E727A4}"/>
-              </a:ext>
-            </a:extLst>
-          </p:cNvPr>
-          <p:cNvSpPr>
-            <a:spLocks xmlns:a="http://schemas.openxmlformats.org/drawingml/2006/main" noGrp="1"/>
-          </p:cNvSpPr>
-          <p:nvPr/>
-        </p:nvSpPr>
-        <p:spPr>
-          <a:xfrm xmlns:a="http://schemas.openxmlformats.org/drawingml/2006/main">
-            <a:off x="3886200" y="2542032"/>
-            <a:ext cx="1417320" cy="256032"/>
-          </a:xfrm>
-          <a:prstGeom xmlns:a="http://schemas.openxmlformats.org/drawingml/2006/main" prst="rect">
-            <a:avLst/>
-          </a:prstGeom>
-          <a:solidFill xmlns:a="http://schemas.openxmlformats.org/drawingml/2006/main">
-            <a:srgbClr val="FFFFFF"/>
-          </a:solidFill>
-        </p:spPr>
-        <p:txBody>
-          <a:bodyPr xmlns:a="http://schemas.openxmlformats.org/drawingml/2006/main"/>
-          <a:lstStyle xmlns:a="http://schemas.openxmlformats.org/drawingml/2006/main"/>
-          <a:p xmlns:a="http://schemas.openxmlformats.org/drawingml/2006/main">
-            <a:endParaRPr/>
-          </a:p>
-        </p:txBody>
-      </p:sp>
-      <p:sp>
-        <p:nvSpPr>
-          <p:cNvPr id="25" name="Text 22">
-            <a:extLst xmlns:a="http://schemas.openxmlformats.org/drawingml/2006/main">
-              <a:ext uri="{FF2B5EF4-FFF2-40B4-BE49-F238E27FC236}">
-                <a16:creationId xmlns:a16="http://schemas.microsoft.com/office/drawing/2014/main" id="{E282EB35-AED1-4DA1-AA9D-719232572F0A}"/>
-              </a:ext>
-            </a:extLst>
-          </p:cNvPr>
-          <p:cNvSpPr>
-            <a:spLocks xmlns:a="http://schemas.openxmlformats.org/drawingml/2006/main" noGrp="1"/>
-          </p:cNvSpPr>
-          <p:nvPr/>
-        </p:nvSpPr>
-        <p:spPr>
-          <a:xfrm xmlns:a="http://schemas.openxmlformats.org/drawingml/2006/main">
-            <a:off x="3886200" y="2542032"/>
-            <a:ext cx="1417320" cy="256032"/>
+              <a:t>R-PRECISION ↑</a:t>
+            </a:r>
+            <a:endParaRPr sz="1250"/>
+          </a:p>
+        </p:txBody>
+      </p:sp>
+      <p:sp>
+        <p:nvSpPr>
+          <p:cNvPr id="13" name="Text 11">
+            <a:extLst xmlns:a="http://schemas.openxmlformats.org/drawingml/2006/main">
+              <a:ext uri="{FF2B5EF4-FFF2-40B4-BE49-F238E27FC236}">
+                <a16:creationId xmlns:a16="http://schemas.microsoft.com/office/drawing/2014/main" id="{9A136CF3-5921-4AA1-8C00-40146DBD2329}"/>
+              </a:ext>
+            </a:extLst>
+          </p:cNvPr>
+          <p:cNvSpPr>
+            <a:spLocks xmlns:a="http://schemas.openxmlformats.org/drawingml/2006/main" noGrp="1"/>
+          </p:cNvSpPr>
+          <p:nvPr/>
+        </p:nvSpPr>
+        <p:spPr>
+          <a:xfrm xmlns:a="http://schemas.openxmlformats.org/drawingml/2006/main">
+            <a:off x="4828032" y="1536192"/>
+            <a:ext cx="3785616" cy="1371600"/>
           </a:xfrm>
           <a:prstGeom xmlns:a="http://schemas.openxmlformats.org/drawingml/2006/main" prst="rect">
             <a:avLst/>
@@ -6686,11 +5082,14 @@
           <a:bodyPr xmlns:a="http://schemas.openxmlformats.org/drawingml/2006/main" wrap="square" anchor="ctr"/>
           <a:lstStyle xmlns:a="http://schemas.openxmlformats.org/drawingml/2006/main"/>
           <a:p xmlns:a="http://schemas.openxmlformats.org/drawingml/2006/main">
-            <a:pPr marL="0" indent="0" algn="l">
-              <a:buNone/>
-            </a:pPr>
-            <a:r>
-              <a:rPr sz="1000">
+            <a:pPr marL="0" indent="0">
+              <a:lnSpc>
+                <a:spcPts val="1300"/>
+              </a:lnSpc>
+              <a:buNone/>
+            </a:pPr>
+            <a:r>
+              <a:rPr sz="1150">
                 <a:solidFill>
                   <a:srgbClr val="1F2937"/>
                 </a:solidFill>
@@ -6698,594 +5097,36 @@
                 <a:ea typeface="Arial"/>
                 <a:cs typeface="Arial"/>
               </a:rPr>
-              <a:t>Part–colour CI</a:t>
-            </a:r>
-            <a:endParaRPr sz="1000"/>
-          </a:p>
-        </p:txBody>
-      </p:sp>
-      <p:sp>
-        <p:nvSpPr>
-          <p:cNvPr id="26" name="Shape 23">
-            <a:extLst xmlns:a="http://schemas.openxmlformats.org/drawingml/2006/main">
-              <a:ext uri="{FF2B5EF4-FFF2-40B4-BE49-F238E27FC236}">
-                <a16:creationId xmlns:a16="http://schemas.microsoft.com/office/drawing/2014/main" id="{D2D95AA9-7624-492A-826E-C084DE221374}"/>
-              </a:ext>
-            </a:extLst>
-          </p:cNvPr>
-          <p:cNvSpPr>
-            <a:spLocks xmlns:a="http://schemas.openxmlformats.org/drawingml/2006/main" noGrp="1"/>
-          </p:cNvSpPr>
-          <p:nvPr/>
-        </p:nvSpPr>
-        <p:spPr>
-          <a:xfrm xmlns:a="http://schemas.openxmlformats.org/drawingml/2006/main">
-            <a:off x="5349240" y="2542032"/>
-            <a:ext cx="868680" cy="256032"/>
-          </a:xfrm>
-          <a:prstGeom xmlns:a="http://schemas.openxmlformats.org/drawingml/2006/main" prst="rect">
-            <a:avLst/>
-          </a:prstGeom>
-          <a:solidFill xmlns:a="http://schemas.openxmlformats.org/drawingml/2006/main">
-            <a:srgbClr val="FFFFFF"/>
-          </a:solidFill>
-        </p:spPr>
-        <p:txBody>
-          <a:bodyPr xmlns:a="http://schemas.openxmlformats.org/drawingml/2006/main"/>
-          <a:lstStyle xmlns:a="http://schemas.openxmlformats.org/drawingml/2006/main"/>
-          <a:p xmlns:a="http://schemas.openxmlformats.org/drawingml/2006/main">
-            <a:endParaRPr/>
-          </a:p>
-        </p:txBody>
-      </p:sp>
-      <p:sp>
-        <p:nvSpPr>
-          <p:cNvPr id="27" name="Text 24">
-            <a:extLst xmlns:a="http://schemas.openxmlformats.org/drawingml/2006/main">
-              <a:ext uri="{FF2B5EF4-FFF2-40B4-BE49-F238E27FC236}">
-                <a16:creationId xmlns:a16="http://schemas.microsoft.com/office/drawing/2014/main" id="{78983770-A30C-4C42-9252-16C7F9D1D2BF}"/>
-              </a:ext>
-            </a:extLst>
-          </p:cNvPr>
-          <p:cNvSpPr>
-            <a:spLocks xmlns:a="http://schemas.openxmlformats.org/drawingml/2006/main" noGrp="1"/>
-          </p:cNvSpPr>
-          <p:nvPr/>
-        </p:nvSpPr>
-        <p:spPr>
-          <a:xfrm xmlns:a="http://schemas.openxmlformats.org/drawingml/2006/main">
-            <a:off x="5349240" y="2542032"/>
-            <a:ext cx="868680" cy="256032"/>
-          </a:xfrm>
-          <a:prstGeom xmlns:a="http://schemas.openxmlformats.org/drawingml/2006/main" prst="rect">
-            <a:avLst/>
-          </a:prstGeom>
-          <a:noFill xmlns:a="http://schemas.openxmlformats.org/drawingml/2006/main"/>
-        </p:spPr>
-        <p:txBody>
-          <a:bodyPr xmlns:a="http://schemas.openxmlformats.org/drawingml/2006/main" wrap="square" anchor="ctr"/>
-          <a:lstStyle xmlns:a="http://schemas.openxmlformats.org/drawingml/2006/main"/>
-          <a:p xmlns:a="http://schemas.openxmlformats.org/drawingml/2006/main">
-            <a:pPr marL="0" indent="0" algn="r">
-              <a:buNone/>
-            </a:pPr>
-            <a:r>
-              <a:rPr sz="1000">
-                <a:solidFill>
-                  <a:srgbClr val="1F2937"/>
-                </a:solidFill>
-                <a:latin typeface="Arial"/>
-                <a:ea typeface="Arial"/>
-                <a:cs typeface="Arial"/>
-              </a:rPr>
-              <a:t>[−0.149, +0.054]</a:t>
-            </a:r>
-            <a:endParaRPr sz="1000"/>
-          </a:p>
-        </p:txBody>
-      </p:sp>
-      <p:sp>
-        <p:nvSpPr>
-          <p:cNvPr id="28" name="Shape 25">
-            <a:extLst xmlns:a="http://schemas.openxmlformats.org/drawingml/2006/main">
-              <a:ext uri="{FF2B5EF4-FFF2-40B4-BE49-F238E27FC236}">
-                <a16:creationId xmlns:a16="http://schemas.microsoft.com/office/drawing/2014/main" id="{14E75BCC-EC34-4828-9BCD-5AAFBED7E29F}"/>
-              </a:ext>
-            </a:extLst>
-          </p:cNvPr>
-          <p:cNvSpPr>
-            <a:spLocks xmlns:a="http://schemas.openxmlformats.org/drawingml/2006/main" noGrp="1"/>
-          </p:cNvSpPr>
-          <p:nvPr/>
-        </p:nvSpPr>
-        <p:spPr>
-          <a:xfrm xmlns:a="http://schemas.openxmlformats.org/drawingml/2006/main">
-            <a:off x="3886200" y="2834640"/>
-            <a:ext cx="1417320" cy="256032"/>
-          </a:xfrm>
-          <a:prstGeom xmlns:a="http://schemas.openxmlformats.org/drawingml/2006/main" prst="rect">
-            <a:avLst/>
-          </a:prstGeom>
-          <a:solidFill xmlns:a="http://schemas.openxmlformats.org/drawingml/2006/main">
-            <a:srgbClr val="FFFFFF"/>
-          </a:solidFill>
-        </p:spPr>
-        <p:txBody>
-          <a:bodyPr xmlns:a="http://schemas.openxmlformats.org/drawingml/2006/main"/>
-          <a:lstStyle xmlns:a="http://schemas.openxmlformats.org/drawingml/2006/main"/>
-          <a:p xmlns:a="http://schemas.openxmlformats.org/drawingml/2006/main">
-            <a:endParaRPr/>
-          </a:p>
-        </p:txBody>
-      </p:sp>
-      <p:sp>
-        <p:nvSpPr>
-          <p:cNvPr id="29" name="Text 26">
-            <a:extLst xmlns:a="http://schemas.openxmlformats.org/drawingml/2006/main">
-              <a:ext uri="{FF2B5EF4-FFF2-40B4-BE49-F238E27FC236}">
-                <a16:creationId xmlns:a16="http://schemas.microsoft.com/office/drawing/2014/main" id="{FC02901C-5B15-47B1-88AD-9933EB867698}"/>
-              </a:ext>
-            </a:extLst>
-          </p:cNvPr>
-          <p:cNvSpPr>
-            <a:spLocks xmlns:a="http://schemas.openxmlformats.org/drawingml/2006/main" noGrp="1"/>
-          </p:cNvSpPr>
-          <p:nvPr/>
-        </p:nvSpPr>
-        <p:spPr>
-          <a:xfrm xmlns:a="http://schemas.openxmlformats.org/drawingml/2006/main">
-            <a:off x="3886200" y="2834640"/>
-            <a:ext cx="1417320" cy="256032"/>
-          </a:xfrm>
-          <a:prstGeom xmlns:a="http://schemas.openxmlformats.org/drawingml/2006/main" prst="rect">
-            <a:avLst/>
-          </a:prstGeom>
-          <a:noFill xmlns:a="http://schemas.openxmlformats.org/drawingml/2006/main"/>
-        </p:spPr>
-        <p:txBody>
-          <a:bodyPr xmlns:a="http://schemas.openxmlformats.org/drawingml/2006/main" wrap="square" anchor="ctr"/>
-          <a:lstStyle xmlns:a="http://schemas.openxmlformats.org/drawingml/2006/main"/>
-          <a:p xmlns:a="http://schemas.openxmlformats.org/drawingml/2006/main">
-            <a:pPr marL="0" indent="0" algn="l">
-              <a:buNone/>
-            </a:pPr>
-            <a:r>
-              <a:rPr sz="1000">
-                <a:solidFill>
-                  <a:srgbClr val="1F2937"/>
-                </a:solidFill>
-                <a:latin typeface="Arial"/>
-                <a:ea typeface="Arial"/>
-                <a:cs typeface="Arial"/>
-              </a:rPr>
-              <a:t>R-precision CI</a:t>
-            </a:r>
-            <a:endParaRPr sz="1000"/>
-          </a:p>
-        </p:txBody>
-      </p:sp>
-      <p:sp>
-        <p:nvSpPr>
-          <p:cNvPr id="30" name="Shape 27">
-            <a:extLst xmlns:a="http://schemas.openxmlformats.org/drawingml/2006/main">
-              <a:ext uri="{FF2B5EF4-FFF2-40B4-BE49-F238E27FC236}">
-                <a16:creationId xmlns:a16="http://schemas.microsoft.com/office/drawing/2014/main" id="{3EFD5C0F-3F25-43C5-8280-4213299E0C08}"/>
-              </a:ext>
-            </a:extLst>
-          </p:cNvPr>
-          <p:cNvSpPr>
-            <a:spLocks xmlns:a="http://schemas.openxmlformats.org/drawingml/2006/main" noGrp="1"/>
-          </p:cNvSpPr>
-          <p:nvPr/>
-        </p:nvSpPr>
-        <p:spPr>
-          <a:xfrm xmlns:a="http://schemas.openxmlformats.org/drawingml/2006/main">
-            <a:off x="5349240" y="2834640"/>
-            <a:ext cx="868680" cy="256032"/>
-          </a:xfrm>
-          <a:prstGeom xmlns:a="http://schemas.openxmlformats.org/drawingml/2006/main" prst="rect">
-            <a:avLst/>
-          </a:prstGeom>
-          <a:solidFill xmlns:a="http://schemas.openxmlformats.org/drawingml/2006/main">
-            <a:srgbClr val="FFFFFF"/>
-          </a:solidFill>
-        </p:spPr>
-        <p:txBody>
-          <a:bodyPr xmlns:a="http://schemas.openxmlformats.org/drawingml/2006/main"/>
-          <a:lstStyle xmlns:a="http://schemas.openxmlformats.org/drawingml/2006/main"/>
-          <a:p xmlns:a="http://schemas.openxmlformats.org/drawingml/2006/main">
-            <a:endParaRPr/>
-          </a:p>
-        </p:txBody>
-      </p:sp>
-      <p:sp>
-        <p:nvSpPr>
-          <p:cNvPr id="31" name="Text 28">
-            <a:extLst xmlns:a="http://schemas.openxmlformats.org/drawingml/2006/main">
-              <a:ext uri="{FF2B5EF4-FFF2-40B4-BE49-F238E27FC236}">
-                <a16:creationId xmlns:a16="http://schemas.microsoft.com/office/drawing/2014/main" id="{C9E8CA0C-7248-49EE-A680-8870F4D411AB}"/>
-              </a:ext>
-            </a:extLst>
-          </p:cNvPr>
-          <p:cNvSpPr>
-            <a:spLocks xmlns:a="http://schemas.openxmlformats.org/drawingml/2006/main" noGrp="1"/>
-          </p:cNvSpPr>
-          <p:nvPr/>
-        </p:nvSpPr>
-        <p:spPr>
-          <a:xfrm xmlns:a="http://schemas.openxmlformats.org/drawingml/2006/main">
-            <a:off x="5349240" y="2834640"/>
-            <a:ext cx="868680" cy="256032"/>
-          </a:xfrm>
-          <a:prstGeom xmlns:a="http://schemas.openxmlformats.org/drawingml/2006/main" prst="rect">
-            <a:avLst/>
-          </a:prstGeom>
-          <a:noFill xmlns:a="http://schemas.openxmlformats.org/drawingml/2006/main"/>
-        </p:spPr>
-        <p:txBody>
-          <a:bodyPr xmlns:a="http://schemas.openxmlformats.org/drawingml/2006/main" wrap="square" anchor="ctr"/>
-          <a:lstStyle xmlns:a="http://schemas.openxmlformats.org/drawingml/2006/main"/>
-          <a:p xmlns:a="http://schemas.openxmlformats.org/drawingml/2006/main">
-            <a:pPr marL="0" indent="0" algn="r">
-              <a:buNone/>
-            </a:pPr>
-            <a:r>
-              <a:rPr sz="1000">
-                <a:solidFill>
-                  <a:srgbClr val="1F2937"/>
-                </a:solidFill>
-                <a:latin typeface="Arial"/>
-                <a:ea typeface="Arial"/>
-                <a:cs typeface="Arial"/>
-              </a:rPr>
-              <a:t>[−0.049, +0.155]</a:t>
-            </a:r>
-            <a:endParaRPr sz="1000"/>
-          </a:p>
-        </p:txBody>
-      </p:sp>
-      <p:sp>
-        <p:nvSpPr>
-          <p:cNvPr id="32" name="Shape 29">
-            <a:extLst xmlns:a="http://schemas.openxmlformats.org/drawingml/2006/main">
-              <a:ext uri="{FF2B5EF4-FFF2-40B4-BE49-F238E27FC236}">
-                <a16:creationId xmlns:a16="http://schemas.microsoft.com/office/drawing/2014/main" id="{1FBFCD48-BAEE-46B8-B315-48F867BF3CDC}"/>
-              </a:ext>
-            </a:extLst>
-          </p:cNvPr>
-          <p:cNvSpPr>
-            <a:spLocks xmlns:a="http://schemas.openxmlformats.org/drawingml/2006/main" noGrp="1"/>
-          </p:cNvSpPr>
-          <p:nvPr/>
-        </p:nvSpPr>
-        <p:spPr>
-          <a:xfrm xmlns:a="http://schemas.openxmlformats.org/drawingml/2006/main">
-            <a:off x="3886200" y="3127248"/>
-            <a:ext cx="1417320" cy="256032"/>
-          </a:xfrm>
-          <a:prstGeom xmlns:a="http://schemas.openxmlformats.org/drawingml/2006/main" prst="rect">
-            <a:avLst/>
-          </a:prstGeom>
-          <a:solidFill xmlns:a="http://schemas.openxmlformats.org/drawingml/2006/main">
-            <a:srgbClr val="FFFFFF"/>
-          </a:solidFill>
-        </p:spPr>
-        <p:txBody>
-          <a:bodyPr xmlns:a="http://schemas.openxmlformats.org/drawingml/2006/main"/>
-          <a:lstStyle xmlns:a="http://schemas.openxmlformats.org/drawingml/2006/main"/>
-          <a:p xmlns:a="http://schemas.openxmlformats.org/drawingml/2006/main">
-            <a:endParaRPr/>
-          </a:p>
-        </p:txBody>
-      </p:sp>
-      <p:sp>
-        <p:nvSpPr>
-          <p:cNvPr id="33" name="Text 30">
-            <a:extLst xmlns:a="http://schemas.openxmlformats.org/drawingml/2006/main">
-              <a:ext uri="{FF2B5EF4-FFF2-40B4-BE49-F238E27FC236}">
-                <a16:creationId xmlns:a16="http://schemas.microsoft.com/office/drawing/2014/main" id="{FAE2B877-07C5-4EC7-87BE-6283B17D6FDE}"/>
-              </a:ext>
-            </a:extLst>
-          </p:cNvPr>
-          <p:cNvSpPr>
-            <a:spLocks xmlns:a="http://schemas.openxmlformats.org/drawingml/2006/main" noGrp="1"/>
-          </p:cNvSpPr>
-          <p:nvPr/>
-        </p:nvSpPr>
-        <p:spPr>
-          <a:xfrm xmlns:a="http://schemas.openxmlformats.org/drawingml/2006/main">
-            <a:off x="3886200" y="3127248"/>
-            <a:ext cx="1417320" cy="256032"/>
-          </a:xfrm>
-          <a:prstGeom xmlns:a="http://schemas.openxmlformats.org/drawingml/2006/main" prst="rect">
-            <a:avLst/>
-          </a:prstGeom>
-          <a:noFill xmlns:a="http://schemas.openxmlformats.org/drawingml/2006/main"/>
-        </p:spPr>
-        <p:txBody>
-          <a:bodyPr xmlns:a="http://schemas.openxmlformats.org/drawingml/2006/main" wrap="square" anchor="ctr"/>
-          <a:lstStyle xmlns:a="http://schemas.openxmlformats.org/drawingml/2006/main"/>
-          <a:p xmlns:a="http://schemas.openxmlformats.org/drawingml/2006/main">
-            <a:pPr marL="0" indent="0" algn="l">
-              <a:buNone/>
-            </a:pPr>
-            <a:r>
-              <a:rPr sz="1000">
-                <a:solidFill>
-                  <a:srgbClr val="1F2937"/>
-                </a:solidFill>
-                <a:latin typeface="Arial"/>
-                <a:ea typeface="Arial"/>
-                <a:cs typeface="Arial"/>
-              </a:rPr>
-              <a:t>McNemar · colour</a:t>
-            </a:r>
-            <a:endParaRPr sz="1000"/>
-          </a:p>
-        </p:txBody>
-      </p:sp>
-      <p:sp>
-        <p:nvSpPr>
-          <p:cNvPr id="34" name="Shape 31">
-            <a:extLst xmlns:a="http://schemas.openxmlformats.org/drawingml/2006/main">
-              <a:ext uri="{FF2B5EF4-FFF2-40B4-BE49-F238E27FC236}">
-                <a16:creationId xmlns:a16="http://schemas.microsoft.com/office/drawing/2014/main" id="{94B2B480-F874-4AB5-8005-3873B839307F}"/>
-              </a:ext>
-            </a:extLst>
-          </p:cNvPr>
-          <p:cNvSpPr>
-            <a:spLocks xmlns:a="http://schemas.openxmlformats.org/drawingml/2006/main" noGrp="1"/>
-          </p:cNvSpPr>
-          <p:nvPr/>
-        </p:nvSpPr>
-        <p:spPr>
-          <a:xfrm xmlns:a="http://schemas.openxmlformats.org/drawingml/2006/main">
-            <a:off x="5349240" y="3127248"/>
-            <a:ext cx="868680" cy="256032"/>
-          </a:xfrm>
-          <a:prstGeom xmlns:a="http://schemas.openxmlformats.org/drawingml/2006/main" prst="rect">
-            <a:avLst/>
-          </a:prstGeom>
-          <a:solidFill xmlns:a="http://schemas.openxmlformats.org/drawingml/2006/main">
-            <a:srgbClr val="FFFFFF"/>
-          </a:solidFill>
-        </p:spPr>
-        <p:txBody>
-          <a:bodyPr xmlns:a="http://schemas.openxmlformats.org/drawingml/2006/main"/>
-          <a:lstStyle xmlns:a="http://schemas.openxmlformats.org/drawingml/2006/main"/>
-          <a:p xmlns:a="http://schemas.openxmlformats.org/drawingml/2006/main">
-            <a:endParaRPr/>
-          </a:p>
-        </p:txBody>
-      </p:sp>
-      <p:sp>
-        <p:nvSpPr>
-          <p:cNvPr id="35" name="Text 32">
-            <a:extLst xmlns:a="http://schemas.openxmlformats.org/drawingml/2006/main">
-              <a:ext uri="{FF2B5EF4-FFF2-40B4-BE49-F238E27FC236}">
-                <a16:creationId xmlns:a16="http://schemas.microsoft.com/office/drawing/2014/main" id="{3B2DDE6F-2829-48E1-878C-B68392D47D00}"/>
-              </a:ext>
-            </a:extLst>
-          </p:cNvPr>
-          <p:cNvSpPr>
-            <a:spLocks xmlns:a="http://schemas.openxmlformats.org/drawingml/2006/main" noGrp="1"/>
-          </p:cNvSpPr>
-          <p:nvPr/>
-        </p:nvSpPr>
-        <p:spPr>
-          <a:xfrm xmlns:a="http://schemas.openxmlformats.org/drawingml/2006/main">
-            <a:off x="5349240" y="3127248"/>
-            <a:ext cx="868680" cy="256032"/>
-          </a:xfrm>
-          <a:prstGeom xmlns:a="http://schemas.openxmlformats.org/drawingml/2006/main" prst="rect">
-            <a:avLst/>
-          </a:prstGeom>
-          <a:noFill xmlns:a="http://schemas.openxmlformats.org/drawingml/2006/main"/>
-        </p:spPr>
-        <p:txBody>
-          <a:bodyPr xmlns:a="http://schemas.openxmlformats.org/drawingml/2006/main" wrap="square" anchor="ctr"/>
-          <a:lstStyle xmlns:a="http://schemas.openxmlformats.org/drawingml/2006/main"/>
-          <a:p xmlns:a="http://schemas.openxmlformats.org/drawingml/2006/main">
-            <a:pPr marL="0" indent="0" algn="r">
-              <a:buNone/>
-            </a:pPr>
-            <a:r>
-              <a:rPr sz="1000">
-                <a:solidFill>
-                  <a:srgbClr val="1F2937"/>
-                </a:solidFill>
-                <a:latin typeface="Arial"/>
-                <a:ea typeface="Arial"/>
-                <a:cs typeface="Arial"/>
-              </a:rPr>
-              <a:t>p = 0.327</a:t>
-            </a:r>
-            <a:endParaRPr sz="1000"/>
-          </a:p>
-        </p:txBody>
-      </p:sp>
-      <p:sp>
-        <p:nvSpPr>
-          <p:cNvPr id="36" name="Shape 33">
-            <a:extLst xmlns:a="http://schemas.openxmlformats.org/drawingml/2006/main">
-              <a:ext uri="{FF2B5EF4-FFF2-40B4-BE49-F238E27FC236}">
-                <a16:creationId xmlns:a16="http://schemas.microsoft.com/office/drawing/2014/main" id="{484B58E1-96B3-4CCC-992D-A7238D012D05}"/>
-              </a:ext>
-            </a:extLst>
-          </p:cNvPr>
-          <p:cNvSpPr>
-            <a:spLocks xmlns:a="http://schemas.openxmlformats.org/drawingml/2006/main" noGrp="1"/>
-          </p:cNvSpPr>
-          <p:nvPr/>
-        </p:nvSpPr>
-        <p:spPr>
-          <a:xfrm xmlns:a="http://schemas.openxmlformats.org/drawingml/2006/main">
-            <a:off x="3886200" y="3419856"/>
-            <a:ext cx="1417320" cy="256032"/>
-          </a:xfrm>
-          <a:prstGeom xmlns:a="http://schemas.openxmlformats.org/drawingml/2006/main" prst="rect">
-            <a:avLst/>
-          </a:prstGeom>
-          <a:solidFill xmlns:a="http://schemas.openxmlformats.org/drawingml/2006/main">
-            <a:srgbClr val="FFFFFF"/>
-          </a:solidFill>
-        </p:spPr>
-        <p:txBody>
-          <a:bodyPr xmlns:a="http://schemas.openxmlformats.org/drawingml/2006/main"/>
-          <a:lstStyle xmlns:a="http://schemas.openxmlformats.org/drawingml/2006/main"/>
-          <a:p xmlns:a="http://schemas.openxmlformats.org/drawingml/2006/main">
-            <a:endParaRPr/>
-          </a:p>
-        </p:txBody>
-      </p:sp>
-      <p:sp>
-        <p:nvSpPr>
-          <p:cNvPr id="37" name="Text 34">
-            <a:extLst xmlns:a="http://schemas.openxmlformats.org/drawingml/2006/main">
-              <a:ext uri="{FF2B5EF4-FFF2-40B4-BE49-F238E27FC236}">
-                <a16:creationId xmlns:a16="http://schemas.microsoft.com/office/drawing/2014/main" id="{396891A0-A658-4543-B466-F6630CB9694C}"/>
-              </a:ext>
-            </a:extLst>
-          </p:cNvPr>
-          <p:cNvSpPr>
-            <a:spLocks xmlns:a="http://schemas.openxmlformats.org/drawingml/2006/main" noGrp="1"/>
-          </p:cNvSpPr>
-          <p:nvPr/>
-        </p:nvSpPr>
-        <p:spPr>
-          <a:xfrm xmlns:a="http://schemas.openxmlformats.org/drawingml/2006/main">
-            <a:off x="3886200" y="3419856"/>
-            <a:ext cx="1417320" cy="256032"/>
-          </a:xfrm>
-          <a:prstGeom xmlns:a="http://schemas.openxmlformats.org/drawingml/2006/main" prst="rect">
-            <a:avLst/>
-          </a:prstGeom>
-          <a:noFill xmlns:a="http://schemas.openxmlformats.org/drawingml/2006/main"/>
-        </p:spPr>
-        <p:txBody>
-          <a:bodyPr xmlns:a="http://schemas.openxmlformats.org/drawingml/2006/main" wrap="square" anchor="ctr"/>
-          <a:lstStyle xmlns:a="http://schemas.openxmlformats.org/drawingml/2006/main"/>
-          <a:p xmlns:a="http://schemas.openxmlformats.org/drawingml/2006/main">
-            <a:pPr marL="0" indent="0" algn="l">
-              <a:buNone/>
-            </a:pPr>
-            <a:r>
-              <a:rPr sz="1000">
-                <a:solidFill>
-                  <a:srgbClr val="1F2937"/>
-                </a:solidFill>
-                <a:latin typeface="Arial"/>
-                <a:ea typeface="Arial"/>
-                <a:cs typeface="Arial"/>
-              </a:rPr>
-              <a:t>McNemar · R</a:t>
-            </a:r>
-            <a:endParaRPr sz="1000"/>
-          </a:p>
-        </p:txBody>
-      </p:sp>
-      <p:sp>
-        <p:nvSpPr>
-          <p:cNvPr id="38" name="Shape 35">
-            <a:extLst xmlns:a="http://schemas.openxmlformats.org/drawingml/2006/main">
-              <a:ext uri="{FF2B5EF4-FFF2-40B4-BE49-F238E27FC236}">
-                <a16:creationId xmlns:a16="http://schemas.microsoft.com/office/drawing/2014/main" id="{1DD621A3-6695-4789-A97D-6D6BB7805A02}"/>
-              </a:ext>
-            </a:extLst>
-          </p:cNvPr>
-          <p:cNvSpPr>
-            <a:spLocks xmlns:a="http://schemas.openxmlformats.org/drawingml/2006/main" noGrp="1"/>
-          </p:cNvSpPr>
-          <p:nvPr/>
-        </p:nvSpPr>
-        <p:spPr>
-          <a:xfrm xmlns:a="http://schemas.openxmlformats.org/drawingml/2006/main">
-            <a:off x="5349240" y="3419856"/>
-            <a:ext cx="868680" cy="256032"/>
-          </a:xfrm>
-          <a:prstGeom xmlns:a="http://schemas.openxmlformats.org/drawingml/2006/main" prst="rect">
-            <a:avLst/>
-          </a:prstGeom>
-          <a:solidFill xmlns:a="http://schemas.openxmlformats.org/drawingml/2006/main">
-            <a:srgbClr val="FFFFFF"/>
-          </a:solidFill>
-        </p:spPr>
-        <p:txBody>
-          <a:bodyPr xmlns:a="http://schemas.openxmlformats.org/drawingml/2006/main"/>
-          <a:lstStyle xmlns:a="http://schemas.openxmlformats.org/drawingml/2006/main"/>
-          <a:p xmlns:a="http://schemas.openxmlformats.org/drawingml/2006/main">
-            <a:endParaRPr/>
-          </a:p>
-        </p:txBody>
-      </p:sp>
-      <p:sp>
-        <p:nvSpPr>
-          <p:cNvPr id="39" name="Text 36">
-            <a:extLst xmlns:a="http://schemas.openxmlformats.org/drawingml/2006/main">
-              <a:ext uri="{FF2B5EF4-FFF2-40B4-BE49-F238E27FC236}">
-                <a16:creationId xmlns:a16="http://schemas.microsoft.com/office/drawing/2014/main" id="{F9D4D6D4-A3AF-4B00-84D5-ABFF0C59ED89}"/>
-              </a:ext>
-            </a:extLst>
-          </p:cNvPr>
-          <p:cNvSpPr>
-            <a:spLocks xmlns:a="http://schemas.openxmlformats.org/drawingml/2006/main" noGrp="1"/>
-          </p:cNvSpPr>
-          <p:nvPr/>
-        </p:nvSpPr>
-        <p:spPr>
-          <a:xfrm xmlns:a="http://schemas.openxmlformats.org/drawingml/2006/main">
-            <a:off x="5349240" y="3419856"/>
-            <a:ext cx="868680" cy="256032"/>
-          </a:xfrm>
-          <a:prstGeom xmlns:a="http://schemas.openxmlformats.org/drawingml/2006/main" prst="rect">
-            <a:avLst/>
-          </a:prstGeom>
-          <a:noFill xmlns:a="http://schemas.openxmlformats.org/drawingml/2006/main"/>
-        </p:spPr>
-        <p:txBody>
-          <a:bodyPr xmlns:a="http://schemas.openxmlformats.org/drawingml/2006/main" wrap="square" anchor="ctr"/>
-          <a:lstStyle xmlns:a="http://schemas.openxmlformats.org/drawingml/2006/main"/>
-          <a:p xmlns:a="http://schemas.openxmlformats.org/drawingml/2006/main">
-            <a:pPr marL="0" indent="0" algn="r">
-              <a:buNone/>
-            </a:pPr>
-            <a:r>
-              <a:rPr sz="1000" b="1">
-                <a:solidFill>
-                  <a:srgbClr val="0E7C7B"/>
-                </a:solidFill>
-                <a:latin typeface="Arial"/>
-                <a:ea typeface="Arial"/>
-                <a:cs typeface="Arial"/>
-              </a:rPr>
-              <a:t>p = 0.354</a:t>
-            </a:r>
-            <a:endParaRPr sz="1000"/>
-          </a:p>
-        </p:txBody>
-      </p:sp>
-      <p:sp>
-        <p:nvSpPr>
-          <p:cNvPr id="40" name="Shape 37">
-            <a:extLst xmlns:a="http://schemas.openxmlformats.org/drawingml/2006/main">
-              <a:ext uri="{FF2B5EF4-FFF2-40B4-BE49-F238E27FC236}">
-                <a16:creationId xmlns:a16="http://schemas.microsoft.com/office/drawing/2014/main" id="{27BEF71D-C0CA-4059-8A5F-EBFB23CB90DA}"/>
-              </a:ext>
-            </a:extLst>
-          </p:cNvPr>
-          <p:cNvSpPr>
-            <a:spLocks xmlns:a="http://schemas.openxmlformats.org/drawingml/2006/main" noGrp="1"/>
-          </p:cNvSpPr>
-          <p:nvPr/>
-        </p:nvSpPr>
-        <p:spPr>
-          <a:xfrm xmlns:a="http://schemas.openxmlformats.org/drawingml/2006/main">
-            <a:off x="6537960" y="2057400"/>
-            <a:ext cx="2240280" cy="2514600"/>
+              <a:t>76.84% → 79.77%
+Δ = +2.93 pp
+95% CI [+2.375, +3.485]</a:t>
+            </a:r>
+            <a:endParaRPr sz="1150"/>
+          </a:p>
+        </p:txBody>
+      </p:sp>
+      <p:sp>
+        <p:nvSpPr>
+          <p:cNvPr id="14" name="Shape 12">
+            <a:extLst xmlns:a="http://schemas.openxmlformats.org/drawingml/2006/main">
+              <a:ext uri="{FF2B5EF4-FFF2-40B4-BE49-F238E27FC236}">
+                <a16:creationId xmlns:a16="http://schemas.microsoft.com/office/drawing/2014/main" id="{698F6D3F-65A2-4063-970C-672547457398}"/>
+              </a:ext>
+            </a:extLst>
+          </p:cNvPr>
+          <p:cNvSpPr>
+            <a:spLocks xmlns:a="http://schemas.openxmlformats.org/drawingml/2006/main" noGrp="1"/>
+          </p:cNvSpPr>
+          <p:nvPr/>
+        </p:nvSpPr>
+        <p:spPr>
+          <a:xfrm xmlns:a="http://schemas.openxmlformats.org/drawingml/2006/main">
+            <a:off x="365760" y="3200400"/>
+            <a:ext cx="8412480" cy="1051560"/>
           </a:xfrm>
           <a:prstGeom xmlns:a="http://schemas.openxmlformats.org/drawingml/2006/main" prst="roundRect">
             <a:avLst>
-              <a:gd name="adj" fmla="val 2449"/>
+              <a:gd name="adj" fmla="val 5217"/>
             </a:avLst>
           </a:prstGeom>
           <a:solidFill xmlns:a="http://schemas.openxmlformats.org/drawingml/2006/main">
@@ -7308,30 +5149,76 @@
       </p:sp>
       <p:sp>
         <p:nvSpPr>
-          <p:cNvPr id="41" name="Text 38">
-            <a:extLst xmlns:a="http://schemas.openxmlformats.org/drawingml/2006/main">
-              <a:ext uri="{FF2B5EF4-FFF2-40B4-BE49-F238E27FC236}">
-                <a16:creationId xmlns:a16="http://schemas.microsoft.com/office/drawing/2014/main" id="{15E5423D-1610-4AF9-80A2-0E7DE6164A39}"/>
-              </a:ext>
-            </a:extLst>
-          </p:cNvPr>
-          <p:cNvSpPr>
-            <a:spLocks xmlns:a="http://schemas.openxmlformats.org/drawingml/2006/main" noGrp="1"/>
-          </p:cNvSpPr>
-          <p:nvPr/>
-        </p:nvSpPr>
-        <p:spPr>
-          <a:xfrm xmlns:a="http://schemas.openxmlformats.org/drawingml/2006/main">
-            <a:off x="6675120" y="2286000"/>
-            <a:ext cx="1965960" cy="2103120"/>
-          </a:xfrm>
-          <a:prstGeom xmlns:a="http://schemas.openxmlformats.org/drawingml/2006/main" prst="rect">
-            <a:avLst/>
-          </a:prstGeom>
-          <a:noFill xmlns:a="http://schemas.openxmlformats.org/drawingml/2006/main"/>
-        </p:spPr>
-        <p:txBody>
-          <a:bodyPr xmlns:a="http://schemas.openxmlformats.org/drawingml/2006/main" wrap="square" anchor="t"/>
+          <p:cNvPr id="15" name="Text 13">
+            <a:extLst xmlns:a="http://schemas.openxmlformats.org/drawingml/2006/main">
+              <a:ext uri="{FF2B5EF4-FFF2-40B4-BE49-F238E27FC236}">
+                <a16:creationId xmlns:a16="http://schemas.microsoft.com/office/drawing/2014/main" id="{3B7523DB-1162-4458-A8C5-9F39F60753E3}"/>
+              </a:ext>
+            </a:extLst>
+          </p:cNvPr>
+          <p:cNvSpPr>
+            <a:spLocks xmlns:a="http://schemas.openxmlformats.org/drawingml/2006/main" noGrp="1"/>
+          </p:cNvSpPr>
+          <p:nvPr/>
+        </p:nvSpPr>
+        <p:spPr>
+          <a:xfrm xmlns:a="http://schemas.openxmlformats.org/drawingml/2006/main">
+            <a:off x="548640" y="3310128"/>
+            <a:ext cx="8046720" cy="292608"/>
+          </a:xfrm>
+          <a:prstGeom xmlns:a="http://schemas.openxmlformats.org/drawingml/2006/main" prst="rect">
+            <a:avLst/>
+          </a:prstGeom>
+          <a:noFill xmlns:a="http://schemas.openxmlformats.org/drawingml/2006/main"/>
+        </p:spPr>
+        <p:txBody>
+          <a:bodyPr xmlns:a="http://schemas.openxmlformats.org/drawingml/2006/main" wrap="square" anchor="ctr"/>
+          <a:lstStyle xmlns:a="http://schemas.openxmlformats.org/drawingml/2006/main"/>
+          <a:p xmlns:a="http://schemas.openxmlformats.org/drawingml/2006/main">
+            <a:pPr marL="0" indent="0">
+              <a:buNone/>
+            </a:pPr>
+            <a:r>
+              <a:rPr sz="1250" b="1">
+                <a:solidFill>
+                  <a:srgbClr val="1F3864"/>
+                </a:solidFill>
+                <a:latin typeface="Arial"/>
+                <a:ea typeface="Arial"/>
+                <a:cs typeface="Arial"/>
+              </a:rPr>
+              <a:t>TRADE-OFF</a:t>
+            </a:r>
+            <a:endParaRPr sz="1250"/>
+          </a:p>
+        </p:txBody>
+      </p:sp>
+      <p:sp>
+        <p:nvSpPr>
+          <p:cNvPr id="16" name="Text 14">
+            <a:extLst xmlns:a="http://schemas.openxmlformats.org/drawingml/2006/main">
+              <a:ext uri="{FF2B5EF4-FFF2-40B4-BE49-F238E27FC236}">
+                <a16:creationId xmlns:a16="http://schemas.microsoft.com/office/drawing/2014/main" id="{19B8858B-0D95-4C89-8B99-F82B974E1D2A}"/>
+              </a:ext>
+            </a:extLst>
+          </p:cNvPr>
+          <p:cNvSpPr>
+            <a:spLocks xmlns:a="http://schemas.openxmlformats.org/drawingml/2006/main" noGrp="1"/>
+          </p:cNvSpPr>
+          <p:nvPr/>
+        </p:nvSpPr>
+        <p:spPr>
+          <a:xfrm xmlns:a="http://schemas.openxmlformats.org/drawingml/2006/main">
+            <a:off x="548640" y="3630168"/>
+            <a:ext cx="8046720" cy="548640"/>
+          </a:xfrm>
+          <a:prstGeom xmlns:a="http://schemas.openxmlformats.org/drawingml/2006/main" prst="rect">
+            <a:avLst/>
+          </a:prstGeom>
+          <a:noFill xmlns:a="http://schemas.openxmlformats.org/drawingml/2006/main"/>
+        </p:spPr>
+        <p:txBody>
+          <a:bodyPr xmlns:a="http://schemas.openxmlformats.org/drawingml/2006/main" wrap="square" anchor="ctr"/>
           <a:lstStyle xmlns:a="http://schemas.openxmlformats.org/drawingml/2006/main"/>
           <a:p xmlns:a="http://schemas.openxmlformats.org/drawingml/2006/main">
             <a:pPr marL="0" indent="0">
@@ -7341,28 +5228,26 @@
               <a:buNone/>
             </a:pPr>
             <a:r>
-              <a:rPr sz="1050" b="1">
-                <a:solidFill>
-                  <a:srgbClr val="0E7C7B"/>
-                </a:solidFill>
-                <a:latin typeface="Arial"/>
-                <a:ea typeface="Arial"/>
-                <a:cs typeface="Arial"/>
-              </a:rPr>
-              <a:t>NOT DEMONSTRATED
-Part–colour CI crosses zero. FID is worse in every seed, though inside the +1 safeguard.
-The output-level benefit was not demonstrated.</a:t>
-            </a:r>
-            <a:endParaRPr sz="1050"/>
-          </a:p>
-        </p:txBody>
-      </p:sp>
-      <p:sp>
-        <p:nvSpPr>
-          <p:cNvPr id="42" name="Text 39">
-            <a:extLst xmlns:a="http://schemas.openxmlformats.org/drawingml/2006/main">
-              <a:ext uri="{FF2B5EF4-FFF2-40B4-BE49-F238E27FC236}">
-                <a16:creationId xmlns:a16="http://schemas.microsoft.com/office/drawing/2014/main" id="{C9FDAE8B-3432-48F3-888E-12DA1A71A5EF}"/>
+              <a:rPr sz="1150">
+                <a:solidFill>
+                  <a:srgbClr val="1F2937"/>
+                </a:solidFill>
+                <a:latin typeface="Arial"/>
+                <a:ea typeface="Arial"/>
+                <a:cs typeface="Arial"/>
+              </a:rPr>
+              <a:t>Alignment improves strongly, but FID fails the two-metric rule: not an overall win.</a:t>
+            </a:r>
+            <a:endParaRPr sz="1150"/>
+          </a:p>
+        </p:txBody>
+      </p:sp>
+      <p:sp>
+        <p:nvSpPr>
+          <p:cNvPr id="17" name="Text 15">
+            <a:extLst xmlns:a="http://schemas.openxmlformats.org/drawingml/2006/main">
+              <a:ext uri="{FF2B5EF4-FFF2-40B4-BE49-F238E27FC236}">
+                <a16:creationId xmlns:a16="http://schemas.microsoft.com/office/drawing/2014/main" id="{2EC6DB93-7D28-4417-98CD-8923EF138480}"/>
               </a:ext>
             </a:extLst>
           </p:cNvPr>
@@ -7405,10 +5290,10 @@
       </p:sp>
       <p:sp>
         <p:nvSpPr>
-          <p:cNvPr id="43" name="Shape 40">
-            <a:extLst xmlns:a="http://schemas.openxmlformats.org/drawingml/2006/main">
-              <a:ext uri="{FF2B5EF4-FFF2-40B4-BE49-F238E27FC236}">
-                <a16:creationId xmlns:a16="http://schemas.microsoft.com/office/drawing/2014/main" id="{DCA28C56-AA96-4580-87E6-BB3388540693}"/>
+          <p:cNvPr id="18" name="Shape 16">
+            <a:extLst xmlns:a="http://schemas.openxmlformats.org/drawingml/2006/main">
+              <a:ext uri="{FF2B5EF4-FFF2-40B4-BE49-F238E27FC236}">
+                <a16:creationId xmlns:a16="http://schemas.microsoft.com/office/drawing/2014/main" id="{84555E5B-078E-493D-AD28-7D2608621E18}"/>
               </a:ext>
             </a:extLst>
           </p:cNvPr>
@@ -7439,10 +5324,10 @@
       </p:sp>
       <p:sp>
         <p:nvSpPr>
-          <p:cNvPr id="44" name="Shape 41">
-            <a:extLst xmlns:a="http://schemas.openxmlformats.org/drawingml/2006/main">
-              <a:ext uri="{FF2B5EF4-FFF2-40B4-BE49-F238E27FC236}">
-                <a16:creationId xmlns:a16="http://schemas.microsoft.com/office/drawing/2014/main" id="{E098D422-8079-448A-A059-BA1D79E04C9A}"/>
+          <p:cNvPr id="19" name="Shape 17">
+            <a:extLst xmlns:a="http://schemas.openxmlformats.org/drawingml/2006/main">
+              <a:ext uri="{FF2B5EF4-FFF2-40B4-BE49-F238E27FC236}">
+                <a16:creationId xmlns:a16="http://schemas.microsoft.com/office/drawing/2014/main" id="{55C9039F-C1CA-4D5F-AB9B-8D239443A79A}"/>
               </a:ext>
             </a:extLst>
           </p:cNvPr>
@@ -7454,7 +5339,7 @@
         <p:spPr>
           <a:xfrm xmlns:a="http://schemas.openxmlformats.org/drawingml/2006/main">
             <a:off x="7955280" y="4864608"/>
-            <a:ext cx="759655" cy="54864"/>
+            <a:ext cx="506437" cy="54864"/>
           </a:xfrm>
           <a:prstGeom xmlns:a="http://schemas.openxmlformats.org/drawingml/2006/main" prst="rect">
             <a:avLst/>
@@ -7471,142 +5356,10 @@
           </a:p>
         </p:txBody>
       </p:sp>
-      <p:sp>
-        <p:nvSpPr>
-          <p:cNvPr id="45" name="ci-part-label">
-            <a:extLst xmlns:a="http://schemas.openxmlformats.org/drawingml/2006/main">
-              <a:ext uri="{FF2B5EF4-FFF2-40B4-BE49-F238E27FC236}">
-                <a16:creationId xmlns:a16="http://schemas.microsoft.com/office/drawing/2014/main" id="{74FA66CD-A5A2-4DAA-8466-FE18FCC2447C}"/>
-              </a:ext>
-            </a:extLst>
-          </p:cNvPr>
-          <p:cNvSpPr>
-            <a:spLocks xmlns:a="http://schemas.openxmlformats.org/drawingml/2006/main" noGrp="1"/>
-          </p:cNvSpPr>
-          <p:nvPr/>
-        </p:nvSpPr>
-        <p:spPr>
-          <a:xfrm xmlns:a="http://schemas.openxmlformats.org/drawingml/2006/main">
-            <a:off x="457200" y="2667000"/>
-            <a:ext cx="876300" cy="266700"/>
-          </a:xfrm>
-          <a:prstGeom xmlns:a="http://schemas.openxmlformats.org/drawingml/2006/main" prst="rect">
-            <a:avLst/>
-          </a:prstGeom>
-          <a:noFill xmlns:a="http://schemas.openxmlformats.org/drawingml/2006/main"/>
-          <a:ln xmlns:a="http://schemas.openxmlformats.org/drawingml/2006/main" w="0">
-            <a:noFill/>
-            <a:prstDash val="solid"/>
-          </a:ln>
-        </p:spPr>
-        <p:txBody>
-          <a:bodyPr xmlns:a="http://schemas.openxmlformats.org/drawingml/2006/main" lIns="19050" tIns="19050" rIns="19050" bIns="19050" anchor="ctr">
-            <a:normAutofit fontScale="100000"/>
-          </a:bodyPr>
-          <a:lstStyle xmlns:a="http://schemas.openxmlformats.org/drawingml/2006/main"/>
-          <a:p xmlns:a="http://schemas.openxmlformats.org/drawingml/2006/main">
-            <a:pPr algn="l">
-              <a:defRPr sz="825" b="1">
-                <a:solidFill>
-                  <a:srgbClr val="C95A00"/>
-                </a:solidFill>
-                <a:latin typeface="Arial"/>
-                <a:ea typeface="Arial"/>
-                <a:cs typeface="Arial"/>
-              </a:defRPr>
-            </a:pPr>
-            <a:r>
-              <a:rPr sz="825" b="1">
-                <a:solidFill>
-                  <a:srgbClr val="C95A00"/>
-                </a:solidFill>
-                <a:latin typeface="Arial"/>
-                <a:ea typeface="Arial"/>
-                <a:cs typeface="Arial"/>
-              </a:rPr>
-              <a:t>Part–colour</a:t>
-            </a:r>
-          </a:p>
-        </p:txBody>
-      </p:sp>
-      <p:sp>
-        <p:nvSpPr>
-          <p:cNvPr id="46" name="ci-r-label">
-            <a:extLst xmlns:a="http://schemas.openxmlformats.org/drawingml/2006/main">
-              <a:ext uri="{FF2B5EF4-FFF2-40B4-BE49-F238E27FC236}">
-                <a16:creationId xmlns:a16="http://schemas.microsoft.com/office/drawing/2014/main" id="{F1D4E41C-0D01-4D35-82BF-A8E92D3741D7}"/>
-              </a:ext>
-            </a:extLst>
-          </p:cNvPr>
-          <p:cNvSpPr>
-            <a:spLocks xmlns:a="http://schemas.openxmlformats.org/drawingml/2006/main" noGrp="1"/>
-          </p:cNvSpPr>
-          <p:nvPr/>
-        </p:nvSpPr>
-        <p:spPr>
-          <a:xfrm xmlns:a="http://schemas.openxmlformats.org/drawingml/2006/main">
-            <a:off x="457200" y="3333750"/>
-            <a:ext cx="876300" cy="266700"/>
-          </a:xfrm>
-          <a:prstGeom xmlns:a="http://schemas.openxmlformats.org/drawingml/2006/main" prst="rect">
-            <a:avLst/>
-          </a:prstGeom>
-          <a:noFill xmlns:a="http://schemas.openxmlformats.org/drawingml/2006/main"/>
-          <a:ln xmlns:a="http://schemas.openxmlformats.org/drawingml/2006/main" w="0">
-            <a:noFill/>
-            <a:prstDash val="solid"/>
-          </a:ln>
-        </p:spPr>
-        <p:txBody>
-          <a:bodyPr xmlns:a="http://schemas.openxmlformats.org/drawingml/2006/main" lIns="19050" tIns="19050" rIns="19050" bIns="19050" anchor="ctr">
-            <a:normAutofit fontScale="100000"/>
-          </a:bodyPr>
-          <a:lstStyle xmlns:a="http://schemas.openxmlformats.org/drawingml/2006/main"/>
-          <a:p xmlns:a="http://schemas.openxmlformats.org/drawingml/2006/main">
-            <a:pPr algn="l">
-              <a:defRPr sz="825" b="1">
-                <a:solidFill>
-                  <a:srgbClr val="0F7C83"/>
-                </a:solidFill>
-                <a:latin typeface="Arial"/>
-                <a:ea typeface="Arial"/>
-                <a:cs typeface="Arial"/>
-              </a:defRPr>
-            </a:pPr>
-            <a:r>
-              <a:rPr sz="825" b="1">
-                <a:solidFill>
-                  <a:srgbClr val="0F7C83"/>
-                </a:solidFill>
-                <a:latin typeface="Arial"/>
-                <a:ea typeface="Arial"/>
-                <a:cs typeface="Arial"/>
-              </a:rPr>
-              <a:t>R-precision</a:t>
-            </a:r>
-          </a:p>
-        </p:txBody>
-      </p:sp>
-      <p:graphicFrame>
-        <p:nvGraphicFramePr>
-          <p:cNvPr id="92" name="Chart"/>
-          <p:cNvGraphicFramePr/>
-          <p:nvPr/>
-        </p:nvGraphicFramePr>
-        <p:xfrm>
-          <a:off xmlns:a="http://schemas.openxmlformats.org/drawingml/2006/main" x="1190625" y="2457450"/>
-          <a:ext xmlns:a="http://schemas.openxmlformats.org/drawingml/2006/main" cx="2238375" cy="1695450"/>
-        </p:xfrm>
-        <a:graphic xmlns:a="http://schemas.openxmlformats.org/drawingml/2006/main">
-          <a:graphicData uri="http://schemas.openxmlformats.org/drawingml/2006/chart">
-            <c:chart xmlns:r="http://schemas.openxmlformats.org/officeDocument/2006/relationships" xmlns:c="http://schemas.openxmlformats.org/drawingml/2006/chart" r:id="Ra726fb9053204688"/>
-          </a:graphicData>
-        </a:graphic>
-      </p:graphicFrame>
     </p:spTree>
     <p:extLst>
       <p:ext uri="{BB962C8B-B14F-4D97-AF65-F5344CB8AC3E}">
-        <p14:creationId xmlns:p14="http://schemas.microsoft.com/office/powerpoint/2010/main" val="1967216780"/>
+        <p14:creationId xmlns:p14="http://schemas.microsoft.com/office/powerpoint/2010/main" val="1036377293"/>
       </p:ext>
     </p:extLst>
   </p:cSld>
@@ -7744,7 +5497,7 @@
               <a:buNone/>
             </a:pPr>
             <a:r>
-              <a:rPr sz="2100" b="1">
+              <a:rPr sz="2025" b="1">
                 <a:solidFill>
                   <a:srgbClr val="1F2937"/>
                 </a:solidFill>
@@ -7752,7 +5505,7 @@
                 <a:ea typeface="Arial"/>
                 <a:cs typeface="Arial"/>
               </a:rPr>
-              <a:t>The Proxy Moved; the Output Did Not</a:t>
+              <a:t>CA Sampling Explains the Apparent Reversal</a:t>
             </a:r>
             <a:endParaRPr sz="2100"/>
           </a:p>
@@ -7798,7 +5551,7 @@
                 <a:ea typeface="Arial"/>
                 <a:cs typeface="Arial"/>
               </a:rPr>
-              <a:t>Mechanism activation is necessary, but it is not the research outcome</a:t>
+              <a:t>Changing only the baseline inference policy moves both metrics materially</a:t>
             </a:r>
             <a:endParaRPr sz="1150"/>
           </a:p>
@@ -7922,7 +5675,7 @@
                 <a:ea typeface="Arial"/>
                 <a:cs typeface="Arial"/>
               </a:rPr>
-              <a:t>Directly Optimized</a:t>
+              <a:t>DM-GAN · SAMPLE → MEAN</a:t>
             </a:r>
             <a:endParaRPr sz="1250"/>
           </a:p>
@@ -7971,11 +5724,10 @@
                 <a:ea typeface="Arial"/>
                 <a:cs typeface="Arial"/>
               </a:rPr>
-              <a:t>Attention CE
-11.2554 → 11.2499
-Δ −0.0055 · lower is better
-Annotated-support mass
-Δ +0.0009 pp</a:t>
+              <a:t>FID: 15.7047 → 17.1708
+Δ = +1.4660 · worse
+R: 76.84% → 79.10%
+Δ = +2.253 pp · better</a:t>
             </a:r>
             <a:endParaRPr sz="1150"/>
           </a:p>
@@ -8099,7 +5851,7 @@
                 <a:ea typeface="Arial"/>
                 <a:cs typeface="Arial"/>
               </a:rPr>
-              <a:t>Observed Output</a:t>
+              <a:t>MDD · AT MEAN</a:t>
             </a:r>
             <a:endParaRPr sz="1250"/>
           </a:p>
@@ -8148,10 +5900,10 @@
                 <a:ea typeface="Arial"/>
                 <a:cs typeface="Arial"/>
               </a:rPr>
-              <a:t>Part–colour
-Δ −0.05 pp · CI crosses zero
-FID
-Δ +0.036 · worse</a:t>
+              <a:t>FID 16.1543
+R-precision 79.77%
+vs mean DM-GAN:
+FID −1.016 · R +0.673 pp</a:t>
             </a:r>
             <a:endParaRPr sz="1150"/>
           </a:p>
@@ -8239,7 +5991,7 @@
                 <a:ea typeface="Arial"/>
                 <a:cs typeface="Arial"/>
               </a:rPr>
-              <a:t>Interpretation</a:t>
+              <a:t>INTERPRETATION</a:t>
             </a:r>
             <a:endParaRPr sz="1250"/>
           </a:p>
@@ -8288,7 +6040,7 @@
                 <a:ea typeface="Arial"/>
                 <a:cs typeface="Arial"/>
               </a:rPr>
-              <a:t>Gradients reached the intended attention mechanism, but the ~0.05% proxy shift did not transfer to reliable generated-image behaviour.</a:t>
+              <a:t>The conditioning policy explains the reversal. The matched-mean result is the controlled checkpoint comparison.</a:t>
             </a:r>
             <a:endParaRPr sz="1150"/>
           </a:p>
@@ -8549,7 +6301,7 @@
               <a:buNone/>
             </a:pPr>
             <a:r>
-              <a:rPr sz="2100" b="1">
+              <a:rPr sz="1875" b="1">
                 <a:solidFill>
                   <a:srgbClr val="1F2937"/>
                 </a:solidFill>
@@ -8557,7 +6309,7 @@
                 <a:ea typeface="Arial"/>
                 <a:cs typeface="Arial"/>
               </a:rPr>
-              <a:t>Fixed, Unfiltered Pairs Look Mixed</a:t>
+              <a:t>Other Successors Confirm Why One Metric Is Not Enough</a:t>
             </a:r>
             <a:endParaRPr sz="2100"/>
           </a:p>
@@ -8603,7 +6355,7 @@
                 <a:ea typeface="Arial"/>
                 <a:cs typeface="Arial"/>
               </a:rPr>
-              <a:t>Complete fixed preview · seed 20260824 · B top, C bottom · no cherry-picking</a:t>
+              <a:t>Fixed first MDD cases · baseline left, MDD right · not quality-ranked</a:t>
             </a:r>
             <a:endParaRPr sz="1150"/>
           </a:p>
@@ -8618,8 +6370,11 @@
           <p:nvPr/>
         </p:nvPicPr>
         <p:blipFill>
-          <a:blip xmlns:r="http://schemas.openxmlformats.org/officeDocument/2006/relationships" xmlns:a="http://schemas.openxmlformats.org/drawingml/2006/main" r:embed="Rfa4cef3067564cc9"/>
-          <a:stretch xmlns:a="http://schemas.openxmlformats.org/drawingml/2006/main"/>
+          <a:blip xmlns:r="http://schemas.openxmlformats.org/officeDocument/2006/relationships" xmlns:a="http://schemas.openxmlformats.org/drawingml/2006/main" r:embed="R0fbaf82a388147bf"/>
+          <a:srcRect xmlns:a="http://schemas.openxmlformats.org/drawingml/2006/main" l="337" t="0" r="337" b="0"/>
+          <a:stretch xmlns:a="http://schemas.openxmlformats.org/drawingml/2006/main">
+            <a:fillRect l="0" t="0" r="0" b="0"/>
+          </a:stretch>
         </p:blipFill>
         <p:spPr>
           <a:xfrm xmlns:a="http://schemas.openxmlformats.org/drawingml/2006/main">
@@ -8713,7 +6468,7 @@
                 <a:ea typeface="Arial"/>
                 <a:cs typeface="Arial"/>
               </a:rPr>
-              <a:t>Visual Reading</a:t>
+              <a:t>SECONDARY CHECKS</a:t>
             </a:r>
             <a:endParaRPr sz="1200"/>
           </a:p>
@@ -8762,7 +6517,9 @@
                 <a:ea typeface="Arial"/>
                 <a:cs typeface="Arial"/>
               </a:rPr>
-              <a:t>Differences are subtle: C sometimes looks better, sometimes similar, and sometimes worse. The grid agrees with the mixed metrics.</a:t>
+              <a:t>DM-GAN+CL: ΔFID −1.061 · ΔR −5.55 pp
+DAE-GAN: ΔFID +6.287 · ΔR +9.70 pp
+Both are trade-offs.</a:t>
             </a:r>
             <a:endParaRPr sz="1100"/>
           </a:p>
@@ -8853,7 +6610,7 @@
                 <a:ea typeface="Arial"/>
                 <a:cs typeface="Arial"/>
               </a:rPr>
-              <a:t>B = baseline control · C = part-aware variant · full paired grid shown</a:t>
+              <a:t>Local CL2 · 3-seed mean: ΔFID −0.038 ± 0.079 · ΔR +0.058 ± 0.093 pp · 2/3 pass · MIXED</a:t>
             </a:r>
             <a:endParaRPr sz="1000"/>
           </a:p>
@@ -9114,7 +6871,7 @@
               <a:buNone/>
             </a:pPr>
             <a:r>
-              <a:rPr sz="2100" b="1">
+              <a:rPr sz="2025" b="1">
                 <a:solidFill>
                   <a:srgbClr val="1F2937"/>
                 </a:solidFill>
@@ -9122,7 +6879,7 @@
                 <a:ea typeface="Arial"/>
                 <a:cs typeface="Arial"/>
               </a:rPr>
-              <a:t>What This Experiment Can and Cannot Establish</a:t>
+              <a:t>The MDD Win Is Real for This Protocol, Not Universal</a:t>
             </a:r>
             <a:endParaRPr sz="2100"/>
           </a:p>
@@ -9168,7 +6925,7 @@
                 <a:ea typeface="Arial"/>
                 <a:cs typeface="Arial"/>
               </a:rPr>
-              <a:t>A fair fine-tuning test with clear limits</a:t>
+              <a:t>A strong checkpoint result with explicit boundaries</a:t>
             </a:r>
             <a:endParaRPr sz="1150"/>
           </a:p>
@@ -9292,7 +7049,7 @@
                 <a:ea typeface="Arial"/>
                 <a:cs typeface="Arial"/>
               </a:rPr>
-              <a:t>Supported</a:t>
+              <a:t>SUPPORTED</a:t>
             </a:r>
             <a:endParaRPr sz="1250"/>
           </a:p>
@@ -9341,9 +7098,10 @@
                 <a:ea typeface="Arial"/>
                 <a:cs typeface="Arial"/>
               </a:rPr>
-              <a:t>Fair B-versus-C comparison
-Part-aware gradients reached attention
-No reliable output gain under this protocol</a:t>
+              <a:t>30k matched-mean comparison
+FID improves by 1.016
+R improves by 0.67 pp
+R 95% CI stays above zero</a:t>
             </a:r>
             <a:endParaRPr sz="1150"/>
           </a:p>
@@ -9467,7 +7225,7 @@
                 <a:ea typeface="Arial"/>
                 <a:cs typeface="Arial"/>
               </a:rPr>
-              <a:t>Not Supported</a:t>
+              <a:t>NOT SUPPORTED</a:t>
             </a:r>
             <a:endParaRPr sz="1250"/>
           </a:p>
@@ -9516,9 +7274,10 @@
                 <a:ea typeface="Arial"/>
                 <a:cs typeface="Arial"/>
               </a:rPr>
-              <a:t>Universal failure of part supervision
-Outcome after full 800-epoch training
-Direct generated-image keypoint accuracy</a:t>
+              <a:t>Dominance under native defaults
+Isolated causal effect of MDD loss
+Full retraining
+Multi-seed checkpoint variance</a:t>
             </a:r>
             <a:endParaRPr sz="1150"/>
           </a:p>
@@ -9606,7 +7365,7 @@
                 <a:ea typeface="Arial"/>
                 <a:cs typeface="Arial"/>
               </a:rPr>
-              <a:t>Costs and Biases</a:t>
+              <a:t>EVALUATION LIMITS</a:t>
             </a:r>
             <a:endParaRPr sz="1250"/>
           </a:p>
@@ -9655,7 +7414,7 @@
                 <a:ea typeface="Arial"/>
                 <a:cs typeface="Arial"/>
               </a:rPr>
-              <a:t>C uses extra landmark labels; real pose may not match generated pose; DAMSM/token mapping are not independent judges; only 3 seeds and 1,200 updates.</a:t>
+              <a:t>Frozen DAMSM-family R judge · one checkpoint pair/seed · corrected mask differs from legacy batches · caption bank wraps after 29,330 rows.</a:t>
             </a:r>
             <a:endParaRPr sz="1150"/>
           </a:p>
@@ -9916,7 +7675,7 @@
               <a:buNone/>
             </a:pPr>
             <a:r>
-              <a:rPr sz="2100" b="1">
+              <a:rPr sz="1650" b="1">
                 <a:solidFill>
                   <a:srgbClr val="1F2937"/>
                 </a:solidFill>
@@ -9924,7 +7683,7 @@
                 <a:ea typeface="Arial"/>
                 <a:cs typeface="Arial"/>
               </a:rPr>
-              <a:t>Final Answer: Not Demonstrated</a:t>
+              <a:t>Choose DM-GAN-MDD Under Matched Mean—Then Test Diversity</a:t>
             </a:r>
             <a:endParaRPr sz="2100"/>
           </a:p>
@@ -9970,7 +7729,7 @@
                 <a:ea typeface="Arial"/>
                 <a:cs typeface="Arial"/>
               </a:rPr>
-              <a:t>The mechanism activated, but C did not outperform the fair control</a:t>
+              <a:t>The defensible answer is conditional, measured, and reproducible</a:t>
             </a:r>
             <a:endParaRPr sz="1150"/>
           </a:p>
@@ -10094,7 +7853,7 @@
                 <a:ea typeface="Arial"/>
                 <a:cs typeface="Arial"/>
               </a:rPr>
-              <a:t>What We Completed</a:t>
+              <a:t>WHAT WE COMPLETED</a:t>
             </a:r>
             <a:endParaRPr sz="1250"/>
           </a:p>
@@ -10143,10 +7902,11 @@
                 <a:ea typeface="Arial"/>
                 <a:cs typeface="Arial"/>
               </a:rPr>
-              <a:t>Credible baseline reproduction
-Working part-aware data + loss path
-3 paired seeds
-30,000 fixed evaluations per model</a:t>
+              <a:t>Credible DM-GAN reproduction
+Published-successor search
+Strict MDD integration
+Two 30k CA protocols
+CL and DAE cross-checks</a:t>
             </a:r>
             <a:endParaRPr sz="1200"/>
           </a:p>
@@ -10270,7 +8030,7 @@
                 <a:ea typeface="Arial"/>
                 <a:cs typeface="Arial"/>
               </a:rPr>
-              <a:t>What the Evidence Says</a:t>
+              <a:t>WHAT THE EVIDENCE SAYS</a:t>
             </a:r>
             <a:endParaRPr sz="1250"/>
           </a:p>
@@ -10319,10 +8079,9 @@
                 <a:ea typeface="Arial"/>
                 <a:cs typeface="Arial"/>
               </a:rPr>
-              <a:t>Attention proxy: slightly better
-Part–colour output: no reliable gain
-FID: slightly worse in all seeds
-R-precision: essentially unchanged</a:t>
+              <a:t>Matched mean: FID −1.016 · R +0.67 pp
+Native defaults: FID +0.450 · R +2.93 pp
+Best validated successor—not an unconditional winner.</a:t>
             </a:r>
             <a:endParaRPr sz="1100"/>
           </a:p>
@@ -10410,7 +8169,7 @@
                 <a:ea typeface="Arial"/>
                 <a:cs typeface="Arial"/>
               </a:rPr>
-              <a:t>Next Study</a:t>
+              <a:t>NEXT STUDY</a:t>
             </a:r>
             <a:endParaRPr sz="1200"/>
           </a:p>
@@ -10459,7 +8218,9 @@
                 <a:ea typeface="Arial"/>
                 <a:cs typeface="Arial"/>
               </a:rPr>
-              <a:t>Independent generated-image part detector or blinded human scoring, then longer multi-seed training.</a:t>
+              <a:t>Match stochastic CA on both sides
+Retrain MDD with paired seeds
+Add independent human/CLIP and diversity tests</a:t>
             </a:r>
             <a:endParaRPr sz="1050"/>
           </a:p>
@@ -10544,7 +8305,7 @@
                 <a:ea typeface="Arial"/>
                 <a:cs typeface="Arial"/>
               </a:rPr>
-              <a:t>Validated baseline → fair experiment → honest null result</a:t>
+              <a:t>Validated baseline → published successor → controlled win → honest boundary</a:t>
             </a:r>
             <a:endParaRPr sz="1100"/>
           </a:p>
@@ -10805,7 +8566,7 @@
               <a:buNone/>
             </a:pPr>
             <a:r>
-              <a:rPr sz="2100" b="1">
+              <a:rPr sz="1875" b="1">
                 <a:solidFill>
                   <a:srgbClr val="1F2937"/>
                 </a:solidFill>
@@ -10813,7 +8574,7 @@
                 <a:ea typeface="Arial"/>
                 <a:cs typeface="Arial"/>
               </a:rPr>
-              <a:t>When Can C Be Called Better Than B?</a:t>
+              <a:t>Better Means Lower FID Without Sacrificing Text Alignment</a:t>
             </a:r>
             <a:endParaRPr sz="2100"/>
           </a:p>
@@ -10859,7 +8620,7 @@
                 <a:ea typeface="Arial"/>
                 <a:cs typeface="Arial"/>
               </a:rPr>
-              <a:t>A narrow rule set fixed before reading the results</a:t>
+              <a:t>The decision rule was fixed before comparing candidates</a:t>
             </a:r>
             <a:endParaRPr sz="1150"/>
           </a:p>
@@ -10983,7 +8744,7 @@
                 <a:ea typeface="Arial"/>
                 <a:cs typeface="Arial"/>
               </a:rPr>
-              <a:t>Target Improvement</a:t>
+              <a:t>QUALITY + ALIGNMENT</a:t>
             </a:r>
             <a:endParaRPr sz="1300"/>
           </a:p>
@@ -11032,10 +8793,9 @@
                 <a:ea typeface="Arial"/>
                 <a:cs typeface="Arial"/>
               </a:rPr>
-              <a:t>Primary metric
-Part–colour swap accuracy: C − B with a cluster-bootstrap 95% CI above zero.
-Consistency
-Positive direction in at least 2 of 3 paired seeds.</a:t>
+              <a:t>FID must be lower.
+AND
+R-precision must be non-inferior.</a:t>
             </a:r>
             <a:endParaRPr sz="1400"/>
           </a:p>
@@ -11159,7 +8919,7 @@
                 <a:ea typeface="Arial"/>
                 <a:cs typeface="Arial"/>
               </a:rPr>
-              <a:t>Global Safeguards</a:t>
+              <a:t>FIXED EVIDENCE RULE</a:t>
             </a:r>
             <a:endParaRPr sz="1300"/>
           </a:p>
@@ -11208,12 +8968,10 @@
                 <a:ea typeface="Arial"/>
                 <a:cs typeface="Arial"/>
               </a:rPr>
-              <a:t>FID
-Regression no worse than +1.0.
-R-precision
-Loss no worse than −1.0 percentage point.
-Observed verdict
-NOT DEMONSTRATED</a:t>
+              <a:t>30,000 generated samples
+R 95% image-cluster CI lower bound &gt; −1.0 pp
+SUPPORTED = both pass
+TRADE-OFF = only one improves</a:t>
             </a:r>
             <a:endParaRPr sz="1300"/>
           </a:p>
@@ -11474,7 +9232,7 @@
               <a:buNone/>
             </a:pPr>
             <a:r>
-              <a:rPr sz="2100" b="1">
+              <a:rPr sz="1800" b="1">
                 <a:solidFill>
                   <a:srgbClr val="1F2937"/>
                 </a:solidFill>
@@ -11482,7 +9240,7 @@
                 <a:ea typeface="Arial"/>
                 <a:cs typeface="Arial"/>
               </a:rPr>
-              <a:t>DM-GAN Is Strong Globally—but Parts Can Drift</a:t>
+              <a:t>DM-GAN Refines Images, but Its Discriminator Mixes Content and Style</a:t>
             </a:r>
             <a:endParaRPr sz="2100"/>
           </a:p>
@@ -11528,7 +9286,7 @@
                 <a:ea typeface="Arial"/>
                 <a:cs typeface="Arial"/>
               </a:rPr>
-              <a:t>Dynamic memory refines a weak first image with word features</a:t>
+              <a:t>Dynamic word memory improves the image; the training signal remains entangled</a:t>
             </a:r>
             <a:endParaRPr sz="1150"/>
           </a:p>
@@ -11652,7 +9410,7 @@
                 <a:ea typeface="Arial"/>
                 <a:cs typeface="Arial"/>
               </a:rPr>
-              <a:t>Core Pipeline</a:t>
+              <a:t>DM-GAN PIPELINE</a:t>
             </a:r>
             <a:endParaRPr sz="1250"/>
           </a:p>
@@ -12002,8 +9760,8 @@
                 <a:ea typeface="Arial"/>
                 <a:cs typeface="Arial"/>
               </a:rPr>
-              <a:t>Memory-guided
-128×128 / 256×256</a:t>
+              <a:t>Dynamic memory
+128×128 → 256×256</a:t>
             </a:r>
             <a:endParaRPr sz="1050"/>
           </a:p>
@@ -12052,7 +9810,7 @@
                 <a:ea typeface="Arial"/>
                 <a:cs typeface="Arial"/>
               </a:rPr>
-              <a:t>At each refinement scale, current image features query a rewritten word memory.</a:t>
+              <a:t>Image features query rewritten word memory at each refinement scale.</a:t>
             </a:r>
             <a:endParaRPr sz="1050"/>
           </a:p>
@@ -12176,7 +9934,7 @@
                 <a:ea typeface="Arial"/>
                 <a:cs typeface="Arial"/>
               </a:rPr>
-              <a:t>Key Tension</a:t>
+              <a:t>SUCCESSOR OPPORTUNITY</a:t>
             </a:r>
             <a:endParaRPr sz="1150"/>
           </a:p>
@@ -12225,7 +9983,7 @@
                 <a:ea typeface="Arial"/>
                 <a:cs typeface="Arial"/>
               </a:rPr>
-              <a:t>The model can capture overall bird colour while placing eye, crown, wing, belly, or beak attributes ambiguously.</a:t>
+              <a:t>Existing discriminators judge text-linked content and image-only style through shared features.</a:t>
             </a:r>
             <a:endParaRPr sz="1050"/>
           </a:p>
@@ -12313,7 +10071,7 @@
                 <a:ea typeface="Arial"/>
                 <a:cs typeface="Arial"/>
               </a:rPr>
-              <a:t>Why Test Part Awareness</a:t>
+              <a:t>WHY IT MATTERS</a:t>
             </a:r>
             <a:endParaRPr sz="1300"/>
           </a:p>
@@ -12362,7 +10120,7 @@
                 <a:ea typeface="Arial"/>
                 <a:cs typeface="Arial"/>
               </a:rPr>
-              <a:t>Global realism and text match do not guarantee correct part placement. The proposed loss targets internal attention, so output evidence is still required.</a:t>
+              <a:t>A generator needs both a stronger text–image signal and a realistic style signal.</a:t>
             </a:r>
             <a:endParaRPr sz="1150"/>
           </a:p>
@@ -12631,7 +10389,7 @@
                 <a:ea typeface="Arial"/>
                 <a:cs typeface="Arial"/>
               </a:rPr>
-              <a:t>The Reproduced Baseline Is Credible</a:t>
+              <a:t>The Released DM-GAN Baseline Reproduces Credibly</a:t>
             </a:r>
             <a:endParaRPr sz="2100"/>
           </a:p>
@@ -12677,7 +10435,7 @@
                 <a:ea typeface="Arial"/>
                 <a:cs typeface="Arial"/>
               </a:rPr>
-              <a:t>Author weights · modern inference/evaluation path · 30,000 fixed samples</a:t>
+              <a:t>Author weights · modern evaluation path · 30,000 fixed samples</a:t>
             </a:r>
             <a:endParaRPr sz="1150"/>
           </a:p>
@@ -12765,7 +10523,7 @@
                 <a:ea typeface="Arial"/>
                 <a:cs typeface="Arial"/>
               </a:rPr>
-              <a:t>EVAL · SCALE</a:t>
+              <a:t>EVAL SCALE</a:t>
             </a:r>
             <a:endParaRPr sz="1100"/>
           </a:p>
@@ -12857,7 +10615,7 @@
                 <a:ea typeface="Arial"/>
                 <a:cs typeface="Arial"/>
               </a:rPr>
-              <a:t>fixed test samples</a:t>
+              <a:t>fixed generations</a:t>
             </a:r>
             <a:endParaRPr sz="1000"/>
           </a:p>
@@ -12945,7 +10703,7 @@
                 <a:ea typeface="Arial"/>
                 <a:cs typeface="Arial"/>
               </a:rPr>
-              <a:t>FID · LOWER</a:t>
+              <a:t>LOCAL FID ↓</a:t>
             </a:r>
             <a:endParaRPr sz="1100"/>
           </a:p>
@@ -12991,7 +10749,7 @@
                 <a:ea typeface="Arial"/>
                 <a:cs typeface="Arial"/>
               </a:rPr>
-              <a:t>15.76</a:t>
+              <a:t>15.7047</a:t>
             </a:r>
             <a:endParaRPr sz="1300"/>
           </a:p>
@@ -13037,7 +10795,7 @@
                 <a:ea typeface="Arial"/>
                 <a:cs typeface="Arial"/>
               </a:rPr>
-              <a:t>released ref. 15.34</a:t>
+              <a:t>released reference 15.34</a:t>
             </a:r>
             <a:endParaRPr sz="1000"/>
           </a:p>
@@ -13125,7 +10883,7 @@
                 <a:ea typeface="Arial"/>
                 <a:cs typeface="Arial"/>
               </a:rPr>
-              <a:t>R-PRECISION · HIGHER</a:t>
+              <a:t>LOCAL R-PRECISION ↑</a:t>
             </a:r>
             <a:endParaRPr sz="1100"/>
           </a:p>
@@ -13171,7 +10929,7 @@
                 <a:ea typeface="Arial"/>
                 <a:cs typeface="Arial"/>
               </a:rPr>
-              <a:t>76.67%</a:t>
+              <a:t>76.84%</a:t>
             </a:r>
             <a:endParaRPr sz="1300"/>
           </a:p>
@@ -13217,7 +10975,7 @@
                 <a:ea typeface="Arial"/>
                 <a:cs typeface="Arial"/>
               </a:rPr>
-              <a:t>released ref. 76.58%</a:t>
+              <a:t>released reference 76.58%</a:t>
             </a:r>
             <a:endParaRPr sz="1000"/>
           </a:p>
@@ -13305,7 +11063,7 @@
                 <a:ea typeface="Arial"/>
                 <a:cs typeface="Arial"/>
               </a:rPr>
-              <a:t>Official checkpoint · local inference</a:t>
+              <a:t>Native stochastic CA · local inference</a:t>
             </a:r>
             <a:endParaRPr sz="950"/>
           </a:p>
@@ -13320,7 +11078,7 @@
           <p:nvPr/>
         </p:nvPicPr>
         <p:blipFill>
-          <a:blip xmlns:r="http://schemas.openxmlformats.org/officeDocument/2006/relationships" xmlns:a="http://schemas.openxmlformats.org/drawingml/2006/main" r:embed="R1806c0a5f36c428a"/>
+          <a:blip xmlns:r="http://schemas.openxmlformats.org/officeDocument/2006/relationships" xmlns:a="http://schemas.openxmlformats.org/drawingml/2006/main" r:embed="R468c517a9b1546b9"/>
           <a:srcRect xmlns:a="http://schemas.openxmlformats.org/drawingml/2006/main" l="0" t="0" r="0" b="0"/>
           <a:stretch xmlns:a="http://schemas.openxmlformats.org/drawingml/2006/main"/>
         </p:blipFill>
@@ -13452,7 +11210,7 @@
                 <a:ea typeface="Arial"/>
                 <a:cs typeface="Arial"/>
               </a:rPr>
-              <a:t>Released and Local Results</a:t>
+              <a:t>Released vs Local</a:t>
             </a:r>
             <a:endParaRPr sz="1200"/>
           </a:p>
@@ -13932,7 +11690,7 @@
                 <a:ea typeface="Arial"/>
                 <a:cs typeface="Arial"/>
               </a:rPr>
-              <a:t>76.67% ±0.83</a:t>
+              <a:t>76.84%</a:t>
             </a:r>
             <a:endParaRPr sz="1000"/>
           </a:p>
@@ -14184,8 +11942,8 @@
                 <a:cs typeface="Arial"/>
               </a:rPr>
               <a:t>PASS
-Comparable FID and R-precision validate checkpoint compatibility, generation, and evaluation.
-This does not prove that the 200-step random-init run converged.</a:t>
+Comparable FID and R-precision validate checkpoint loading and the evaluation path.
+This is checkpoint reproduction—not full retraining.</a:t>
             </a:r>
             <a:endParaRPr sz="1050"/>
           </a:p>
@@ -14446,7 +12204,7 @@
               <a:buNone/>
             </a:pPr>
             <a:r>
-              <a:rPr sz="2100" b="1">
+              <a:rPr sz="1875" b="1">
                 <a:solidFill>
                   <a:srgbClr val="1F2937"/>
                 </a:solidFill>
@@ -14454,7 +12212,7 @@
                 <a:ea typeface="Arial"/>
                 <a:cs typeface="Arial"/>
               </a:rPr>
-              <a:t>Part-Aware Loss Guides Attention Toward Landmarks</a:t>
+              <a:t>A Direct Discriminator Successor Was the Best Literature Fit</a:t>
             </a:r>
             <a:endParaRPr sz="2100"/>
           </a:p>
@@ -14500,7 +12258,7 @@
                 <a:ea typeface="Arial"/>
                 <a:cs typeface="Arial"/>
               </a:rPr>
-              <a:t>Extra CUB supervision is added only to branch C</a:t>
+              <a:t>Three published paths had released assets and testable CUB claims</a:t>
             </a:r>
             <a:endParaRPr sz="1150"/>
           </a:p>
@@ -14624,7 +12382,7 @@
                 <a:ea typeface="Arial"/>
                 <a:cs typeface="Arial"/>
               </a:rPr>
-              <a:t>Build Supervision</a:t>
+              <a:t>PRIMARY · DM-GAN-MDD</a:t>
             </a:r>
             <a:endParaRPr sz="1250"/>
           </a:p>
@@ -14673,9 +12431,10 @@
                 <a:ea typeface="Arial"/>
                 <a:cs typeface="Arial"/>
               </a:rPr>
-              <a:t>1. Transform 15 visible landmarks with the image
-2. Merge left/right eye, wing and leg when side-neutral
-3. Convert target parts to Gaussian heatmaps</a:t>
+              <a:t>• Replaces the training discriminator
+• Keeps the DM-GAN generator family
+• Official CUB checkpoint
+• Paper: FID 15.76 · R 79.73%</a:t>
             </a:r>
             <a:endParaRPr sz="1150"/>
           </a:p>
@@ -14799,7 +12558,7 @@
                 <a:ea typeface="Arial"/>
                 <a:cs typeface="Arial"/>
               </a:rPr>
-              <a:t>Align Attention</a:t>
+              <a:t>SECONDARY CHECKS</a:t>
             </a:r>
             <a:endParaRPr sz="1250"/>
           </a:p>
@@ -14848,9 +12607,10 @@
                 <a:ea typeface="Arial"/>
                 <a:cs typeface="Arial"/>
               </a:rPr>
-              <a:t>Map part nouns and nearby colour words to targets
-Compute cross-entropy at 128 and 256
-Ltotal = LDM-GAN + 0.05 Lpart</a:t>
+              <a:t>DM-GAN+CL
+Contrastive caption/image consistency
+DAE-GAN
+Aspect-aware generator</a:t>
             </a:r>
             <a:endParaRPr sz="1150"/>
           </a:p>
@@ -14938,7 +12698,7 @@
                 <a:ea typeface="Arial"/>
                 <a:cs typeface="Arial"/>
               </a:rPr>
-              <a:t>Important Boundary</a:t>
+              <a:t>SELECTION</a:t>
             </a:r>
             <a:endParaRPr sz="1250"/>
           </a:p>
@@ -14987,7 +12747,7 @@
                 <a:ea typeface="Arial"/>
                 <a:cs typeface="Arial"/>
               </a:rPr>
-              <a:t>The loss supervises internal word attention—not final pixels. Output-level evaluation must still decide whether the image is better.</a:t>
+              <a:t>MDD is the closest architectural successor and the cleanest released-checkpoint comparison.</a:t>
             </a:r>
             <a:endParaRPr sz="1150"/>
           </a:p>
@@ -15248,7 +13008,7 @@
               <a:buNone/>
             </a:pPr>
             <a:r>
-              <a:rPr sz="2100" b="1">
+              <a:rPr sz="1875" b="1">
                 <a:solidFill>
                   <a:srgbClr val="1F2937"/>
                 </a:solidFill>
@@ -15256,7 +13016,7 @@
                 <a:ea typeface="Arial"/>
                 <a:cs typeface="Arial"/>
               </a:rPr>
-              <a:t>Landmarks Must Follow Every Image Transform</a:t>
+              <a:t>MDD Separates Text-Linked Content From Image-Only Style</a:t>
             </a:r>
             <a:endParaRPr sz="2100"/>
           </a:p>
@@ -15302,7 +13062,7 @@
                 <a:ea typeface="Arial"/>
                 <a:cs typeface="Arial"/>
               </a:rPr>
-              <a:t>A coordinate mismatch would invalidate the supervision</a:t>
+              <a:t>The discriminator changes during training; the inference interface does not</a:t>
             </a:r>
             <a:endParaRPr sz="1150"/>
           </a:p>
@@ -15426,7 +13186,7 @@
                 <a:ea typeface="Arial"/>
                 <a:cs typeface="Arial"/>
               </a:rPr>
-              <a:t>Synchronized Path</a:t>
+              <a:t>COMMON CONTENT</a:t>
             </a:r>
             <a:endParaRPr sz="1250"/>
           </a:p>
@@ -15475,11 +13235,10 @@
                 <a:ea typeface="Arial"/>
                 <a:cs typeface="Arial"/>
               </a:rPr>
-              <a:t>bbox crop
-→ resize
-→ random crop
-→ horizontal flip
-→ attention grid</a:t>
+              <a:t>IMAGE + TEXT
+→ early discriminator features
+→ shared content representation
+Stronger text–image correlation</a:t>
             </a:r>
             <a:endParaRPr sz="1200"/>
           </a:p>
@@ -15603,7 +13362,7 @@
                 <a:ea typeface="Arial"/>
                 <a:cs typeface="Arial"/>
               </a:rPr>
-              <a:t>Validity Rules</a:t>
+              <a:t>IMAGE-ONLY STYLE</a:t>
             </a:r>
             <a:endParaRPr sz="1250"/>
           </a:p>
@@ -15652,9 +13411,9 @@
                 <a:ea typeface="Arial"/>
                 <a:cs typeface="Arial"/>
               </a:rPr>
-              <a:t>Mask invisible or cropped points
-Flip x-coordinates with the image
-Merge left/right heatmaps for side-neutral words</a:t>
+              <a:t>Early image features
+→ modality-specific representation
+Realism and appearance signal</a:t>
             </a:r>
             <a:endParaRPr sz="1200"/>
           </a:p>
@@ -15742,7 +13501,8 @@
                 <a:ea typeface="Arial"/>
                 <a:cs typeface="Arial"/>
               </a:rPr>
-              <a:t>If image and landmark transforms diverge, the loss rewards attention at the wrong location. This was the critical data-pipeline change.</a:t>
+              <a:t>COMBINED SIGNAL → trains the original DM-GAN generator more effectively.
+Inference remains: caption + z → DM-GAN-style generator outputs.</a:t>
             </a:r>
             <a:endParaRPr sz="1250"/>
           </a:p>
@@ -15896,7 +13656,7 @@
           <p:cNvPr id="2" name="Shape 0">
             <a:extLst xmlns:a="http://schemas.openxmlformats.org/drawingml/2006/main">
               <a:ext uri="{FF2B5EF4-FFF2-40B4-BE49-F238E27FC236}">
-                <a16:creationId xmlns:a16="http://schemas.microsoft.com/office/drawing/2014/main" id="{F4DB82D0-6891-4AB5-BE2E-438155B74737}"/>
+                <a16:creationId xmlns:a16="http://schemas.microsoft.com/office/drawing/2014/main" id="{A5417A1D-6FAB-4A41-A109-02A1F447908F}"/>
               </a:ext>
             </a:extLst>
           </p:cNvPr>
@@ -15930,7 +13690,7 @@
           <p:cNvPr id="3" name="Text 1">
             <a:extLst xmlns:a="http://schemas.openxmlformats.org/drawingml/2006/main">
               <a:ext uri="{FF2B5EF4-FFF2-40B4-BE49-F238E27FC236}">
-                <a16:creationId xmlns:a16="http://schemas.microsoft.com/office/drawing/2014/main" id="{FFC4E628-D939-4507-9B6A-668DDDB4B5BF}"/>
+                <a16:creationId xmlns:a16="http://schemas.microsoft.com/office/drawing/2014/main" id="{880C3012-33CB-48EF-A0E0-F7A92D79FCE4}"/>
               </a:ext>
             </a:extLst>
           </p:cNvPr>
@@ -15976,7 +13736,7 @@
           <p:cNvPr id="4" name="Text 2">
             <a:extLst xmlns:a="http://schemas.openxmlformats.org/drawingml/2006/main">
               <a:ext uri="{FF2B5EF4-FFF2-40B4-BE49-F238E27FC236}">
-                <a16:creationId xmlns:a16="http://schemas.microsoft.com/office/drawing/2014/main" id="{179CECD0-2166-4B08-959D-7B0B0360D36F}"/>
+                <a16:creationId xmlns:a16="http://schemas.microsoft.com/office/drawing/2014/main" id="{46CECB0B-C8E2-45AA-A05C-05259BA80FDD}"/>
               </a:ext>
             </a:extLst>
           </p:cNvPr>
@@ -16003,7 +13763,7 @@
               <a:buNone/>
             </a:pPr>
             <a:r>
-              <a:rPr sz="2100" b="1">
+              <a:rPr sz="1875" b="1">
                 <a:solidFill>
                   <a:srgbClr val="1F2937"/>
                 </a:solidFill>
@@ -16011,7 +13771,7 @@
                 <a:ea typeface="Arial"/>
                 <a:cs typeface="Arial"/>
               </a:rPr>
-              <a:t>A Is Reference; B versus C Is the Experiment</a:t>
+              <a:t>One Paired Evaluator Keeps the Checkpoint Test Auditable</a:t>
             </a:r>
             <a:endParaRPr sz="2100"/>
           </a:p>
@@ -16022,7 +13782,7 @@
           <p:cNvPr id="5" name="Text 3">
             <a:extLst xmlns:a="http://schemas.openxmlformats.org/drawingml/2006/main">
               <a:ext uri="{FF2B5EF4-FFF2-40B4-BE49-F238E27FC236}">
-                <a16:creationId xmlns:a16="http://schemas.microsoft.com/office/drawing/2014/main" id="{A6CF5A49-AF1A-4581-8402-0F52FBFF43F4}"/>
+                <a16:creationId xmlns:a16="http://schemas.microsoft.com/office/drawing/2014/main" id="{10427EF0-5930-49A0-AB62-0709A314E321}"/>
               </a:ext>
             </a:extLst>
           </p:cNvPr>
@@ -16057,7 +13817,7 @@
                 <a:ea typeface="Arial"/>
                 <a:cs typeface="Arial"/>
               </a:rPr>
-              <a:t>Only the paired branches isolate the added loss</a:t>
+              <a:t>Both generators receive the same test cases and the same judges</a:t>
             </a:r>
             <a:endParaRPr sz="1150"/>
           </a:p>
@@ -16068,23 +13828,23 @@
           <p:cNvPr id="6" name="Shape 4">
             <a:extLst xmlns:a="http://schemas.openxmlformats.org/drawingml/2006/main">
               <a:ext uri="{FF2B5EF4-FFF2-40B4-BE49-F238E27FC236}">
-                <a16:creationId xmlns:a16="http://schemas.microsoft.com/office/drawing/2014/main" id="{BC9C9B7E-A265-4729-A100-EA080980B1C5}"/>
-              </a:ext>
-            </a:extLst>
-          </p:cNvPr>
-          <p:cNvSpPr>
-            <a:spLocks xmlns:a="http://schemas.openxmlformats.org/drawingml/2006/main" noGrp="1"/>
-          </p:cNvSpPr>
-          <p:nvPr/>
-        </p:nvSpPr>
-        <p:spPr>
-          <a:xfrm xmlns:a="http://schemas.openxmlformats.org/drawingml/2006/main">
-            <a:off x="365760" y="960120"/>
-            <a:ext cx="3931920" cy="1508760"/>
+                <a16:creationId xmlns:a16="http://schemas.microsoft.com/office/drawing/2014/main" id="{A838829E-6CF1-41D9-A239-D6C9B25B6353}"/>
+              </a:ext>
+            </a:extLst>
+          </p:cNvPr>
+          <p:cNvSpPr>
+            <a:spLocks xmlns:a="http://schemas.openxmlformats.org/drawingml/2006/main" noGrp="1"/>
+          </p:cNvSpPr>
+          <p:nvPr/>
+        </p:nvSpPr>
+        <p:spPr>
+          <a:xfrm xmlns:a="http://schemas.openxmlformats.org/drawingml/2006/main">
+            <a:off x="365760" y="1051560"/>
+            <a:ext cx="3108960" cy="2103120"/>
           </a:xfrm>
           <a:prstGeom xmlns:a="http://schemas.openxmlformats.org/drawingml/2006/main" prst="roundRect">
             <a:avLst>
-              <a:gd name="adj" fmla="val 3636"/>
+              <a:gd name="adj" fmla="val 2609"/>
             </a:avLst>
           </a:prstGeom>
           <a:solidFill xmlns:a="http://schemas.openxmlformats.org/drawingml/2006/main">
@@ -16110,27 +13870,27 @@
           <p:cNvPr id="7" name="Shape 5">
             <a:extLst xmlns:a="http://schemas.openxmlformats.org/drawingml/2006/main">
               <a:ext uri="{FF2B5EF4-FFF2-40B4-BE49-F238E27FC236}">
-                <a16:creationId xmlns:a16="http://schemas.microsoft.com/office/drawing/2014/main" id="{B9D2AA30-56F9-448C-AFD5-1F95E3F1FFA1}"/>
-              </a:ext>
-            </a:extLst>
-          </p:cNvPr>
-          <p:cNvSpPr>
-            <a:spLocks xmlns:a="http://schemas.openxmlformats.org/drawingml/2006/main" noGrp="1"/>
-          </p:cNvSpPr>
-          <p:nvPr/>
-        </p:nvSpPr>
-        <p:spPr>
-          <a:xfrm xmlns:a="http://schemas.openxmlformats.org/drawingml/2006/main">
-            <a:off x="365760" y="960120"/>
-            <a:ext cx="1737360" cy="1508760"/>
+                <a16:creationId xmlns:a16="http://schemas.microsoft.com/office/drawing/2014/main" id="{B40910E1-246B-41C5-9719-B69C3ADB3878}"/>
+              </a:ext>
+            </a:extLst>
+          </p:cNvPr>
+          <p:cNvSpPr>
+            <a:spLocks xmlns:a="http://schemas.openxmlformats.org/drawingml/2006/main" noGrp="1"/>
+          </p:cNvSpPr>
+          <p:nvPr/>
+        </p:nvSpPr>
+        <p:spPr>
+          <a:xfrm xmlns:a="http://schemas.openxmlformats.org/drawingml/2006/main">
+            <a:off x="365760" y="1051560"/>
+            <a:ext cx="3108960" cy="384048"/>
           </a:xfrm>
           <a:prstGeom xmlns:a="http://schemas.openxmlformats.org/drawingml/2006/main" prst="roundRect">
             <a:avLst>
-              <a:gd name="adj" fmla="val 3636"/>
+              <a:gd name="adj" fmla="val 14286"/>
             </a:avLst>
           </a:prstGeom>
           <a:solidFill xmlns:a="http://schemas.openxmlformats.org/drawingml/2006/main">
-            <a:srgbClr val="C55A11"/>
+            <a:srgbClr val="0E7C7B"/>
           </a:solidFill>
         </p:spPr>
         <p:txBody>
@@ -16146,19 +13906,19 @@
           <p:cNvPr id="8" name="Text 6">
             <a:extLst xmlns:a="http://schemas.openxmlformats.org/drawingml/2006/main">
               <a:ext uri="{FF2B5EF4-FFF2-40B4-BE49-F238E27FC236}">
-                <a16:creationId xmlns:a16="http://schemas.microsoft.com/office/drawing/2014/main" id="{D5F6D85D-5B02-4185-94F1-0C9BD65FE2A5}"/>
-              </a:ext>
-            </a:extLst>
-          </p:cNvPr>
-          <p:cNvSpPr>
-            <a:spLocks xmlns:a="http://schemas.openxmlformats.org/drawingml/2006/main" noGrp="1"/>
-          </p:cNvSpPr>
-          <p:nvPr/>
-        </p:nvSpPr>
-        <p:spPr>
-          <a:xfrm xmlns:a="http://schemas.openxmlformats.org/drawingml/2006/main">
-            <a:off x="365760" y="960120"/>
-            <a:ext cx="1737360" cy="1508760"/>
+                <a16:creationId xmlns:a16="http://schemas.microsoft.com/office/drawing/2014/main" id="{D0B7FE7A-F3EE-4DA7-B774-E867623C9B82}"/>
+              </a:ext>
+            </a:extLst>
+          </p:cNvPr>
+          <p:cNvSpPr>
+            <a:spLocks xmlns:a="http://schemas.openxmlformats.org/drawingml/2006/main" noGrp="1"/>
+          </p:cNvSpPr>
+          <p:nvPr/>
+        </p:nvSpPr>
+        <p:spPr>
+          <a:xfrm xmlns:a="http://schemas.openxmlformats.org/drawingml/2006/main">
+            <a:off x="365760" y="1097280"/>
+            <a:ext cx="3108960" cy="292608"/>
           </a:xfrm>
           <a:prstGeom xmlns:a="http://schemas.openxmlformats.org/drawingml/2006/main" prst="rect">
             <a:avLst/>
@@ -16173,7 +13933,7 @@
               <a:buNone/>
             </a:pPr>
             <a:r>
-              <a:rPr sz="1150" b="1">
+              <a:rPr sz="1250" b="1">
                 <a:solidFill>
                   <a:srgbClr val="FFFFFF"/>
                 </a:solidFill>
@@ -16181,9 +13941,9 @@
                 <a:ea typeface="Arial"/>
                 <a:cs typeface="Arial"/>
               </a:rPr>
-              <a:t>Three Roles</a:t>
-            </a:r>
-            <a:endParaRPr sz="1150"/>
+              <a:t>A · DM-GAN</a:t>
+            </a:r>
+            <a:endParaRPr sz="1250"/>
           </a:p>
         </p:txBody>
       </p:sp>
@@ -16192,52 +13952,49 @@
           <p:cNvPr id="9" name="Text 7">
             <a:extLst xmlns:a="http://schemas.openxmlformats.org/drawingml/2006/main">
               <a:ext uri="{FF2B5EF4-FFF2-40B4-BE49-F238E27FC236}">
-                <a16:creationId xmlns:a16="http://schemas.microsoft.com/office/drawing/2014/main" id="{2A7F4981-980E-4F27-827B-164B6BD09FE3}"/>
-              </a:ext>
-            </a:extLst>
-          </p:cNvPr>
-          <p:cNvSpPr>
-            <a:spLocks xmlns:a="http://schemas.openxmlformats.org/drawingml/2006/main" noGrp="1"/>
-          </p:cNvSpPr>
-          <p:nvPr/>
-        </p:nvSpPr>
-        <p:spPr>
-          <a:xfrm xmlns:a="http://schemas.openxmlformats.org/drawingml/2006/main">
-            <a:off x="2240280" y="1024128"/>
-            <a:ext cx="2011680" cy="1371600"/>
-          </a:xfrm>
-          <a:prstGeom xmlns:a="http://schemas.openxmlformats.org/drawingml/2006/main" prst="rect">
-            <a:avLst/>
-          </a:prstGeom>
-          <a:noFill xmlns:a="http://schemas.openxmlformats.org/drawingml/2006/main"/>
-        </p:spPr>
-        <p:txBody>
-          <a:bodyPr xmlns:a="http://schemas.openxmlformats.org/drawingml/2006/main" wrap="square" anchor="ctr"/>
+                <a16:creationId xmlns:a16="http://schemas.microsoft.com/office/drawing/2014/main" id="{CC1F2DB2-8C77-4C53-9C1B-729E738B5232}"/>
+              </a:ext>
+            </a:extLst>
+          </p:cNvPr>
+          <p:cNvSpPr>
+            <a:spLocks xmlns:a="http://schemas.openxmlformats.org/drawingml/2006/main" noGrp="1"/>
+          </p:cNvSpPr>
+          <p:nvPr/>
+        </p:nvSpPr>
+        <p:spPr>
+          <a:xfrm xmlns:a="http://schemas.openxmlformats.org/drawingml/2006/main">
+            <a:off x="530352" y="1536192"/>
+            <a:ext cx="2779776" cy="1508760"/>
+          </a:xfrm>
+          <a:prstGeom xmlns:a="http://schemas.openxmlformats.org/drawingml/2006/main" prst="rect">
+            <a:avLst/>
+          </a:prstGeom>
+          <a:noFill xmlns:a="http://schemas.openxmlformats.org/drawingml/2006/main"/>
+        </p:spPr>
+        <p:txBody>
+          <a:bodyPr xmlns:a="http://schemas.openxmlformats.org/drawingml/2006/main" wrap="square" anchor="t"/>
           <a:lstStyle xmlns:a="http://schemas.openxmlformats.org/drawingml/2006/main"/>
           <a:p xmlns:a="http://schemas.openxmlformats.org/drawingml/2006/main">
             <a:pPr marL="0" indent="0">
               <a:lnSpc>
-                <a:spcPts val="1100"/>
+                <a:spcPts val="1200"/>
               </a:lnSpc>
               <a:buNone/>
             </a:pPr>
             <a:r>
-              <a:rPr sz="1050" b="1">
-                <a:solidFill>
-                  <a:srgbClr val="1F2937"/>
-                </a:solidFill>
-                <a:latin typeface="Arial"/>
-                <a:ea typeface="Arial"/>
-                <a:cs typeface="Arial"/>
-              </a:rPr>
-              <a:t>A · Reference only
-Untouched released generator
-B · Baseline control
-Equal-budget fine-tuning, λpart = 0
-C · Part-aware variant
-Same start and budget, λpart = 0.05</a:t>
-            </a:r>
-            <a:endParaRPr sz="1050"/>
+              <a:rPr sz="1200" b="1">
+                <a:solidFill>
+                  <a:srgbClr val="1F3864"/>
+                </a:solidFill>
+                <a:latin typeface="Arial"/>
+                <a:ea typeface="Arial"/>
+                <a:cs typeface="Arial"/>
+              </a:rPr>
+              <a:t>Released generator
+Native or matched-mean CA as stated
+Strict checkpoint loading</a:t>
+            </a:r>
+            <a:endParaRPr sz="1200"/>
           </a:p>
         </p:txBody>
       </p:sp>
@@ -16246,27 +14003,27 @@
           <p:cNvPr id="10" name="Shape 8">
             <a:extLst xmlns:a="http://schemas.openxmlformats.org/drawingml/2006/main">
               <a:ext uri="{FF2B5EF4-FFF2-40B4-BE49-F238E27FC236}">
-                <a16:creationId xmlns:a16="http://schemas.microsoft.com/office/drawing/2014/main" id="{2F2A0D9B-2481-40F7-8E4D-32FA1D3F5C56}"/>
-              </a:ext>
-            </a:extLst>
-          </p:cNvPr>
-          <p:cNvSpPr>
-            <a:spLocks xmlns:a="http://schemas.openxmlformats.org/drawingml/2006/main" noGrp="1"/>
-          </p:cNvSpPr>
-          <p:nvPr/>
-        </p:nvSpPr>
-        <p:spPr>
-          <a:xfrm xmlns:a="http://schemas.openxmlformats.org/drawingml/2006/main">
-            <a:off x="4617720" y="960120"/>
-            <a:ext cx="4160520" cy="2331720"/>
+                <a16:creationId xmlns:a16="http://schemas.microsoft.com/office/drawing/2014/main" id="{9CB42AC3-6EBF-4C0F-8414-9DCF746DE06D}"/>
+              </a:ext>
+            </a:extLst>
+          </p:cNvPr>
+          <p:cNvSpPr>
+            <a:spLocks xmlns:a="http://schemas.openxmlformats.org/drawingml/2006/main" noGrp="1"/>
+          </p:cNvSpPr>
+          <p:nvPr/>
+        </p:nvSpPr>
+        <p:spPr>
+          <a:xfrm xmlns:a="http://schemas.openxmlformats.org/drawingml/2006/main">
+            <a:off x="3657600" y="1051560"/>
+            <a:ext cx="5120640" cy="2103120"/>
           </a:xfrm>
           <a:prstGeom xmlns:a="http://schemas.openxmlformats.org/drawingml/2006/main" prst="roundRect">
             <a:avLst>
-              <a:gd name="adj" fmla="val 2353"/>
+              <a:gd name="adj" fmla="val 2609"/>
             </a:avLst>
           </a:prstGeom>
           <a:solidFill xmlns:a="http://schemas.openxmlformats.org/drawingml/2006/main">
-            <a:srgbClr val="FFFFFF"/>
+            <a:srgbClr val="F3F6FB"/>
           </a:solidFill>
           <a:ln xmlns:a="http://schemas.openxmlformats.org/drawingml/2006/main" w="12700">
             <a:solidFill>
@@ -16285,64 +14042,58 @@
       </p:sp>
       <p:sp>
         <p:nvSpPr>
-          <p:cNvPr id="12" name="Shape 9">
-            <a:extLst xmlns:a="http://schemas.openxmlformats.org/drawingml/2006/main">
-              <a:ext uri="{FF2B5EF4-FFF2-40B4-BE49-F238E27FC236}">
-                <a16:creationId xmlns:a16="http://schemas.microsoft.com/office/drawing/2014/main" id="{E71F0BD6-95FD-47E4-A7D6-A4F8B8BDC67B}"/>
-              </a:ext>
-            </a:extLst>
-          </p:cNvPr>
-          <p:cNvSpPr>
-            <a:spLocks xmlns:a="http://schemas.openxmlformats.org/drawingml/2006/main" noGrp="1"/>
-          </p:cNvSpPr>
-          <p:nvPr/>
-        </p:nvSpPr>
-        <p:spPr>
-          <a:xfrm xmlns:a="http://schemas.openxmlformats.org/drawingml/2006/main">
-            <a:off x="365760" y="2606040"/>
-            <a:ext cx="3931920" cy="1691640"/>
+          <p:cNvPr id="11" name="Shape 9">
+            <a:extLst xmlns:a="http://schemas.openxmlformats.org/drawingml/2006/main">
+              <a:ext uri="{FF2B5EF4-FFF2-40B4-BE49-F238E27FC236}">
+                <a16:creationId xmlns:a16="http://schemas.microsoft.com/office/drawing/2014/main" id="{AFB9FD1B-42FD-4ED5-A04C-4C738DE9FACA}"/>
+              </a:ext>
+            </a:extLst>
+          </p:cNvPr>
+          <p:cNvSpPr>
+            <a:spLocks xmlns:a="http://schemas.openxmlformats.org/drawingml/2006/main" noGrp="1"/>
+          </p:cNvSpPr>
+          <p:nvPr/>
+        </p:nvSpPr>
+        <p:spPr>
+          <a:xfrm xmlns:a="http://schemas.openxmlformats.org/drawingml/2006/main">
+            <a:off x="3657600" y="1051560"/>
+            <a:ext cx="5120640" cy="384048"/>
           </a:xfrm>
           <a:prstGeom xmlns:a="http://schemas.openxmlformats.org/drawingml/2006/main" prst="roundRect">
             <a:avLst>
-              <a:gd name="adj" fmla="val 3243"/>
+              <a:gd name="adj" fmla="val 14286"/>
             </a:avLst>
           </a:prstGeom>
           <a:solidFill xmlns:a="http://schemas.openxmlformats.org/drawingml/2006/main">
-            <a:srgbClr val="E8EEF7"/>
+            <a:srgbClr val="1F3864"/>
           </a:solidFill>
-          <a:ln xmlns:a="http://schemas.openxmlformats.org/drawingml/2006/main" w="12700">
-            <a:solidFill>
-              <a:srgbClr val="1F3864"/>
-            </a:solidFill>
-            <a:prstDash val="solid"/>
-          </a:ln>
-        </p:spPr>
-        <p:txBody>
-          <a:bodyPr xmlns:a="http://schemas.openxmlformats.org/drawingml/2006/main"/>
-          <a:lstStyle xmlns:a="http://schemas.openxmlformats.org/drawingml/2006/main"/>
-          <a:p xmlns:a="http://schemas.openxmlformats.org/drawingml/2006/main">
-            <a:endParaRPr/>
-          </a:p>
-        </p:txBody>
-      </p:sp>
-      <p:sp>
-        <p:nvSpPr>
-          <p:cNvPr id="13" name="Text 10">
-            <a:extLst xmlns:a="http://schemas.openxmlformats.org/drawingml/2006/main">
-              <a:ext uri="{FF2B5EF4-FFF2-40B4-BE49-F238E27FC236}">
-                <a16:creationId xmlns:a16="http://schemas.microsoft.com/office/drawing/2014/main" id="{6A7B28F2-968F-408C-8F74-9032CA47A4B8}"/>
-              </a:ext>
-            </a:extLst>
-          </p:cNvPr>
-          <p:cNvSpPr>
-            <a:spLocks xmlns:a="http://schemas.openxmlformats.org/drawingml/2006/main" noGrp="1"/>
-          </p:cNvSpPr>
-          <p:nvPr/>
-        </p:nvSpPr>
-        <p:spPr>
-          <a:xfrm xmlns:a="http://schemas.openxmlformats.org/drawingml/2006/main">
-            <a:off x="502920" y="2697480"/>
-            <a:ext cx="3703320" cy="292608"/>
+        </p:spPr>
+        <p:txBody>
+          <a:bodyPr xmlns:a="http://schemas.openxmlformats.org/drawingml/2006/main"/>
+          <a:lstStyle xmlns:a="http://schemas.openxmlformats.org/drawingml/2006/main"/>
+          <a:p xmlns:a="http://schemas.openxmlformats.org/drawingml/2006/main">
+            <a:endParaRPr/>
+          </a:p>
+        </p:txBody>
+      </p:sp>
+      <p:sp>
+        <p:nvSpPr>
+          <p:cNvPr id="12" name="Text 10">
+            <a:extLst xmlns:a="http://schemas.openxmlformats.org/drawingml/2006/main">
+              <a:ext uri="{FF2B5EF4-FFF2-40B4-BE49-F238E27FC236}">
+                <a16:creationId xmlns:a16="http://schemas.microsoft.com/office/drawing/2014/main" id="{83220C33-3268-4FF3-99E4-E96739FC104E}"/>
+              </a:ext>
+            </a:extLst>
+          </p:cNvPr>
+          <p:cNvSpPr>
+            <a:spLocks xmlns:a="http://schemas.openxmlformats.org/drawingml/2006/main" noGrp="1"/>
+          </p:cNvSpPr>
+          <p:nvPr/>
+        </p:nvSpPr>
+        <p:spPr>
+          <a:xfrm xmlns:a="http://schemas.openxmlformats.org/drawingml/2006/main">
+            <a:off x="3657600" y="1097280"/>
+            <a:ext cx="5120640" cy="292608"/>
           </a:xfrm>
           <a:prstGeom xmlns:a="http://schemas.openxmlformats.org/drawingml/2006/main" prst="rect">
             <a:avLst/>
@@ -16353,42 +14104,42 @@
           <a:bodyPr xmlns:a="http://schemas.openxmlformats.org/drawingml/2006/main" wrap="square" anchor="ctr"/>
           <a:lstStyle xmlns:a="http://schemas.openxmlformats.org/drawingml/2006/main"/>
           <a:p xmlns:a="http://schemas.openxmlformats.org/drawingml/2006/main">
-            <a:pPr marL="0" indent="0">
-              <a:buNone/>
-            </a:pPr>
-            <a:r>
-              <a:rPr sz="1200" b="1">
-                <a:solidFill>
-                  <a:srgbClr val="1F3864"/>
-                </a:solidFill>
-                <a:latin typeface="Arial"/>
-                <a:ea typeface="Arial"/>
-                <a:cs typeface="Arial"/>
-              </a:rPr>
-              <a:t>Valid Contrast</a:t>
-            </a:r>
-            <a:endParaRPr sz="1200"/>
-          </a:p>
-        </p:txBody>
-      </p:sp>
-      <p:sp>
-        <p:nvSpPr>
-          <p:cNvPr id="14" name="Text 11">
-            <a:extLst xmlns:a="http://schemas.openxmlformats.org/drawingml/2006/main">
-              <a:ext uri="{FF2B5EF4-FFF2-40B4-BE49-F238E27FC236}">
-                <a16:creationId xmlns:a16="http://schemas.microsoft.com/office/drawing/2014/main" id="{735485C1-8A36-4D2F-A3F4-EF52DE506B71}"/>
-              </a:ext>
-            </a:extLst>
-          </p:cNvPr>
-          <p:cNvSpPr>
-            <a:spLocks xmlns:a="http://schemas.openxmlformats.org/drawingml/2006/main" noGrp="1"/>
-          </p:cNvSpPr>
-          <p:nvPr/>
-        </p:nvSpPr>
-        <p:spPr>
-          <a:xfrm xmlns:a="http://schemas.openxmlformats.org/drawingml/2006/main">
-            <a:off x="502920" y="3035808"/>
-            <a:ext cx="3703320" cy="1188720"/>
+            <a:pPr marL="0" indent="0" algn="ctr">
+              <a:buNone/>
+            </a:pPr>
+            <a:r>
+              <a:rPr sz="1250" b="1">
+                <a:solidFill>
+                  <a:srgbClr val="FFFFFF"/>
+                </a:solidFill>
+                <a:latin typeface="Arial"/>
+                <a:ea typeface="Arial"/>
+                <a:cs typeface="Arial"/>
+              </a:rPr>
+              <a:t>SHARED PROTOCOL</a:t>
+            </a:r>
+            <a:endParaRPr sz="1250"/>
+          </a:p>
+        </p:txBody>
+      </p:sp>
+      <p:sp>
+        <p:nvSpPr>
+          <p:cNvPr id="13" name="Text 11">
+            <a:extLst xmlns:a="http://schemas.openxmlformats.org/drawingml/2006/main">
+              <a:ext uri="{FF2B5EF4-FFF2-40B4-BE49-F238E27FC236}">
+                <a16:creationId xmlns:a16="http://schemas.microsoft.com/office/drawing/2014/main" id="{155F9E7F-F05A-45F4-95F8-DD238CD24D87}"/>
+              </a:ext>
+            </a:extLst>
+          </p:cNvPr>
+          <p:cNvSpPr>
+            <a:spLocks xmlns:a="http://schemas.openxmlformats.org/drawingml/2006/main" noGrp="1"/>
+          </p:cNvSpPr>
+          <p:nvPr/>
+        </p:nvSpPr>
+        <p:spPr>
+          <a:xfrm xmlns:a="http://schemas.openxmlformats.org/drawingml/2006/main">
+            <a:off x="3822192" y="1536192"/>
+            <a:ext cx="4791456" cy="1508760"/>
           </a:xfrm>
           <a:prstGeom xmlns:a="http://schemas.openxmlformats.org/drawingml/2006/main" prst="rect">
             <a:avLst/>
@@ -16401,20 +14152,23 @@
           <a:p xmlns:a="http://schemas.openxmlformats.org/drawingml/2006/main">
             <a:pPr marL="0" indent="0">
               <a:lnSpc>
-                <a:spcPts val="1200"/>
+                <a:spcPts val="1300"/>
               </a:lnSpc>
               <a:buNone/>
             </a:pPr>
             <a:r>
               <a:rPr sz="1100" b="1">
                 <a:solidFill>
-                  <a:srgbClr val="1F3864"/>
-                </a:solidFill>
-                <a:latin typeface="Arial"/>
-                <a:ea typeface="Arial"/>
-                <a:cs typeface="Arial"/>
-              </a:rPr>
-              <a:t>A gives context. B absorbs continued training, the fresh discriminator, and optimizer updates. Only C − B estimates the effect of Lpart.</a:t>
+                  <a:srgbClr val="C55A11"/>
+                </a:solidFill>
+                <a:latin typeface="Arial"/>
+                <a:ea typeface="Arial"/>
+                <a:cs typeface="Arial"/>
+              </a:rPr>
+              <a:t>Caption index · latent z · 99 negatives
+Original frozen DAMSM evaluator
+PyTorch Inception + bird_val statistics
+Corrected batch-major word mask</a:t>
             </a:r>
             <a:endParaRPr sz="1100"/>
           </a:p>
@@ -16422,26 +14176,26 @@
       </p:sp>
       <p:sp>
         <p:nvSpPr>
-          <p:cNvPr id="15" name="Shape 12">
-            <a:extLst xmlns:a="http://schemas.openxmlformats.org/drawingml/2006/main">
-              <a:ext uri="{FF2B5EF4-FFF2-40B4-BE49-F238E27FC236}">
-                <a16:creationId xmlns:a16="http://schemas.microsoft.com/office/drawing/2014/main" id="{CC991CC7-EF31-4C13-9803-71A1294255E5}"/>
-              </a:ext>
-            </a:extLst>
-          </p:cNvPr>
-          <p:cNvSpPr>
-            <a:spLocks xmlns:a="http://schemas.openxmlformats.org/drawingml/2006/main" noGrp="1"/>
-          </p:cNvSpPr>
-          <p:nvPr/>
-        </p:nvSpPr>
-        <p:spPr>
-          <a:xfrm xmlns:a="http://schemas.openxmlformats.org/drawingml/2006/main">
-            <a:off x="4617720" y="3474720"/>
-            <a:ext cx="4160520" cy="731520"/>
+          <p:cNvPr id="14" name="Shape 12">
+            <a:extLst xmlns:a="http://schemas.openxmlformats.org/drawingml/2006/main">
+              <a:ext uri="{FF2B5EF4-FFF2-40B4-BE49-F238E27FC236}">
+                <a16:creationId xmlns:a16="http://schemas.microsoft.com/office/drawing/2014/main" id="{CC890284-C1AF-4979-A49C-452AA809E4C8}"/>
+              </a:ext>
+            </a:extLst>
+          </p:cNvPr>
+          <p:cNvSpPr>
+            <a:spLocks xmlns:a="http://schemas.openxmlformats.org/drawingml/2006/main" noGrp="1"/>
+          </p:cNvSpPr>
+          <p:nvPr/>
+        </p:nvSpPr>
+        <p:spPr>
+          <a:xfrm xmlns:a="http://schemas.openxmlformats.org/drawingml/2006/main">
+            <a:off x="365760" y="3337560"/>
+            <a:ext cx="5120640" cy="914400"/>
           </a:xfrm>
           <a:prstGeom xmlns:a="http://schemas.openxmlformats.org/drawingml/2006/main" prst="roundRect">
             <a:avLst>
-              <a:gd name="adj" fmla="val 7500"/>
+              <a:gd name="adj" fmla="val 6000"/>
             </a:avLst>
           </a:prstGeom>
           <a:solidFill xmlns:a="http://schemas.openxmlformats.org/drawingml/2006/main">
@@ -16464,22 +14218,68 @@
       </p:sp>
       <p:sp>
         <p:nvSpPr>
-          <p:cNvPr id="16" name="Text 13">
-            <a:extLst xmlns:a="http://schemas.openxmlformats.org/drawingml/2006/main">
-              <a:ext uri="{FF2B5EF4-FFF2-40B4-BE49-F238E27FC236}">
-                <a16:creationId xmlns:a16="http://schemas.microsoft.com/office/drawing/2014/main" id="{410DC54F-C4DF-4C35-92D2-B846F7A6FE2A}"/>
-              </a:ext>
-            </a:extLst>
-          </p:cNvPr>
-          <p:cNvSpPr>
-            <a:spLocks xmlns:a="http://schemas.openxmlformats.org/drawingml/2006/main" noGrp="1"/>
-          </p:cNvSpPr>
-          <p:nvPr/>
-        </p:nvSpPr>
-        <p:spPr>
-          <a:xfrm xmlns:a="http://schemas.openxmlformats.org/drawingml/2006/main">
-            <a:off x="4736592" y="3547872"/>
-            <a:ext cx="3931920" cy="585216"/>
+          <p:cNvPr id="15" name="Text 13">
+            <a:extLst xmlns:a="http://schemas.openxmlformats.org/drawingml/2006/main">
+              <a:ext uri="{FF2B5EF4-FFF2-40B4-BE49-F238E27FC236}">
+                <a16:creationId xmlns:a16="http://schemas.microsoft.com/office/drawing/2014/main" id="{F5320E88-2104-4B95-8441-13CB06DAC331}"/>
+              </a:ext>
+            </a:extLst>
+          </p:cNvPr>
+          <p:cNvSpPr>
+            <a:spLocks xmlns:a="http://schemas.openxmlformats.org/drawingml/2006/main" noGrp="1"/>
+          </p:cNvSpPr>
+          <p:nvPr/>
+        </p:nvSpPr>
+        <p:spPr>
+          <a:xfrm xmlns:a="http://schemas.openxmlformats.org/drawingml/2006/main">
+            <a:off x="502920" y="3410712"/>
+            <a:ext cx="1463040" cy="274320"/>
+          </a:xfrm>
+          <a:prstGeom xmlns:a="http://schemas.openxmlformats.org/drawingml/2006/main" prst="rect">
+            <a:avLst/>
+          </a:prstGeom>
+          <a:noFill xmlns:a="http://schemas.openxmlformats.org/drawingml/2006/main"/>
+        </p:spPr>
+        <p:txBody>
+          <a:bodyPr xmlns:a="http://schemas.openxmlformats.org/drawingml/2006/main" wrap="square" anchor="ctr"/>
+          <a:lstStyle xmlns:a="http://schemas.openxmlformats.org/drawingml/2006/main"/>
+          <a:p xmlns:a="http://schemas.openxmlformats.org/drawingml/2006/main">
+            <a:pPr marL="0" indent="0">
+              <a:buNone/>
+            </a:pPr>
+            <a:r>
+              <a:rPr sz="1200" b="1">
+                <a:solidFill>
+                  <a:srgbClr val="1F3864"/>
+                </a:solidFill>
+                <a:latin typeface="Arial"/>
+                <a:ea typeface="Arial"/>
+                <a:cs typeface="Arial"/>
+              </a:rPr>
+              <a:t>B · DM-GAN-MDD</a:t>
+            </a:r>
+            <a:endParaRPr sz="1200"/>
+          </a:p>
+        </p:txBody>
+      </p:sp>
+      <p:sp>
+        <p:nvSpPr>
+          <p:cNvPr id="16" name="Text 14">
+            <a:extLst xmlns:a="http://schemas.openxmlformats.org/drawingml/2006/main">
+              <a:ext uri="{FF2B5EF4-FFF2-40B4-BE49-F238E27FC236}">
+                <a16:creationId xmlns:a16="http://schemas.microsoft.com/office/drawing/2014/main" id="{2B01C8CC-A496-4985-A3C2-8D9A806D4322}"/>
+              </a:ext>
+            </a:extLst>
+          </p:cNvPr>
+          <p:cNvSpPr>
+            <a:spLocks xmlns:a="http://schemas.openxmlformats.org/drawingml/2006/main" noGrp="1"/>
+          </p:cNvSpPr>
+          <p:nvPr/>
+        </p:nvSpPr>
+        <p:spPr>
+          <a:xfrm xmlns:a="http://schemas.openxmlformats.org/drawingml/2006/main">
+            <a:off x="502920" y="3675888"/>
+            <a:ext cx="4846320" cy="502920"/>
           </a:xfrm>
           <a:prstGeom xmlns:a="http://schemas.openxmlformats.org/drawingml/2006/main" prst="rect">
             <a:avLst/>
@@ -16492,12 +14292,12 @@
           <a:p xmlns:a="http://schemas.openxmlformats.org/drawingml/2006/main">
             <a:pPr marL="0" indent="0">
               <a:lnSpc>
-                <a:spcPts val="1100"/>
+                <a:spcPts val="1200"/>
               </a:lnSpc>
               <a:buNone/>
             </a:pPr>
             <a:r>
-              <a:rPr sz="1000" i="1">
+              <a:rPr sz="1050">
                 <a:solidFill>
                   <a:srgbClr val="1F2937"/>
                 </a:solidFill>
@@ -16505,18 +14305,104 @@
                 <a:ea typeface="Arial"/>
                 <a:cs typeface="Arial"/>
               </a:rPr>
-              <a:t>Shared official G and a 200-step D warm-up feed both branches. The comparison arrow is B ↔ C—not A ↔ C.</a:t>
-            </a:r>
-            <a:endParaRPr sz="1000"/>
-          </a:p>
-        </p:txBody>
-      </p:sp>
-      <p:sp>
-        <p:nvSpPr>
-          <p:cNvPr id="17" name="Text 14">
-            <a:extLst xmlns:a="http://schemas.openxmlformats.org/drawingml/2006/main">
-              <a:ext uri="{FF2B5EF4-FFF2-40B4-BE49-F238E27FC236}">
-                <a16:creationId xmlns:a16="http://schemas.microsoft.com/office/drawing/2014/main" id="{02EC6E58-54C7-49E1-AF72-466AB39823B1}"/>
+              <a:t>Released generator · strict state load
+Same 30,000 paired cases and judges</a:t>
+            </a:r>
+            <a:endParaRPr sz="1050"/>
+          </a:p>
+        </p:txBody>
+      </p:sp>
+      <p:sp>
+        <p:nvSpPr>
+          <p:cNvPr id="17" name="Shape 15">
+            <a:extLst xmlns:a="http://schemas.openxmlformats.org/drawingml/2006/main">
+              <a:ext uri="{FF2B5EF4-FFF2-40B4-BE49-F238E27FC236}">
+                <a16:creationId xmlns:a16="http://schemas.microsoft.com/office/drawing/2014/main" id="{4CBC7606-5E03-4C13-9CBE-8C0A220C3D53}"/>
+              </a:ext>
+            </a:extLst>
+          </p:cNvPr>
+          <p:cNvSpPr>
+            <a:spLocks xmlns:a="http://schemas.openxmlformats.org/drawingml/2006/main" noGrp="1"/>
+          </p:cNvSpPr>
+          <p:nvPr/>
+        </p:nvSpPr>
+        <p:spPr>
+          <a:xfrm xmlns:a="http://schemas.openxmlformats.org/drawingml/2006/main">
+            <a:off x="5669280" y="3337560"/>
+            <a:ext cx="3108960" cy="914400"/>
+          </a:xfrm>
+          <a:prstGeom xmlns:a="http://schemas.openxmlformats.org/drawingml/2006/main" prst="roundRect">
+            <a:avLst>
+              <a:gd name="adj" fmla="val 6000"/>
+            </a:avLst>
+          </a:prstGeom>
+          <a:solidFill xmlns:a="http://schemas.openxmlformats.org/drawingml/2006/main">
+            <a:srgbClr val="1F3864"/>
+          </a:solidFill>
+        </p:spPr>
+        <p:txBody>
+          <a:bodyPr xmlns:a="http://schemas.openxmlformats.org/drawingml/2006/main"/>
+          <a:lstStyle xmlns:a="http://schemas.openxmlformats.org/drawingml/2006/main"/>
+          <a:p xmlns:a="http://schemas.openxmlformats.org/drawingml/2006/main">
+            <a:endParaRPr/>
+          </a:p>
+        </p:txBody>
+      </p:sp>
+      <p:sp>
+        <p:nvSpPr>
+          <p:cNvPr id="18" name="Text 16">
+            <a:extLst xmlns:a="http://schemas.openxmlformats.org/drawingml/2006/main">
+              <a:ext uri="{FF2B5EF4-FFF2-40B4-BE49-F238E27FC236}">
+                <a16:creationId xmlns:a16="http://schemas.microsoft.com/office/drawing/2014/main" id="{4C168151-475E-4BAE-B8B7-3CEAF14E6DE9}"/>
+              </a:ext>
+            </a:extLst>
+          </p:cNvPr>
+          <p:cNvSpPr>
+            <a:spLocks xmlns:a="http://schemas.openxmlformats.org/drawingml/2006/main" noGrp="1"/>
+          </p:cNvSpPr>
+          <p:nvPr/>
+        </p:nvSpPr>
+        <p:spPr>
+          <a:xfrm xmlns:a="http://schemas.openxmlformats.org/drawingml/2006/main">
+            <a:off x="5833872" y="3429000"/>
+            <a:ext cx="2779776" cy="731520"/>
+          </a:xfrm>
+          <a:prstGeom xmlns:a="http://schemas.openxmlformats.org/drawingml/2006/main" prst="rect">
+            <a:avLst/>
+          </a:prstGeom>
+          <a:noFill xmlns:a="http://schemas.openxmlformats.org/drawingml/2006/main"/>
+        </p:spPr>
+        <p:txBody>
+          <a:bodyPr xmlns:a="http://schemas.openxmlformats.org/drawingml/2006/main" wrap="square" anchor="ctr"/>
+          <a:lstStyle xmlns:a="http://schemas.openxmlformats.org/drawingml/2006/main"/>
+          <a:p xmlns:a="http://schemas.openxmlformats.org/drawingml/2006/main">
+            <a:pPr marL="0" indent="0">
+              <a:lnSpc>
+                <a:spcPts val="1200"/>
+              </a:lnSpc>
+              <a:buNone/>
+            </a:pPr>
+            <a:r>
+              <a:rPr sz="1100" b="1">
+                <a:solidFill>
+                  <a:srgbClr val="FFFFFF"/>
+                </a:solidFill>
+                <a:latin typeface="Arial"/>
+                <a:ea typeface="Arial"/>
+                <a:cs typeface="Arial"/>
+              </a:rPr>
+              <a:t>Every delta is MDD − DM-GAN under the stated CA policy; 2,933 image clusters.</a:t>
+            </a:r>
+            <a:endParaRPr sz="1100"/>
+          </a:p>
+        </p:txBody>
+      </p:sp>
+      <p:sp>
+        <p:nvSpPr>
+          <p:cNvPr id="20" name="Text 18">
+            <a:extLst xmlns:a="http://schemas.openxmlformats.org/drawingml/2006/main">
+              <a:ext uri="{FF2B5EF4-FFF2-40B4-BE49-F238E27FC236}">
+                <a16:creationId xmlns:a16="http://schemas.microsoft.com/office/drawing/2014/main" id="{8A8A924B-940B-446F-A61E-6E5DF2C31C7B}"/>
               </a:ext>
             </a:extLst>
           </p:cNvPr>
@@ -16559,10 +14445,10 @@
       </p:sp>
       <p:sp>
         <p:nvSpPr>
-          <p:cNvPr id="18" name="Shape 15">
-            <a:extLst xmlns:a="http://schemas.openxmlformats.org/drawingml/2006/main">
-              <a:ext uri="{FF2B5EF4-FFF2-40B4-BE49-F238E27FC236}">
-                <a16:creationId xmlns:a16="http://schemas.microsoft.com/office/drawing/2014/main" id="{3349BC4C-F591-486D-96E7-3BD830A105F3}"/>
+          <p:cNvPr id="21" name="Shape 19">
+            <a:extLst xmlns:a="http://schemas.openxmlformats.org/drawingml/2006/main">
+              <a:ext uri="{FF2B5EF4-FFF2-40B4-BE49-F238E27FC236}">
+                <a16:creationId xmlns:a16="http://schemas.microsoft.com/office/drawing/2014/main" id="{330F4208-A699-4B9E-8419-2220300566B9}"/>
               </a:ext>
             </a:extLst>
           </p:cNvPr>
@@ -16593,10 +14479,10 @@
       </p:sp>
       <p:sp>
         <p:nvSpPr>
-          <p:cNvPr id="19" name="Shape 16">
-            <a:extLst xmlns:a="http://schemas.openxmlformats.org/drawingml/2006/main">
-              <a:ext uri="{FF2B5EF4-FFF2-40B4-BE49-F238E27FC236}">
-                <a16:creationId xmlns:a16="http://schemas.microsoft.com/office/drawing/2014/main" id="{C18D53C2-8212-4B2C-83B1-C7AF1853E8AE}"/>
+          <p:cNvPr id="22" name="Shape 20">
+            <a:extLst xmlns:a="http://schemas.openxmlformats.org/drawingml/2006/main">
+              <a:ext uri="{FF2B5EF4-FFF2-40B4-BE49-F238E27FC236}">
+                <a16:creationId xmlns:a16="http://schemas.microsoft.com/office/drawing/2014/main" id="{A1315EB0-AC15-477B-A7DA-7B44B53CDDF3}"/>
               </a:ext>
             </a:extLst>
           </p:cNvPr>
@@ -16608,7 +14494,7 @@
         <p:spPr>
           <a:xfrm xmlns:a="http://schemas.openxmlformats.org/drawingml/2006/main">
             <a:off x="7955280" y="4864608"/>
-            <a:ext cx="696351" cy="54864"/>
+            <a:ext cx="822960" cy="54864"/>
           </a:xfrm>
           <a:prstGeom xmlns:a="http://schemas.openxmlformats.org/drawingml/2006/main" prst="rect">
             <a:avLst/>
@@ -16625,515 +14511,10 @@
           </a:p>
         </p:txBody>
       </p:sp>
-      <p:sp>
-        <p:nvSpPr>
-          <p:cNvPr id="20" name="start-to-warmup">
-            <a:extLst xmlns:a="http://schemas.openxmlformats.org/drawingml/2006/main">
-              <a:ext uri="{FF2B5EF4-FFF2-40B4-BE49-F238E27FC236}">
-                <a16:creationId xmlns:a16="http://schemas.microsoft.com/office/drawing/2014/main" id="{6A874978-36A1-438E-BBAC-0BFF9E9D6D3C}"/>
-              </a:ext>
-            </a:extLst>
-          </p:cNvPr>
-          <p:cNvSpPr>
-            <a:spLocks xmlns:a="http://schemas.openxmlformats.org/drawingml/2006/main" noGrp="1"/>
-          </p:cNvSpPr>
-          <p:nvPr/>
-        </p:nvSpPr>
-        <p:spPr>
-          <a:xfrm xmlns:a="http://schemas.openxmlformats.org/drawingml/2006/main">
-            <a:off x="5905500" y="1409700"/>
-            <a:ext cx="266700" cy="209550"/>
-          </a:xfrm>
-          <a:prstGeom xmlns:a="http://schemas.openxmlformats.org/drawingml/2006/main" prst="rightArrow">
-            <a:avLst/>
-          </a:prstGeom>
-          <a:solidFill xmlns:a="http://schemas.openxmlformats.org/drawingml/2006/main">
-            <a:srgbClr val="0F7C83"/>
-          </a:solidFill>
-          <a:ln xmlns:a="http://schemas.openxmlformats.org/drawingml/2006/main" w="0">
-            <a:solidFill>
-              <a:srgbClr val="0F7C83"/>
-            </a:solidFill>
-            <a:prstDash val="solid"/>
-          </a:ln>
-        </p:spPr>
-      </p:sp>
-      <p:sp>
-        <p:nvSpPr>
-          <p:cNvPr id="21" name="warmup-to-B">
-            <a:extLst xmlns:a="http://schemas.openxmlformats.org/drawingml/2006/main">
-              <a:ext uri="{FF2B5EF4-FFF2-40B4-BE49-F238E27FC236}">
-                <a16:creationId xmlns:a16="http://schemas.microsoft.com/office/drawing/2014/main" id="{4F4A31C9-3C54-47AA-8363-2AD88FCCDD55}"/>
-              </a:ext>
-            </a:extLst>
-          </p:cNvPr>
-          <p:cNvSpPr>
-            <a:spLocks xmlns:a="http://schemas.openxmlformats.org/drawingml/2006/main" noGrp="1"/>
-          </p:cNvSpPr>
-          <p:nvPr/>
-        </p:nvSpPr>
-        <p:spPr>
-          <a:xfrm xmlns:a="http://schemas.openxmlformats.org/drawingml/2006/main">
-            <a:off x="7200900" y="1152525"/>
-            <a:ext cx="247650" cy="171450"/>
-          </a:xfrm>
-          <a:prstGeom xmlns:a="http://schemas.openxmlformats.org/drawingml/2006/main" prst="rightArrow">
-            <a:avLst/>
-          </a:prstGeom>
-          <a:solidFill xmlns:a="http://schemas.openxmlformats.org/drawingml/2006/main">
-            <a:srgbClr val="17365D"/>
-          </a:solidFill>
-          <a:ln xmlns:a="http://schemas.openxmlformats.org/drawingml/2006/main" w="0">
-            <a:solidFill>
-              <a:srgbClr val="17365D"/>
-            </a:solidFill>
-            <a:prstDash val="solid"/>
-          </a:ln>
-        </p:spPr>
-      </p:sp>
-      <p:sp>
-        <p:nvSpPr>
-          <p:cNvPr id="22" name="warmup-to-C">
-            <a:extLst xmlns:a="http://schemas.openxmlformats.org/drawingml/2006/main">
-              <a:ext uri="{FF2B5EF4-FFF2-40B4-BE49-F238E27FC236}">
-                <a16:creationId xmlns:a16="http://schemas.microsoft.com/office/drawing/2014/main" id="{07547E76-3B0B-4F48-A75A-9D465D7D2F33}"/>
-              </a:ext>
-            </a:extLst>
-          </p:cNvPr>
-          <p:cNvSpPr>
-            <a:spLocks xmlns:a="http://schemas.openxmlformats.org/drawingml/2006/main" noGrp="1"/>
-          </p:cNvSpPr>
-          <p:nvPr/>
-        </p:nvSpPr>
-        <p:spPr>
-          <a:xfrm xmlns:a="http://schemas.openxmlformats.org/drawingml/2006/main">
-            <a:off x="7200900" y="1857375"/>
-            <a:ext cx="247650" cy="171450"/>
-          </a:xfrm>
-          <a:prstGeom xmlns:a="http://schemas.openxmlformats.org/drawingml/2006/main" prst="rightArrow">
-            <a:avLst/>
-          </a:prstGeom>
-          <a:solidFill xmlns:a="http://schemas.openxmlformats.org/drawingml/2006/main">
-            <a:srgbClr val="C95A00"/>
-          </a:solidFill>
-          <a:ln xmlns:a="http://schemas.openxmlformats.org/drawingml/2006/main" w="0">
-            <a:solidFill>
-              <a:srgbClr val="C95A00"/>
-            </a:solidFill>
-            <a:prstDash val="solid"/>
-          </a:ln>
-        </p:spPr>
-      </p:sp>
-      <p:sp>
-        <p:nvSpPr>
-          <p:cNvPr id="23" name="reference-node">
-            <a:extLst xmlns:a="http://schemas.openxmlformats.org/drawingml/2006/main">
-              <a:ext uri="{FF2B5EF4-FFF2-40B4-BE49-F238E27FC236}">
-                <a16:creationId xmlns:a16="http://schemas.microsoft.com/office/drawing/2014/main" id="{06ACC0EA-EA96-4B19-BDAB-35CDE23EBB3E}"/>
-              </a:ext>
-            </a:extLst>
-          </p:cNvPr>
-          <p:cNvSpPr>
-            <a:spLocks xmlns:a="http://schemas.openxmlformats.org/drawingml/2006/main" noGrp="1"/>
-          </p:cNvSpPr>
-          <p:nvPr/>
-        </p:nvSpPr>
-        <p:spPr>
-          <a:xfrm xmlns:a="http://schemas.openxmlformats.org/drawingml/2006/main">
-            <a:off x="4810125" y="1200150"/>
-            <a:ext cx="1066800" cy="647700"/>
-          </a:xfrm>
-          <a:prstGeom xmlns:a="http://schemas.openxmlformats.org/drawingml/2006/main" prst="roundRect">
-            <a:avLst>
-              <a:gd name="adj" fmla="val 13235"/>
-            </a:avLst>
-          </a:prstGeom>
-          <a:solidFill xmlns:a="http://schemas.openxmlformats.org/drawingml/2006/main">
-            <a:srgbClr val="EAF1F8"/>
-          </a:solidFill>
-          <a:ln xmlns:a="http://schemas.openxmlformats.org/drawingml/2006/main" w="12383">
-            <a:solidFill>
-              <a:srgbClr val="17365D"/>
-            </a:solidFill>
-            <a:prstDash val="solid"/>
-          </a:ln>
-        </p:spPr>
-        <p:txBody>
-          <a:bodyPr xmlns:a="http://schemas.openxmlformats.org/drawingml/2006/main" lIns="47625" tIns="47625" rIns="47625" bIns="47625" anchor="ctr">
-            <a:normAutofit fontScale="100000"/>
-          </a:bodyPr>
-          <a:lstStyle xmlns:a="http://schemas.openxmlformats.org/drawingml/2006/main"/>
-          <a:p xmlns:a="http://schemas.openxmlformats.org/drawingml/2006/main">
-            <a:pPr algn="ctr">
-              <a:defRPr sz="1050" b="1">
-                <a:solidFill>
-                  <a:srgbClr val="17365D"/>
-                </a:solidFill>
-                <a:latin typeface="Arial"/>
-                <a:ea typeface="Arial"/>
-                <a:cs typeface="Arial"/>
-              </a:defRPr>
-            </a:pPr>
-            <a:r>
-              <a:rPr sz="1050" b="1">
-                <a:solidFill>
-                  <a:srgbClr val="17365D"/>
-                </a:solidFill>
-                <a:latin typeface="Arial"/>
-                <a:ea typeface="Arial"/>
-                <a:cs typeface="Arial"/>
-              </a:rPr>
-              <a:t>A · Released G</a:t>
-            </a:r>
-          </a:p>
-          <a:p xmlns:a="http://schemas.openxmlformats.org/drawingml/2006/main">
-            <a:pPr algn="ctr">
-              <a:defRPr sz="1050" b="1">
-                <a:solidFill>
-                  <a:srgbClr val="17365D"/>
-                </a:solidFill>
-                <a:latin typeface="Arial"/>
-                <a:ea typeface="Arial"/>
-                <a:cs typeface="Arial"/>
-              </a:defRPr>
-            </a:pPr>
-            <a:r>
-              <a:rPr sz="1050" b="1">
-                <a:solidFill>
-                  <a:srgbClr val="17365D"/>
-                </a:solidFill>
-                <a:latin typeface="Arial"/>
-                <a:ea typeface="Arial"/>
-                <a:cs typeface="Arial"/>
-              </a:rPr>
-              <a:t>reference only</a:t>
-            </a:r>
-          </a:p>
-        </p:txBody>
-      </p:sp>
-      <p:sp>
-        <p:nvSpPr>
-          <p:cNvPr id="24" name="warmup-node">
-            <a:extLst xmlns:a="http://schemas.openxmlformats.org/drawingml/2006/main">
-              <a:ext uri="{FF2B5EF4-FFF2-40B4-BE49-F238E27FC236}">
-                <a16:creationId xmlns:a16="http://schemas.microsoft.com/office/drawing/2014/main" id="{802C3EC4-9667-40B3-9A07-DF19F4FD7B8A}"/>
-              </a:ext>
-            </a:extLst>
-          </p:cNvPr>
-          <p:cNvSpPr>
-            <a:spLocks xmlns:a="http://schemas.openxmlformats.org/drawingml/2006/main" noGrp="1"/>
-          </p:cNvSpPr>
-          <p:nvPr/>
-        </p:nvSpPr>
-        <p:spPr>
-          <a:xfrm xmlns:a="http://schemas.openxmlformats.org/drawingml/2006/main">
-            <a:off x="6191250" y="1200150"/>
-            <a:ext cx="990600" cy="647700"/>
-          </a:xfrm>
-          <a:prstGeom xmlns:a="http://schemas.openxmlformats.org/drawingml/2006/main" prst="roundRect">
-            <a:avLst>
-              <a:gd name="adj" fmla="val 13235"/>
-            </a:avLst>
-          </a:prstGeom>
-          <a:solidFill xmlns:a="http://schemas.openxmlformats.org/drawingml/2006/main">
-            <a:srgbClr val="E6F3F3"/>
-          </a:solidFill>
-          <a:ln xmlns:a="http://schemas.openxmlformats.org/drawingml/2006/main" w="12383">
-            <a:solidFill>
-              <a:srgbClr val="0F7C83"/>
-            </a:solidFill>
-            <a:prstDash val="solid"/>
-          </a:ln>
-        </p:spPr>
-        <p:txBody>
-          <a:bodyPr xmlns:a="http://schemas.openxmlformats.org/drawingml/2006/main" lIns="47625" tIns="47625" rIns="47625" bIns="47625" anchor="ctr">
-            <a:normAutofit fontScale="100000"/>
-          </a:bodyPr>
-          <a:lstStyle xmlns:a="http://schemas.openxmlformats.org/drawingml/2006/main"/>
-          <a:p xmlns:a="http://schemas.openxmlformats.org/drawingml/2006/main">
-            <a:pPr algn="ctr">
-              <a:defRPr sz="1050" b="1">
-                <a:solidFill>
-                  <a:srgbClr val="0F7C83"/>
-                </a:solidFill>
-                <a:latin typeface="Arial"/>
-                <a:ea typeface="Arial"/>
-                <a:cs typeface="Arial"/>
-              </a:defRPr>
-            </a:pPr>
-            <a:r>
-              <a:rPr sz="1050" b="1">
-                <a:solidFill>
-                  <a:srgbClr val="0F7C83"/>
-                </a:solidFill>
-                <a:latin typeface="Arial"/>
-                <a:ea typeface="Arial"/>
-                <a:cs typeface="Arial"/>
-              </a:rPr>
-              <a:t>Shared</a:t>
-            </a:r>
-          </a:p>
-          <a:p xmlns:a="http://schemas.openxmlformats.org/drawingml/2006/main">
-            <a:pPr algn="ctr">
-              <a:defRPr sz="1050" b="1">
-                <a:solidFill>
-                  <a:srgbClr val="0F7C83"/>
-                </a:solidFill>
-                <a:latin typeface="Arial"/>
-                <a:ea typeface="Arial"/>
-                <a:cs typeface="Arial"/>
-              </a:defRPr>
-            </a:pPr>
-            <a:r>
-              <a:rPr sz="1050" b="1">
-                <a:solidFill>
-                  <a:srgbClr val="0F7C83"/>
-                </a:solidFill>
-                <a:latin typeface="Arial"/>
-                <a:ea typeface="Arial"/>
-                <a:cs typeface="Arial"/>
-              </a:rPr>
-              <a:t>D warm-up</a:t>
-            </a:r>
-          </a:p>
-        </p:txBody>
-      </p:sp>
-      <p:sp>
-        <p:nvSpPr>
-          <p:cNvPr id="25" name="baseline-node">
-            <a:extLst xmlns:a="http://schemas.openxmlformats.org/drawingml/2006/main">
-              <a:ext uri="{FF2B5EF4-FFF2-40B4-BE49-F238E27FC236}">
-                <a16:creationId xmlns:a16="http://schemas.microsoft.com/office/drawing/2014/main" id="{38350AB2-D5E9-404C-80B5-7D9071D50F4F}"/>
-              </a:ext>
-            </a:extLst>
-          </p:cNvPr>
-          <p:cNvSpPr>
-            <a:spLocks xmlns:a="http://schemas.openxmlformats.org/drawingml/2006/main" noGrp="1"/>
-          </p:cNvSpPr>
-          <p:nvPr/>
-        </p:nvSpPr>
-        <p:spPr>
-          <a:xfrm xmlns:a="http://schemas.openxmlformats.org/drawingml/2006/main">
-            <a:off x="7477125" y="1000125"/>
-            <a:ext cx="1143000" cy="533400"/>
-          </a:xfrm>
-          <a:prstGeom xmlns:a="http://schemas.openxmlformats.org/drawingml/2006/main" prst="roundRect">
-            <a:avLst>
-              <a:gd name="adj" fmla="val 16071"/>
-            </a:avLst>
-          </a:prstGeom>
-          <a:solidFill xmlns:a="http://schemas.openxmlformats.org/drawingml/2006/main">
-            <a:srgbClr val="EAF1F8"/>
-          </a:solidFill>
-          <a:ln xmlns:a="http://schemas.openxmlformats.org/drawingml/2006/main" w="12383">
-            <a:solidFill>
-              <a:srgbClr val="17365D"/>
-            </a:solidFill>
-            <a:prstDash val="solid"/>
-          </a:ln>
-        </p:spPr>
-        <p:txBody>
-          <a:bodyPr xmlns:a="http://schemas.openxmlformats.org/drawingml/2006/main" lIns="47625" tIns="47625" rIns="47625" bIns="47625" anchor="ctr">
-            <a:normAutofit fontScale="100000"/>
-          </a:bodyPr>
-          <a:lstStyle xmlns:a="http://schemas.openxmlformats.org/drawingml/2006/main"/>
-          <a:p xmlns:a="http://schemas.openxmlformats.org/drawingml/2006/main">
-            <a:pPr algn="ctr">
-              <a:defRPr sz="1050" b="1">
-                <a:solidFill>
-                  <a:srgbClr val="17365D"/>
-                </a:solidFill>
-                <a:latin typeface="Arial"/>
-                <a:ea typeface="Arial"/>
-                <a:cs typeface="Arial"/>
-              </a:defRPr>
-            </a:pPr>
-            <a:r>
-              <a:rPr sz="1050" b="1">
-                <a:solidFill>
-                  <a:srgbClr val="17365D"/>
-                </a:solidFill>
-                <a:latin typeface="Arial"/>
-                <a:ea typeface="Arial"/>
-                <a:cs typeface="Arial"/>
-              </a:rPr>
-              <a:t>B · Control</a:t>
-            </a:r>
-          </a:p>
-          <a:p xmlns:a="http://schemas.openxmlformats.org/drawingml/2006/main">
-            <a:pPr algn="ctr">
-              <a:defRPr sz="1050" b="1">
-                <a:solidFill>
-                  <a:srgbClr val="17365D"/>
-                </a:solidFill>
-                <a:latin typeface="Arial"/>
-                <a:ea typeface="Arial"/>
-                <a:cs typeface="Arial"/>
-              </a:defRPr>
-            </a:pPr>
-            <a:r>
-              <a:rPr sz="1050" b="1">
-                <a:solidFill>
-                  <a:srgbClr val="17365D"/>
-                </a:solidFill>
-                <a:latin typeface="Arial"/>
-                <a:ea typeface="Arial"/>
-                <a:cs typeface="Arial"/>
-              </a:rPr>
-              <a:t>λpart = 0</a:t>
-            </a:r>
-          </a:p>
-        </p:txBody>
-      </p:sp>
-      <p:sp>
-        <p:nvSpPr>
-          <p:cNvPr id="26" name="part-node">
-            <a:extLst xmlns:a="http://schemas.openxmlformats.org/drawingml/2006/main">
-              <a:ext uri="{FF2B5EF4-FFF2-40B4-BE49-F238E27FC236}">
-                <a16:creationId xmlns:a16="http://schemas.microsoft.com/office/drawing/2014/main" id="{6BE25A1E-19AB-425B-9349-D6F6FB01BD58}"/>
-              </a:ext>
-            </a:extLst>
-          </p:cNvPr>
-          <p:cNvSpPr>
-            <a:spLocks xmlns:a="http://schemas.openxmlformats.org/drawingml/2006/main" noGrp="1"/>
-          </p:cNvSpPr>
-          <p:nvPr/>
-        </p:nvSpPr>
-        <p:spPr>
-          <a:xfrm xmlns:a="http://schemas.openxmlformats.org/drawingml/2006/main">
-            <a:off x="7477125" y="1695450"/>
-            <a:ext cx="1143000" cy="533400"/>
-          </a:xfrm>
-          <a:prstGeom xmlns:a="http://schemas.openxmlformats.org/drawingml/2006/main" prst="roundRect">
-            <a:avLst>
-              <a:gd name="adj" fmla="val 16071"/>
-            </a:avLst>
-          </a:prstGeom>
-          <a:solidFill xmlns:a="http://schemas.openxmlformats.org/drawingml/2006/main">
-            <a:srgbClr val="FCE8D8"/>
-          </a:solidFill>
-          <a:ln xmlns:a="http://schemas.openxmlformats.org/drawingml/2006/main" w="12383">
-            <a:solidFill>
-              <a:srgbClr val="C95A00"/>
-            </a:solidFill>
-            <a:prstDash val="solid"/>
-          </a:ln>
-        </p:spPr>
-        <p:txBody>
-          <a:bodyPr xmlns:a="http://schemas.openxmlformats.org/drawingml/2006/main" lIns="47625" tIns="47625" rIns="47625" bIns="47625" anchor="ctr">
-            <a:normAutofit fontScale="100000"/>
-          </a:bodyPr>
-          <a:lstStyle xmlns:a="http://schemas.openxmlformats.org/drawingml/2006/main"/>
-          <a:p xmlns:a="http://schemas.openxmlformats.org/drawingml/2006/main">
-            <a:pPr algn="ctr">
-              <a:defRPr sz="1050" b="1">
-                <a:solidFill>
-                  <a:srgbClr val="C95A00"/>
-                </a:solidFill>
-                <a:latin typeface="Arial"/>
-                <a:ea typeface="Arial"/>
-                <a:cs typeface="Arial"/>
-              </a:defRPr>
-            </a:pPr>
-            <a:r>
-              <a:rPr sz="1050" b="1">
-                <a:solidFill>
-                  <a:srgbClr val="C95A00"/>
-                </a:solidFill>
-                <a:latin typeface="Arial"/>
-                <a:ea typeface="Arial"/>
-                <a:cs typeface="Arial"/>
-              </a:rPr>
-              <a:t>C · Part-aware</a:t>
-            </a:r>
-          </a:p>
-          <a:p xmlns:a="http://schemas.openxmlformats.org/drawingml/2006/main">
-            <a:pPr algn="ctr">
-              <a:defRPr sz="1050" b="1">
-                <a:solidFill>
-                  <a:srgbClr val="C95A00"/>
-                </a:solidFill>
-                <a:latin typeface="Arial"/>
-                <a:ea typeface="Arial"/>
-                <a:cs typeface="Arial"/>
-              </a:defRPr>
-            </a:pPr>
-            <a:r>
-              <a:rPr sz="1050" b="1">
-                <a:solidFill>
-                  <a:srgbClr val="C95A00"/>
-                </a:solidFill>
-                <a:latin typeface="Arial"/>
-                <a:ea typeface="Arial"/>
-                <a:cs typeface="Arial"/>
-              </a:rPr>
-              <a:t>λpart = 0.05</a:t>
-            </a:r>
-          </a:p>
-        </p:txBody>
-      </p:sp>
-      <p:sp>
-        <p:nvSpPr>
-          <p:cNvPr id="27" name="valid-comparison">
-            <a:extLst xmlns:a="http://schemas.openxmlformats.org/drawingml/2006/main">
-              <a:ext uri="{FF2B5EF4-FFF2-40B4-BE49-F238E27FC236}">
-                <a16:creationId xmlns:a16="http://schemas.microsoft.com/office/drawing/2014/main" id="{86F32900-BBEF-446F-93F0-1B86511B8627}"/>
-              </a:ext>
-            </a:extLst>
-          </p:cNvPr>
-          <p:cNvSpPr>
-            <a:spLocks xmlns:a="http://schemas.openxmlformats.org/drawingml/2006/main" noGrp="1"/>
-          </p:cNvSpPr>
-          <p:nvPr/>
-        </p:nvSpPr>
-        <p:spPr>
-          <a:xfrm xmlns:a="http://schemas.openxmlformats.org/drawingml/2006/main">
-            <a:off x="5667375" y="2343150"/>
-            <a:ext cx="2143125" cy="266700"/>
-          </a:xfrm>
-          <a:prstGeom xmlns:a="http://schemas.openxmlformats.org/drawingml/2006/main" prst="rect">
-            <a:avLst/>
-          </a:prstGeom>
-          <a:noFill xmlns:a="http://schemas.openxmlformats.org/drawingml/2006/main"/>
-          <a:ln xmlns:a="http://schemas.openxmlformats.org/drawingml/2006/main" w="0">
-            <a:noFill/>
-            <a:prstDash val="solid"/>
-          </a:ln>
-        </p:spPr>
-        <p:txBody>
-          <a:bodyPr xmlns:a="http://schemas.openxmlformats.org/drawingml/2006/main" lIns="19050" tIns="19050" rIns="19050" bIns="19050" anchor="ctr">
-            <a:normAutofit fontScale="100000"/>
-          </a:bodyPr>
-          <a:lstStyle xmlns:a="http://schemas.openxmlformats.org/drawingml/2006/main"/>
-          <a:p xmlns:a="http://schemas.openxmlformats.org/drawingml/2006/main">
-            <a:pPr algn="ctr">
-              <a:defRPr sz="1125" b="1">
-                <a:solidFill>
-                  <a:srgbClr val="C95A00"/>
-                </a:solidFill>
-                <a:latin typeface="Arial"/>
-                <a:ea typeface="Arial"/>
-                <a:cs typeface="Arial"/>
-              </a:defRPr>
-            </a:pPr>
-            <a:r>
-              <a:rPr sz="1125" b="1">
-                <a:solidFill>
-                  <a:srgbClr val="C95A00"/>
-                </a:solidFill>
-                <a:latin typeface="Arial"/>
-                <a:ea typeface="Arial"/>
-                <a:cs typeface="Arial"/>
-              </a:rPr>
-              <a:t>Only B ↔ C is causal</a:t>
-            </a:r>
-          </a:p>
-        </p:txBody>
-      </p:sp>
     </p:spTree>
     <p:extLst>
       <p:ext uri="{BB962C8B-B14F-4D97-AF65-F5344CB8AC3E}">
-        <p14:creationId xmlns:p14="http://schemas.microsoft.com/office/powerpoint/2010/main" val="1142425693"/>
+        <p14:creationId xmlns:p14="http://schemas.microsoft.com/office/powerpoint/2010/main" val="2086258329"/>
       </p:ext>
     </p:extLst>
   </p:cSld>
@@ -17271,7 +14652,7 @@
               <a:buNone/>
             </a:pPr>
             <a:r>
-              <a:rPr sz="2100" b="1">
+              <a:rPr sz="1875" b="1">
                 <a:solidFill>
                   <a:srgbClr val="1F2937"/>
                 </a:solidFill>
@@ -17279,7 +14660,7 @@
                 <a:ea typeface="Arial"/>
                 <a:cs typeface="Arial"/>
               </a:rPr>
-              <a:t>B and C Received the Same Training Opportunity</a:t>
+              <a:t>Two CA Protocols Answer Two Different Questions</a:t>
             </a:r>
             <a:endParaRPr sz="2100"/>
           </a:p>
@@ -17325,7 +14706,7 @@
                 <a:ea typeface="Arial"/>
                 <a:cs typeface="Arial"/>
               </a:rPr>
-              <a:t>Every paired update differed only by the part-aware loss</a:t>
+              <a:t>Conditioning augmentation is the key inference-policy difference</a:t>
             </a:r>
             <a:endParaRPr sz="1150"/>
           </a:p>
@@ -17449,7 +14830,7 @@
                 <a:ea typeface="Arial"/>
                 <a:cs typeface="Arial"/>
               </a:rPr>
-              <a:t>Shared Start</a:t>
+              <a:t>NATIVE BEHAVIOR</a:t>
             </a:r>
             <a:endParaRPr sz="1250"/>
           </a:p>
@@ -17498,10 +14879,9 @@
                 <a:ea typeface="Arial"/>
                 <a:cs typeface="Arial"/>
               </a:rPr>
-              <a:t>Official generator
-200-step D warm-up per seed
-Same G, D, and optimizer state
-Seeds 20260824–20260826</a:t>
+              <a:t>DM-GAN: sample c ~ N(μ, σ)
+MDD: use c = μ
+What happens when each release runs as published?</a:t>
             </a:r>
             <a:endParaRPr sz="1200"/>
           </a:p>
@@ -17625,7 +15005,7 @@
                 <a:ea typeface="Arial"/>
                 <a:cs typeface="Arial"/>
               </a:rPr>
-              <a:t>Locked Training</a:t>
+              <a:t>MATCHED MEAN</a:t>
             </a:r>
             <a:endParaRPr sz="1250"/>
           </a:p>
@@ -17674,10 +15054,9 @@
                 <a:ea typeface="Arial"/>
                 <a:cs typeface="Arial"/>
               </a:rPr>
-              <a:t>Same batches, captions, crop/flip, z, and RNG
-Same frozen DAMSM and EMA
-1,200 updates · batch 10
-G lr 2e−5 · D lr 2e−4</a:t>
+              <a:t>DM-GAN: use c = μ
+MDD: use c = μ
+Which checkpoint is better under the same policy?</a:t>
             </a:r>
             <a:endParaRPr sz="1100"/>
           </a:p>
@@ -17765,7 +15144,7 @@
                 <a:ea typeface="Arial"/>
                 <a:cs typeface="Arial"/>
               </a:rPr>
-              <a:t>Trainable Scope</a:t>
+              <a:t>INTERPRETATION RULE</a:t>
             </a:r>
             <a:endParaRPr sz="1200"/>
           </a:p>
@@ -17814,7 +15193,7 @@
                 <a:ea typeface="Arial"/>
                 <a:cs typeface="Arial"/>
               </a:rPr>
-              <a:t>Same refine_128/refine_256 modules and 128/256 image heads. C alone adds 0.05 Lpart.</a:t>
+              <a:t>Matched mean isolates the checkpoint comparison. Native behavior includes checkpoint + policy differences.</a:t>
             </a:r>
             <a:endParaRPr sz="1050"/>
           </a:p>
@@ -17899,7 +15278,7 @@
                 <a:ea typeface="Arial"/>
                 <a:cs typeface="Arial"/>
               </a:rPr>
-              <a:t>Controlled fine-tuning—not a new full 800-epoch training claim.</a:t>
+              <a:t>Author checkpoints still come from different training configurations.</a:t>
             </a:r>
             <a:endParaRPr sz="1100"/>
           </a:p>
@@ -18160,7 +15539,7 @@
               <a:buNone/>
             </a:pPr>
             <a:r>
-              <a:rPr sz="2100" b="1">
+              <a:rPr sz="1875" b="1">
                 <a:solidFill>
                   <a:srgbClr val="1F2937"/>
                 </a:solidFill>
@@ -18168,7 +15547,7 @@
                 <a:ea typeface="Arial"/>
                 <a:cs typeface="Arial"/>
               </a:rPr>
-              <a:t>One Fixed Evaluation Tests Target and Safeguards</a:t>
+              <a:t>Thirty Thousand Samples Test Both Quality and Alignment</a:t>
             </a:r>
             <a:endParaRPr sz="2100"/>
           </a:p>
@@ -18214,7 +15593,7 @@
                 <a:ea typeface="Arial"/>
                 <a:cs typeface="Arial"/>
               </a:rPr>
-              <a:t>30,000 paired generations · same captions, noise, negatives</a:t>
+              <a:t>One fixed protocol · same captions, noise, negatives, and evaluators</a:t>
             </a:r>
             <a:endParaRPr sz="1150"/>
           </a:p>
@@ -18338,7 +15717,7 @@
                 <a:ea typeface="Arial"/>
                 <a:cs typeface="Arial"/>
               </a:rPr>
-              <a:t>Targeted Test</a:t>
+              <a:t>FID ↓</a:t>
             </a:r>
             <a:endParaRPr sz="1250"/>
           </a:p>
@@ -18387,10 +15766,9 @@
                 <a:ea typeface="Arial"/>
                 <a:cs typeface="Arial"/>
               </a:rPr>
-              <a:t>Part–colour swap accuracy
-Correct caption vs 9 colour-swapped alternatives
-24,924 eligible cases
-Higher is better</a:t>
+              <a:t>Distance to official CUB real-image features
+Quality + distribution match
+Lower is better</a:t>
             </a:r>
             <a:endParaRPr sz="1200"/>
           </a:p>
@@ -18514,7 +15892,7 @@
                 <a:ea typeface="Arial"/>
                 <a:cs typeface="Arial"/>
               </a:rPr>
-              <a:t>Global + Mechanism</a:t>
+              <a:t>R-PRECISION ↑</a:t>
             </a:r>
             <a:endParaRPr sz="1250"/>
           </a:p>
@@ -18563,10 +15941,9 @@
                 <a:ea typeface="Arial"/>
                 <a:cs typeface="Arial"/>
               </a:rPr>
-              <a:t>FID · realism/diversity · lower better
-R-precision · text match · higher better
-Attention CE + support mass · mechanism proxy
-28,555 active attention cases</a:t>
+              <a:t>Correct caption vs 99 other-class captions
+Text–image alignment
+Higher is better</a:t>
             </a:r>
             <a:endParaRPr sz="1100"/>
           </a:p>
@@ -18654,7 +16031,7 @@
                 <a:ea typeface="Arial"/>
                 <a:cs typeface="Arial"/>
               </a:rPr>
-              <a:t>Paired Protocol</a:t>
+              <a:t>UNCERTAINTY + PASS</a:t>
             </a:r>
             <a:endParaRPr sz="1200"/>
           </a:p>
@@ -18703,7 +16080,8 @@
                 <a:ea typeface="Arial"/>
                 <a:cs typeface="Arial"/>
               </a:rPr>
-              <a:t>Evaluation seed 20260902 · same 29,330-caption bank (670 wrap once) · cluster by image key</a:t>
+              <a:t>10,000 bootstrap resamples · 2,933 image clusters
+STRICT PASS = FID lower AND R CI lower bound &gt; −1.0 pp</a:t>
             </a:r>
             <a:endParaRPr sz="1050"/>
           </a:p>
@@ -18788,7 +16166,7 @@
                 <a:ea typeface="Arial"/>
                 <a:cs typeface="Arial"/>
               </a:rPr>
-              <a:t>DAMSM scoring is useful, but it is not independent human validation.</a:t>
+              <a:t>ImageNet IS is an internal health check, not a paper-comparable metric.</a:t>
             </a:r>
             <a:endParaRPr sz="1100"/>
           </a:p>
